--- a/docs/pitch/ProofyX_Investor_Deck.pptx
+++ b/docs/pitch/ProofyX_Investor_Deck.pptx
@@ -1006,7 +1006,7 @@
           <a:lstStyle/>
           <a:p>
             <a:r>
-              <a:t>35s. Lead with the human number on the right: people catch one in a thousand. Then the money. Land on: this is already a booked loss line, not a future risk.</a:t>
+              <a:t>35s. Lead with the confidence gap on the right: people are sure they can tell, and they cannot. Then the money. Land on: this is already a booked loss line, not a future risk.</a:t>
             </a:r>
           </a:p>
         </p:txBody>
@@ -4516,9 +4516,17 @@
           <a:prstGeom prst="rect">
             <a:avLst/>
           </a:prstGeom>
-          <a:solidFill>
-            <a:srgbClr val="0E042D"/>
-          </a:solidFill>
+          <a:gradFill rotWithShape="1">
+            <a:gsLst>
+              <a:gs pos="0">
+                <a:srgbClr val="1A0C42"/>
+              </a:gs>
+              <a:gs pos="100000">
+                <a:srgbClr val="08021C"/>
+              </a:gs>
+            </a:gsLst>
+            <a:lin scaled="0" ang="2700000"/>
+          </a:gradFill>
           <a:ln>
             <a:noFill/>
           </a:ln>
@@ -4546,9 +4554,105 @@
           </a:p>
         </p:txBody>
       </p:sp>
+      <p:sp>
+        <p:nvSpPr>
+          <p:cNvPr id="3" name="Oval 2"/>
+          <p:cNvSpPr/>
+          <p:nvPr/>
+        </p:nvSpPr>
+        <p:spPr>
+          <a:xfrm>
+            <a:off x="7406640" y="-3840480"/>
+            <a:ext cx="7863840" cy="7863840"/>
+          </a:xfrm>
+          <a:prstGeom prst="ellipse">
+            <a:avLst/>
+          </a:prstGeom>
+          <a:solidFill>
+            <a:srgbClr val="8B6CFF">
+              <a:alpha val="11000"/>
+            </a:srgbClr>
+          </a:solidFill>
+          <a:ln>
+            <a:noFill/>
+          </a:ln>
+          <a:effectLst>
+            <a:softEdge rad="2011680"/>
+          </a:effectLst>
+        </p:spPr>
+        <p:style>
+          <a:lnRef idx="1">
+            <a:schemeClr val="accent1"/>
+          </a:lnRef>
+          <a:fillRef idx="3">
+            <a:schemeClr val="accent1"/>
+          </a:fillRef>
+          <a:effectRef idx="2">
+            <a:schemeClr val="accent1"/>
+          </a:effectRef>
+          <a:fontRef idx="minor">
+            <a:schemeClr val="lt1"/>
+          </a:fontRef>
+        </p:style>
+        <p:txBody>
+          <a:bodyPr rtlCol="0" anchor="ctr"/>
+          <a:lstStyle/>
+          <a:p>
+            <a:pPr algn="ctr"/>
+          </a:p>
+        </p:txBody>
+      </p:sp>
+      <p:sp>
+        <p:nvSpPr>
+          <p:cNvPr id="4" name="Oval 3"/>
+          <p:cNvSpPr/>
+          <p:nvPr/>
+        </p:nvSpPr>
+        <p:spPr>
+          <a:xfrm>
+            <a:off x="-3383280" y="3840480"/>
+            <a:ext cx="6400800" cy="6400800"/>
+          </a:xfrm>
+          <a:prstGeom prst="ellipse">
+            <a:avLst/>
+          </a:prstGeom>
+          <a:solidFill>
+            <a:srgbClr val="4FD1C5">
+              <a:alpha val="7000"/>
+            </a:srgbClr>
+          </a:solidFill>
+          <a:ln>
+            <a:noFill/>
+          </a:ln>
+          <a:effectLst>
+            <a:softEdge rad="1828800"/>
+          </a:effectLst>
+        </p:spPr>
+        <p:style>
+          <a:lnRef idx="1">
+            <a:schemeClr val="accent1"/>
+          </a:lnRef>
+          <a:fillRef idx="3">
+            <a:schemeClr val="accent1"/>
+          </a:fillRef>
+          <a:effectRef idx="2">
+            <a:schemeClr val="accent1"/>
+          </a:effectRef>
+          <a:fontRef idx="minor">
+            <a:schemeClr val="lt1"/>
+          </a:fontRef>
+        </p:style>
+        <p:txBody>
+          <a:bodyPr rtlCol="0" anchor="ctr"/>
+          <a:lstStyle/>
+          <a:p>
+            <a:pPr algn="ctr"/>
+          </a:p>
+        </p:txBody>
+      </p:sp>
       <p:pic>
         <p:nvPicPr>
-          <p:cNvPr id="3" name="Picture 2" descr="logo_white.png"/>
+          <p:cNvPr id="5" name="Picture 4" descr="logo_white.png"/>
           <p:cNvPicPr>
             <a:picLocks noChangeAspect="1"/>
           </p:cNvPicPr>
@@ -4572,62 +4676,7 @@
       </p:pic>
       <p:sp>
         <p:nvSpPr>
-          <p:cNvPr id="4" name="Rounded Rectangle 3"/>
-          <p:cNvSpPr/>
-          <p:nvPr/>
-        </p:nvSpPr>
-        <p:spPr>
-          <a:xfrm>
-            <a:off x="10088575" y="402336"/>
-            <a:ext cx="1572768" cy="329184"/>
-          </a:xfrm>
-          <a:prstGeom prst="roundRect">
-            <a:avLst>
-              <a:gd name="adj" fmla="val 50000"/>
-            </a:avLst>
-          </a:prstGeom>
-          <a:noFill/>
-          <a:ln w="12700">
-            <a:solidFill>
-              <a:srgbClr val="FFF6ED"/>
-            </a:solidFill>
-          </a:ln>
-          <a:effectLst/>
-        </p:spPr>
-        <p:style>
-          <a:lnRef idx="1">
-            <a:schemeClr val="accent1"/>
-          </a:lnRef>
-          <a:fillRef idx="3">
-            <a:schemeClr val="accent1"/>
-          </a:fillRef>
-          <a:effectRef idx="2">
-            <a:schemeClr val="accent1"/>
-          </a:effectRef>
-          <a:fontRef idx="minor">
-            <a:schemeClr val="lt1"/>
-          </a:fontRef>
-        </p:style>
-        <p:txBody>
-          <a:bodyPr rtlCol="0" anchor="ctr" lIns="0" rIns="0" tIns="0" bIns="0"/>
-          <a:lstStyle/>
-          <a:p>
-            <a:pPr algn="ctr"/>
-            <a:r>
-              <a:rPr sz="1150">
-                <a:solidFill>
-                  <a:srgbClr val="FFF6ED"/>
-                </a:solidFill>
-                <a:latin typeface="Segoe UI"/>
-              </a:rPr>
-              <a:t>August 8, 2026</a:t>
-            </a:r>
-          </a:p>
-        </p:txBody>
-      </p:sp>
-      <p:sp>
-        <p:nvSpPr>
-          <p:cNvPr id="5" name="TextBox 4"/>
+          <p:cNvPr id="6" name="TextBox 5"/>
           <p:cNvSpPr txBox="1"/>
           <p:nvPr/>
         </p:nvSpPr>
@@ -4669,7 +4718,7 @@
       </p:sp>
       <p:sp>
         <p:nvSpPr>
-          <p:cNvPr id="6" name="TextBox 5"/>
+          <p:cNvPr id="7" name="TextBox 6"/>
           <p:cNvSpPr txBox="1"/>
           <p:nvPr/>
         </p:nvSpPr>
@@ -4730,7 +4779,7 @@
       </p:sp>
       <p:pic>
         <p:nvPicPr>
-          <p:cNvPr id="7" name="Picture 6" descr="prism.png"/>
+          <p:cNvPr id="8" name="Picture 7" descr="prism.png"/>
           <p:cNvPicPr>
             <a:picLocks noChangeAspect="1"/>
           </p:cNvPicPr>
@@ -4754,7 +4803,7 @@
       </p:pic>
       <p:sp>
         <p:nvSpPr>
-          <p:cNvPr id="8" name="Rounded Rectangle 7"/>
+          <p:cNvPr id="9" name="Rounded Rectangle 8"/>
           <p:cNvSpPr/>
           <p:nvPr/>
         </p:nvSpPr>
@@ -4809,7 +4858,7 @@
       </p:sp>
       <p:sp>
         <p:nvSpPr>
-          <p:cNvPr id="9" name="Rounded Rectangle 8"/>
+          <p:cNvPr id="10" name="Rounded Rectangle 9"/>
           <p:cNvSpPr/>
           <p:nvPr/>
         </p:nvSpPr>
@@ -4896,9 +4945,17 @@
           <a:prstGeom prst="rect">
             <a:avLst/>
           </a:prstGeom>
-          <a:solidFill>
-            <a:srgbClr val="0E042D"/>
-          </a:solidFill>
+          <a:gradFill rotWithShape="1">
+            <a:gsLst>
+              <a:gs pos="0">
+                <a:srgbClr val="1A0C42"/>
+              </a:gs>
+              <a:gs pos="100000">
+                <a:srgbClr val="08021C"/>
+              </a:gs>
+            </a:gsLst>
+            <a:lin scaled="0" ang="2700000"/>
+          </a:gradFill>
           <a:ln>
             <a:noFill/>
           </a:ln>
@@ -4926,9 +4983,105 @@
           </a:p>
         </p:txBody>
       </p:sp>
+      <p:sp>
+        <p:nvSpPr>
+          <p:cNvPr id="3" name="Oval 2"/>
+          <p:cNvSpPr/>
+          <p:nvPr/>
+        </p:nvSpPr>
+        <p:spPr>
+          <a:xfrm>
+            <a:off x="7406640" y="-3840480"/>
+            <a:ext cx="7863840" cy="7863840"/>
+          </a:xfrm>
+          <a:prstGeom prst="ellipse">
+            <a:avLst/>
+          </a:prstGeom>
+          <a:solidFill>
+            <a:srgbClr val="8B6CFF">
+              <a:alpha val="11000"/>
+            </a:srgbClr>
+          </a:solidFill>
+          <a:ln>
+            <a:noFill/>
+          </a:ln>
+          <a:effectLst>
+            <a:softEdge rad="2011680"/>
+          </a:effectLst>
+        </p:spPr>
+        <p:style>
+          <a:lnRef idx="1">
+            <a:schemeClr val="accent1"/>
+          </a:lnRef>
+          <a:fillRef idx="3">
+            <a:schemeClr val="accent1"/>
+          </a:fillRef>
+          <a:effectRef idx="2">
+            <a:schemeClr val="accent1"/>
+          </a:effectRef>
+          <a:fontRef idx="minor">
+            <a:schemeClr val="lt1"/>
+          </a:fontRef>
+        </p:style>
+        <p:txBody>
+          <a:bodyPr rtlCol="0" anchor="ctr"/>
+          <a:lstStyle/>
+          <a:p>
+            <a:pPr algn="ctr"/>
+          </a:p>
+        </p:txBody>
+      </p:sp>
+      <p:sp>
+        <p:nvSpPr>
+          <p:cNvPr id="4" name="Oval 3"/>
+          <p:cNvSpPr/>
+          <p:nvPr/>
+        </p:nvSpPr>
+        <p:spPr>
+          <a:xfrm>
+            <a:off x="-3383280" y="3840480"/>
+            <a:ext cx="6400800" cy="6400800"/>
+          </a:xfrm>
+          <a:prstGeom prst="ellipse">
+            <a:avLst/>
+          </a:prstGeom>
+          <a:solidFill>
+            <a:srgbClr val="4FD1C5">
+              <a:alpha val="7000"/>
+            </a:srgbClr>
+          </a:solidFill>
+          <a:ln>
+            <a:noFill/>
+          </a:ln>
+          <a:effectLst>
+            <a:softEdge rad="1828800"/>
+          </a:effectLst>
+        </p:spPr>
+        <p:style>
+          <a:lnRef idx="1">
+            <a:schemeClr val="accent1"/>
+          </a:lnRef>
+          <a:fillRef idx="3">
+            <a:schemeClr val="accent1"/>
+          </a:fillRef>
+          <a:effectRef idx="2">
+            <a:schemeClr val="accent1"/>
+          </a:effectRef>
+          <a:fontRef idx="minor">
+            <a:schemeClr val="lt1"/>
+          </a:fontRef>
+        </p:style>
+        <p:txBody>
+          <a:bodyPr rtlCol="0" anchor="ctr"/>
+          <a:lstStyle/>
+          <a:p>
+            <a:pPr algn="ctr"/>
+          </a:p>
+        </p:txBody>
+      </p:sp>
       <p:pic>
         <p:nvPicPr>
-          <p:cNvPr id="3" name="Picture 2" descr="logo_white.png"/>
+          <p:cNvPr id="5" name="Picture 4" descr="logo_white.png"/>
           <p:cNvPicPr>
             <a:picLocks noChangeAspect="1"/>
           </p:cNvPicPr>
@@ -4952,7 +5105,7 @@
       </p:pic>
       <p:sp>
         <p:nvSpPr>
-          <p:cNvPr id="4" name="Rounded Rectangle 3"/>
+          <p:cNvPr id="6" name="Rounded Rectangle 5"/>
           <p:cNvSpPr/>
           <p:nvPr/>
         </p:nvSpPr>
@@ -5007,25 +5160,68 @@
       </p:sp>
       <p:sp>
         <p:nvSpPr>
-          <p:cNvPr id="5" name="Rounded Rectangle 4"/>
+          <p:cNvPr id="7" name="TextBox 6"/>
+          <p:cNvSpPr txBox="1"/>
+          <p:nvPr/>
+        </p:nvSpPr>
+        <p:spPr>
+          <a:xfrm>
+            <a:off x="566928" y="932688"/>
+            <a:ext cx="11057839" cy="868680"/>
+          </a:xfrm>
+          <a:prstGeom prst="rect">
+            <a:avLst/>
+          </a:prstGeom>
+          <a:noFill/>
+        </p:spPr>
+        <p:txBody>
+          <a:bodyPr wrap="square" lIns="0" rIns="0" tIns="0" bIns="0">
+            <a:spAutoFit/>
+          </a:bodyPr>
+          <a:lstStyle/>
+          <a:p>
+            <a:r>
+              <a:rPr sz="4000" b="1">
+                <a:solidFill>
+                  <a:srgbClr val="FFF6ED"/>
+                </a:solidFill>
+                <a:latin typeface="Segoe UI"/>
+              </a:rPr>
+              <a:t>Four ways to charge</a:t>
+            </a:r>
+            <a:r>
+              <a:rPr sz="4000" b="1">
+                <a:solidFill>
+                  <a:srgbClr val="4FD1C5"/>
+                </a:solidFill>
+                <a:latin typeface="Segoe UI"/>
+              </a:rPr>
+              <a:t> for the same API call.</a:t>
+            </a:r>
+          </a:p>
+        </p:txBody>
+      </p:sp>
+      <p:sp>
+        <p:nvSpPr>
+          <p:cNvPr id="8" name="Rounded Rectangle 7"/>
           <p:cNvSpPr/>
           <p:nvPr/>
         </p:nvSpPr>
         <p:spPr>
           <a:xfrm>
-            <a:off x="10088575" y="365760"/>
-            <a:ext cx="1572768" cy="329184"/>
+            <a:off x="566928" y="1527048"/>
+            <a:ext cx="960120" cy="38100"/>
           </a:xfrm>
           <a:prstGeom prst="roundRect">
             <a:avLst>
               <a:gd name="adj" fmla="val 50000"/>
             </a:avLst>
           </a:prstGeom>
-          <a:noFill/>
-          <a:ln w="12700">
-            <a:solidFill>
-              <a:srgbClr val="FFF6ED"/>
-            </a:solidFill>
+          <a:solidFill>
+            <a:srgbClr val="4FD1C5"/>
+          </a:solidFill>
+          <a:ln>
+            <a:noFill/>
           </a:ln>
           <a:effectLst/>
         </p:spPr>
@@ -5044,68 +5240,16 @@
           </a:fontRef>
         </p:style>
         <p:txBody>
-          <a:bodyPr rtlCol="0" anchor="ctr" lIns="0" rIns="0" tIns="0" bIns="0"/>
+          <a:bodyPr rtlCol="0" anchor="ctr"/>
           <a:lstStyle/>
           <a:p>
             <a:pPr algn="ctr"/>
-            <a:r>
-              <a:rPr sz="1100">
-                <a:solidFill>
-                  <a:srgbClr val="FFF6ED"/>
-                </a:solidFill>
-                <a:latin typeface="Segoe UI"/>
-              </a:rPr>
-              <a:t>August 8, 2026</a:t>
-            </a:r>
-          </a:p>
-        </p:txBody>
-      </p:sp>
-      <p:sp>
-        <p:nvSpPr>
-          <p:cNvPr id="6" name="TextBox 5"/>
-          <p:cNvSpPr txBox="1"/>
-          <p:nvPr/>
-        </p:nvSpPr>
-        <p:spPr>
-          <a:xfrm>
-            <a:off x="566928" y="932688"/>
-            <a:ext cx="11057839" cy="868680"/>
-          </a:xfrm>
-          <a:prstGeom prst="rect">
-            <a:avLst/>
-          </a:prstGeom>
-          <a:noFill/>
-        </p:spPr>
-        <p:txBody>
-          <a:bodyPr wrap="square" lIns="0" rIns="0" tIns="0" bIns="0">
-            <a:spAutoFit/>
-          </a:bodyPr>
-          <a:lstStyle/>
-          <a:p>
-            <a:r>
-              <a:rPr sz="4000" b="1">
-                <a:solidFill>
-                  <a:srgbClr val="FFF6ED"/>
-                </a:solidFill>
-                <a:latin typeface="Segoe UI"/>
-              </a:rPr>
-              <a:t>Four ways to charge</a:t>
-            </a:r>
-            <a:r>
-              <a:rPr sz="4000" b="1">
-                <a:solidFill>
-                  <a:srgbClr val="4FD1C5"/>
-                </a:solidFill>
-                <a:latin typeface="Segoe UI"/>
-              </a:rPr>
-              <a:t> for the same API call.</a:t>
-            </a:r>
-          </a:p>
-        </p:txBody>
-      </p:sp>
-      <p:sp>
-        <p:nvSpPr>
-          <p:cNvPr id="7" name="TextBox 6"/>
+          </a:p>
+        </p:txBody>
+      </p:sp>
+      <p:sp>
+        <p:nvSpPr>
+          <p:cNvPr id="9" name="TextBox 8"/>
           <p:cNvSpPr txBox="1"/>
           <p:nvPr/>
         </p:nvSpPr>
@@ -5147,7 +5291,7 @@
       </p:sp>
       <p:graphicFrame>
         <p:nvGraphicFramePr>
-          <p:cNvPr id="8" name="Table 7"/>
+          <p:cNvPr id="10" name="Table 9"/>
           <p:cNvGraphicFramePr>
             <a:graphicFrameLocks noGrp="1"/>
           </p:cNvGraphicFramePr>
@@ -5645,7 +5789,7 @@
       </p:graphicFrame>
       <p:sp>
         <p:nvSpPr>
-          <p:cNvPr id="9" name="Rounded Rectangle 8"/>
+          <p:cNvPr id="11" name="Rounded Rectangle 10"/>
           <p:cNvSpPr/>
           <p:nvPr/>
         </p:nvSpPr>
@@ -5659,9 +5803,17 @@
               <a:gd name="adj" fmla="val 6000"/>
             </a:avLst>
           </a:prstGeom>
-          <a:solidFill>
-            <a:srgbClr val="1C123F"/>
-          </a:solidFill>
+          <a:gradFill rotWithShape="1">
+            <a:gsLst>
+              <a:gs pos="0">
+                <a:srgbClr val="2A1E53"/>
+              </a:gs>
+              <a:gs pos="100000">
+                <a:srgbClr val="1C123F"/>
+              </a:gs>
+            </a:gsLst>
+            <a:lin scaled="0" ang="5400000"/>
+          </a:gradFill>
           <a:ln w="12700">
             <a:solidFill>
               <a:srgbClr val="2A2145"/>
@@ -5691,7 +5843,7 @@
       </p:sp>
       <p:sp>
         <p:nvSpPr>
-          <p:cNvPr id="10" name="TextBox 9"/>
+          <p:cNvPr id="12" name="TextBox 11"/>
           <p:cNvSpPr txBox="1"/>
           <p:nvPr/>
         </p:nvSpPr>
@@ -5733,7 +5885,7 @@
       </p:sp>
       <p:sp>
         <p:nvSpPr>
-          <p:cNvPr id="11" name="TextBox 10"/>
+          <p:cNvPr id="13" name="TextBox 12"/>
           <p:cNvSpPr txBox="1"/>
           <p:nvPr/>
         </p:nvSpPr>
@@ -5775,7 +5927,7 @@
       </p:sp>
       <p:sp>
         <p:nvSpPr>
-          <p:cNvPr id="12" name="Rounded Rectangle 11"/>
+          <p:cNvPr id="14" name="Rounded Rectangle 13"/>
           <p:cNvSpPr/>
           <p:nvPr/>
         </p:nvSpPr>
@@ -5789,9 +5941,17 @@
               <a:gd name="adj" fmla="val 6000"/>
             </a:avLst>
           </a:prstGeom>
-          <a:solidFill>
-            <a:srgbClr val="1C123F"/>
-          </a:solidFill>
+          <a:gradFill rotWithShape="1">
+            <a:gsLst>
+              <a:gs pos="0">
+                <a:srgbClr val="2A1E53"/>
+              </a:gs>
+              <a:gs pos="100000">
+                <a:srgbClr val="1C123F"/>
+              </a:gs>
+            </a:gsLst>
+            <a:lin scaled="0" ang="5400000"/>
+          </a:gradFill>
           <a:ln w="12700">
             <a:solidFill>
               <a:srgbClr val="2A2145"/>
@@ -5821,7 +5981,7 @@
       </p:sp>
       <p:sp>
         <p:nvSpPr>
-          <p:cNvPr id="13" name="TextBox 12"/>
+          <p:cNvPr id="15" name="TextBox 14"/>
           <p:cNvSpPr txBox="1"/>
           <p:nvPr/>
         </p:nvSpPr>
@@ -5863,7 +6023,7 @@
       </p:sp>
       <p:sp>
         <p:nvSpPr>
-          <p:cNvPr id="14" name="TextBox 13"/>
+          <p:cNvPr id="16" name="TextBox 15"/>
           <p:cNvSpPr txBox="1"/>
           <p:nvPr/>
         </p:nvSpPr>
@@ -5905,7 +6065,7 @@
       </p:sp>
       <p:sp>
         <p:nvSpPr>
-          <p:cNvPr id="15" name="Rounded Rectangle 14"/>
+          <p:cNvPr id="17" name="Rounded Rectangle 16"/>
           <p:cNvSpPr/>
           <p:nvPr/>
         </p:nvSpPr>
@@ -5919,9 +6079,17 @@
               <a:gd name="adj" fmla="val 6000"/>
             </a:avLst>
           </a:prstGeom>
-          <a:solidFill>
-            <a:srgbClr val="1C123F"/>
-          </a:solidFill>
+          <a:gradFill rotWithShape="1">
+            <a:gsLst>
+              <a:gs pos="0">
+                <a:srgbClr val="2A1E53"/>
+              </a:gs>
+              <a:gs pos="100000">
+                <a:srgbClr val="1C123F"/>
+              </a:gs>
+            </a:gsLst>
+            <a:lin scaled="0" ang="5400000"/>
+          </a:gradFill>
           <a:ln w="12700">
             <a:solidFill>
               <a:srgbClr val="2A2145"/>
@@ -5951,7 +6119,7 @@
       </p:sp>
       <p:sp>
         <p:nvSpPr>
-          <p:cNvPr id="16" name="TextBox 15"/>
+          <p:cNvPr id="18" name="TextBox 17"/>
           <p:cNvSpPr txBox="1"/>
           <p:nvPr/>
         </p:nvSpPr>
@@ -5993,7 +6161,7 @@
       </p:sp>
       <p:sp>
         <p:nvSpPr>
-          <p:cNvPr id="17" name="TextBox 16"/>
+          <p:cNvPr id="19" name="TextBox 18"/>
           <p:cNvSpPr txBox="1"/>
           <p:nvPr/>
         </p:nvSpPr>
@@ -6065,9 +6233,17 @@
           <a:prstGeom prst="rect">
             <a:avLst/>
           </a:prstGeom>
-          <a:solidFill>
-            <a:srgbClr val="0E042D"/>
-          </a:solidFill>
+          <a:gradFill rotWithShape="1">
+            <a:gsLst>
+              <a:gs pos="0">
+                <a:srgbClr val="1A0C42"/>
+              </a:gs>
+              <a:gs pos="100000">
+                <a:srgbClr val="08021C"/>
+              </a:gs>
+            </a:gsLst>
+            <a:lin scaled="0" ang="2700000"/>
+          </a:gradFill>
           <a:ln>
             <a:noFill/>
           </a:ln>
@@ -6095,9 +6271,105 @@
           </a:p>
         </p:txBody>
       </p:sp>
+      <p:sp>
+        <p:nvSpPr>
+          <p:cNvPr id="3" name="Oval 2"/>
+          <p:cNvSpPr/>
+          <p:nvPr/>
+        </p:nvSpPr>
+        <p:spPr>
+          <a:xfrm>
+            <a:off x="7406640" y="-3840480"/>
+            <a:ext cx="7863840" cy="7863840"/>
+          </a:xfrm>
+          <a:prstGeom prst="ellipse">
+            <a:avLst/>
+          </a:prstGeom>
+          <a:solidFill>
+            <a:srgbClr val="8B6CFF">
+              <a:alpha val="11000"/>
+            </a:srgbClr>
+          </a:solidFill>
+          <a:ln>
+            <a:noFill/>
+          </a:ln>
+          <a:effectLst>
+            <a:softEdge rad="2011680"/>
+          </a:effectLst>
+        </p:spPr>
+        <p:style>
+          <a:lnRef idx="1">
+            <a:schemeClr val="accent1"/>
+          </a:lnRef>
+          <a:fillRef idx="3">
+            <a:schemeClr val="accent1"/>
+          </a:fillRef>
+          <a:effectRef idx="2">
+            <a:schemeClr val="accent1"/>
+          </a:effectRef>
+          <a:fontRef idx="minor">
+            <a:schemeClr val="lt1"/>
+          </a:fontRef>
+        </p:style>
+        <p:txBody>
+          <a:bodyPr rtlCol="0" anchor="ctr"/>
+          <a:lstStyle/>
+          <a:p>
+            <a:pPr algn="ctr"/>
+          </a:p>
+        </p:txBody>
+      </p:sp>
+      <p:sp>
+        <p:nvSpPr>
+          <p:cNvPr id="4" name="Oval 3"/>
+          <p:cNvSpPr/>
+          <p:nvPr/>
+        </p:nvSpPr>
+        <p:spPr>
+          <a:xfrm>
+            <a:off x="-3383280" y="3840480"/>
+            <a:ext cx="6400800" cy="6400800"/>
+          </a:xfrm>
+          <a:prstGeom prst="ellipse">
+            <a:avLst/>
+          </a:prstGeom>
+          <a:solidFill>
+            <a:srgbClr val="4FD1C5">
+              <a:alpha val="7000"/>
+            </a:srgbClr>
+          </a:solidFill>
+          <a:ln>
+            <a:noFill/>
+          </a:ln>
+          <a:effectLst>
+            <a:softEdge rad="1828800"/>
+          </a:effectLst>
+        </p:spPr>
+        <p:style>
+          <a:lnRef idx="1">
+            <a:schemeClr val="accent1"/>
+          </a:lnRef>
+          <a:fillRef idx="3">
+            <a:schemeClr val="accent1"/>
+          </a:fillRef>
+          <a:effectRef idx="2">
+            <a:schemeClr val="accent1"/>
+          </a:effectRef>
+          <a:fontRef idx="minor">
+            <a:schemeClr val="lt1"/>
+          </a:fontRef>
+        </p:style>
+        <p:txBody>
+          <a:bodyPr rtlCol="0" anchor="ctr"/>
+          <a:lstStyle/>
+          <a:p>
+            <a:pPr algn="ctr"/>
+          </a:p>
+        </p:txBody>
+      </p:sp>
       <p:pic>
         <p:nvPicPr>
-          <p:cNvPr id="3" name="Picture 2" descr="logo_white.png"/>
+          <p:cNvPr id="5" name="Picture 4" descr="logo_white.png"/>
           <p:cNvPicPr>
             <a:picLocks noChangeAspect="1"/>
           </p:cNvPicPr>
@@ -6121,7 +6393,7 @@
       </p:pic>
       <p:sp>
         <p:nvSpPr>
-          <p:cNvPr id="4" name="Rounded Rectangle 3"/>
+          <p:cNvPr id="6" name="Rounded Rectangle 5"/>
           <p:cNvSpPr/>
           <p:nvPr/>
         </p:nvSpPr>
@@ -6176,25 +6448,68 @@
       </p:sp>
       <p:sp>
         <p:nvSpPr>
-          <p:cNvPr id="5" name="Rounded Rectangle 4"/>
+          <p:cNvPr id="7" name="TextBox 6"/>
+          <p:cNvSpPr txBox="1"/>
+          <p:nvPr/>
+        </p:nvSpPr>
+        <p:spPr>
+          <a:xfrm>
+            <a:off x="566928" y="932688"/>
+            <a:ext cx="11057839" cy="868680"/>
+          </a:xfrm>
+          <a:prstGeom prst="rect">
+            <a:avLst/>
+          </a:prstGeom>
+          <a:noFill/>
+        </p:spPr>
+        <p:txBody>
+          <a:bodyPr wrap="square" lIns="0" rIns="0" tIns="0" bIns="0">
+            <a:spAutoFit/>
+          </a:bodyPr>
+          <a:lstStyle/>
+          <a:p>
+            <a:r>
+              <a:rPr sz="4000" b="1">
+                <a:solidFill>
+                  <a:srgbClr val="FFF6ED"/>
+                </a:solidFill>
+                <a:latin typeface="Segoe UI"/>
+              </a:rPr>
+              <a:t>Five-year path</a:t>
+            </a:r>
+            <a:r>
+              <a:rPr sz="4000" b="1">
+                <a:solidFill>
+                  <a:srgbClr val="4FD1C5"/>
+                </a:solidFill>
+                <a:latin typeface="Segoe UI"/>
+              </a:rPr>
+              <a:t> to $100-200M ARR.</a:t>
+            </a:r>
+          </a:p>
+        </p:txBody>
+      </p:sp>
+      <p:sp>
+        <p:nvSpPr>
+          <p:cNvPr id="8" name="Rounded Rectangle 7"/>
           <p:cNvSpPr/>
           <p:nvPr/>
         </p:nvSpPr>
         <p:spPr>
           <a:xfrm>
-            <a:off x="10088575" y="365760"/>
-            <a:ext cx="1572768" cy="329184"/>
+            <a:off x="566928" y="1527048"/>
+            <a:ext cx="960120" cy="38100"/>
           </a:xfrm>
           <a:prstGeom prst="roundRect">
             <a:avLst>
               <a:gd name="adj" fmla="val 50000"/>
             </a:avLst>
           </a:prstGeom>
-          <a:noFill/>
-          <a:ln w="12700">
-            <a:solidFill>
-              <a:srgbClr val="FFF6ED"/>
-            </a:solidFill>
+          <a:solidFill>
+            <a:srgbClr val="4FD1C5"/>
+          </a:solidFill>
+          <a:ln>
+            <a:noFill/>
           </a:ln>
           <a:effectLst/>
         </p:spPr>
@@ -6213,68 +6528,16 @@
           </a:fontRef>
         </p:style>
         <p:txBody>
-          <a:bodyPr rtlCol="0" anchor="ctr" lIns="0" rIns="0" tIns="0" bIns="0"/>
+          <a:bodyPr rtlCol="0" anchor="ctr"/>
           <a:lstStyle/>
           <a:p>
             <a:pPr algn="ctr"/>
-            <a:r>
-              <a:rPr sz="1100">
-                <a:solidFill>
-                  <a:srgbClr val="FFF6ED"/>
-                </a:solidFill>
-                <a:latin typeface="Segoe UI"/>
-              </a:rPr>
-              <a:t>August 8, 2026</a:t>
-            </a:r>
-          </a:p>
-        </p:txBody>
-      </p:sp>
-      <p:sp>
-        <p:nvSpPr>
-          <p:cNvPr id="6" name="TextBox 5"/>
-          <p:cNvSpPr txBox="1"/>
-          <p:nvPr/>
-        </p:nvSpPr>
-        <p:spPr>
-          <a:xfrm>
-            <a:off x="566928" y="932688"/>
-            <a:ext cx="11057839" cy="868680"/>
-          </a:xfrm>
-          <a:prstGeom prst="rect">
-            <a:avLst/>
-          </a:prstGeom>
-          <a:noFill/>
-        </p:spPr>
-        <p:txBody>
-          <a:bodyPr wrap="square" lIns="0" rIns="0" tIns="0" bIns="0">
-            <a:spAutoFit/>
-          </a:bodyPr>
-          <a:lstStyle/>
-          <a:p>
-            <a:r>
-              <a:rPr sz="4000" b="1">
-                <a:solidFill>
-                  <a:srgbClr val="FFF6ED"/>
-                </a:solidFill>
-                <a:latin typeface="Segoe UI"/>
-              </a:rPr>
-              <a:t>Five-year path</a:t>
-            </a:r>
-            <a:r>
-              <a:rPr sz="4000" b="1">
-                <a:solidFill>
-                  <a:srgbClr val="4FD1C5"/>
-                </a:solidFill>
-                <a:latin typeface="Segoe UI"/>
-              </a:rPr>
-              <a:t> to $100-200M ARR.</a:t>
-            </a:r>
-          </a:p>
-        </p:txBody>
-      </p:sp>
-      <p:sp>
-        <p:nvSpPr>
-          <p:cNvPr id="7" name="TextBox 6"/>
+          </a:p>
+        </p:txBody>
+      </p:sp>
+      <p:sp>
+        <p:nvSpPr>
+          <p:cNvPr id="9" name="TextBox 8"/>
           <p:cNvSpPr txBox="1"/>
           <p:nvPr/>
         </p:nvSpPr>
@@ -6316,7 +6579,7 @@
       </p:sp>
       <p:pic>
         <p:nvPicPr>
-          <p:cNvPr id="8" name="Picture 7" descr="fig_revenue_projection.png"/>
+          <p:cNvPr id="10" name="Picture 9" descr="fig_revenue_projection.png"/>
           <p:cNvPicPr>
             <a:picLocks noChangeAspect="1"/>
           </p:cNvPicPr>
@@ -6340,7 +6603,7 @@
       </p:pic>
       <p:sp>
         <p:nvSpPr>
-          <p:cNvPr id="9" name="TextBox 8"/>
+          <p:cNvPr id="11" name="TextBox 10"/>
           <p:cNvSpPr txBox="1"/>
           <p:nvPr/>
         </p:nvSpPr>
@@ -6382,7 +6645,7 @@
       </p:sp>
       <p:sp>
         <p:nvSpPr>
-          <p:cNvPr id="10" name="Rounded Rectangle 9"/>
+          <p:cNvPr id="12" name="Rounded Rectangle 11"/>
           <p:cNvSpPr/>
           <p:nvPr/>
         </p:nvSpPr>
@@ -6396,9 +6659,17 @@
               <a:gd name="adj" fmla="val 6000"/>
             </a:avLst>
           </a:prstGeom>
-          <a:solidFill>
-            <a:srgbClr val="1C123F"/>
-          </a:solidFill>
+          <a:gradFill rotWithShape="1">
+            <a:gsLst>
+              <a:gs pos="0">
+                <a:srgbClr val="2A1E53"/>
+              </a:gs>
+              <a:gs pos="100000">
+                <a:srgbClr val="1C123F"/>
+              </a:gs>
+            </a:gsLst>
+            <a:lin scaled="0" ang="5400000"/>
+          </a:gradFill>
           <a:ln w="12700">
             <a:solidFill>
               <a:srgbClr val="2A2145"/>
@@ -6428,7 +6699,7 @@
       </p:sp>
       <p:sp>
         <p:nvSpPr>
-          <p:cNvPr id="11" name="TextBox 10"/>
+          <p:cNvPr id="13" name="TextBox 12"/>
           <p:cNvSpPr txBox="1"/>
           <p:nvPr/>
         </p:nvSpPr>
@@ -6470,7 +6741,7 @@
       </p:sp>
       <p:sp>
         <p:nvSpPr>
-          <p:cNvPr id="12" name="TextBox 11"/>
+          <p:cNvPr id="14" name="TextBox 13"/>
           <p:cNvSpPr txBox="1"/>
           <p:nvPr/>
         </p:nvSpPr>
@@ -6512,7 +6783,7 @@
       </p:sp>
       <p:sp>
         <p:nvSpPr>
-          <p:cNvPr id="13" name="Rounded Rectangle 12"/>
+          <p:cNvPr id="15" name="Rounded Rectangle 14"/>
           <p:cNvSpPr/>
           <p:nvPr/>
         </p:nvSpPr>
@@ -6526,9 +6797,17 @@
               <a:gd name="adj" fmla="val 6000"/>
             </a:avLst>
           </a:prstGeom>
-          <a:solidFill>
-            <a:srgbClr val="1C123F"/>
-          </a:solidFill>
+          <a:gradFill rotWithShape="1">
+            <a:gsLst>
+              <a:gs pos="0">
+                <a:srgbClr val="2A1E53"/>
+              </a:gs>
+              <a:gs pos="100000">
+                <a:srgbClr val="1C123F"/>
+              </a:gs>
+            </a:gsLst>
+            <a:lin scaled="0" ang="5400000"/>
+          </a:gradFill>
           <a:ln w="12700">
             <a:solidFill>
               <a:srgbClr val="2A2145"/>
@@ -6558,7 +6837,7 @@
       </p:sp>
       <p:sp>
         <p:nvSpPr>
-          <p:cNvPr id="14" name="TextBox 13"/>
+          <p:cNvPr id="16" name="TextBox 15"/>
           <p:cNvSpPr txBox="1"/>
           <p:nvPr/>
         </p:nvSpPr>
@@ -6600,7 +6879,7 @@
       </p:sp>
       <p:sp>
         <p:nvSpPr>
-          <p:cNvPr id="15" name="TextBox 14"/>
+          <p:cNvPr id="17" name="TextBox 16"/>
           <p:cNvSpPr txBox="1"/>
           <p:nvPr/>
         </p:nvSpPr>
@@ -6642,7 +6921,7 @@
       </p:sp>
       <p:sp>
         <p:nvSpPr>
-          <p:cNvPr id="16" name="Rounded Rectangle 15"/>
+          <p:cNvPr id="18" name="Rounded Rectangle 17"/>
           <p:cNvSpPr/>
           <p:nvPr/>
         </p:nvSpPr>
@@ -6656,9 +6935,17 @@
               <a:gd name="adj" fmla="val 6000"/>
             </a:avLst>
           </a:prstGeom>
-          <a:solidFill>
-            <a:srgbClr val="1C123F"/>
-          </a:solidFill>
+          <a:gradFill rotWithShape="1">
+            <a:gsLst>
+              <a:gs pos="0">
+                <a:srgbClr val="2A1E53"/>
+              </a:gs>
+              <a:gs pos="100000">
+                <a:srgbClr val="1C123F"/>
+              </a:gs>
+            </a:gsLst>
+            <a:lin scaled="0" ang="5400000"/>
+          </a:gradFill>
           <a:ln w="12700">
             <a:solidFill>
               <a:srgbClr val="2A2145"/>
@@ -6688,7 +6975,7 @@
       </p:sp>
       <p:sp>
         <p:nvSpPr>
-          <p:cNvPr id="17" name="TextBox 16"/>
+          <p:cNvPr id="19" name="TextBox 18"/>
           <p:cNvSpPr txBox="1"/>
           <p:nvPr/>
         </p:nvSpPr>
@@ -6730,7 +7017,7 @@
       </p:sp>
       <p:sp>
         <p:nvSpPr>
-          <p:cNvPr id="18" name="TextBox 17"/>
+          <p:cNvPr id="20" name="TextBox 19"/>
           <p:cNvSpPr txBox="1"/>
           <p:nvPr/>
         </p:nvSpPr>
@@ -6772,7 +7059,7 @@
       </p:sp>
       <p:sp>
         <p:nvSpPr>
-          <p:cNvPr id="19" name="Rounded Rectangle 18"/>
+          <p:cNvPr id="21" name="Rounded Rectangle 20"/>
           <p:cNvSpPr/>
           <p:nvPr/>
         </p:nvSpPr>
@@ -6786,9 +7073,17 @@
               <a:gd name="adj" fmla="val 6000"/>
             </a:avLst>
           </a:prstGeom>
-          <a:solidFill>
-            <a:srgbClr val="1C123F"/>
-          </a:solidFill>
+          <a:gradFill rotWithShape="1">
+            <a:gsLst>
+              <a:gs pos="0">
+                <a:srgbClr val="2A1E53"/>
+              </a:gs>
+              <a:gs pos="100000">
+                <a:srgbClr val="1C123F"/>
+              </a:gs>
+            </a:gsLst>
+            <a:lin scaled="0" ang="5400000"/>
+          </a:gradFill>
           <a:ln w="12700">
             <a:solidFill>
               <a:srgbClr val="2A2145"/>
@@ -6818,7 +7113,7 @@
       </p:sp>
       <p:sp>
         <p:nvSpPr>
-          <p:cNvPr id="20" name="TextBox 19"/>
+          <p:cNvPr id="22" name="TextBox 21"/>
           <p:cNvSpPr txBox="1"/>
           <p:nvPr/>
         </p:nvSpPr>
@@ -6860,7 +7155,7 @@
       </p:sp>
       <p:sp>
         <p:nvSpPr>
-          <p:cNvPr id="21" name="TextBox 20"/>
+          <p:cNvPr id="23" name="TextBox 22"/>
           <p:cNvSpPr txBox="1"/>
           <p:nvPr/>
         </p:nvSpPr>
@@ -6932,9 +7227,17 @@
           <a:prstGeom prst="rect">
             <a:avLst/>
           </a:prstGeom>
-          <a:solidFill>
-            <a:srgbClr val="0E042D"/>
-          </a:solidFill>
+          <a:gradFill rotWithShape="1">
+            <a:gsLst>
+              <a:gs pos="0">
+                <a:srgbClr val="1A0C42"/>
+              </a:gs>
+              <a:gs pos="100000">
+                <a:srgbClr val="08021C"/>
+              </a:gs>
+            </a:gsLst>
+            <a:lin scaled="0" ang="2700000"/>
+          </a:gradFill>
           <a:ln>
             <a:noFill/>
           </a:ln>
@@ -6962,9 +7265,105 @@
           </a:p>
         </p:txBody>
       </p:sp>
+      <p:sp>
+        <p:nvSpPr>
+          <p:cNvPr id="3" name="Oval 2"/>
+          <p:cNvSpPr/>
+          <p:nvPr/>
+        </p:nvSpPr>
+        <p:spPr>
+          <a:xfrm>
+            <a:off x="7406640" y="-3840480"/>
+            <a:ext cx="7863840" cy="7863840"/>
+          </a:xfrm>
+          <a:prstGeom prst="ellipse">
+            <a:avLst/>
+          </a:prstGeom>
+          <a:solidFill>
+            <a:srgbClr val="8B6CFF">
+              <a:alpha val="11000"/>
+            </a:srgbClr>
+          </a:solidFill>
+          <a:ln>
+            <a:noFill/>
+          </a:ln>
+          <a:effectLst>
+            <a:softEdge rad="2011680"/>
+          </a:effectLst>
+        </p:spPr>
+        <p:style>
+          <a:lnRef idx="1">
+            <a:schemeClr val="accent1"/>
+          </a:lnRef>
+          <a:fillRef idx="3">
+            <a:schemeClr val="accent1"/>
+          </a:fillRef>
+          <a:effectRef idx="2">
+            <a:schemeClr val="accent1"/>
+          </a:effectRef>
+          <a:fontRef idx="minor">
+            <a:schemeClr val="lt1"/>
+          </a:fontRef>
+        </p:style>
+        <p:txBody>
+          <a:bodyPr rtlCol="0" anchor="ctr"/>
+          <a:lstStyle/>
+          <a:p>
+            <a:pPr algn="ctr"/>
+          </a:p>
+        </p:txBody>
+      </p:sp>
+      <p:sp>
+        <p:nvSpPr>
+          <p:cNvPr id="4" name="Oval 3"/>
+          <p:cNvSpPr/>
+          <p:nvPr/>
+        </p:nvSpPr>
+        <p:spPr>
+          <a:xfrm>
+            <a:off x="-3383280" y="3840480"/>
+            <a:ext cx="6400800" cy="6400800"/>
+          </a:xfrm>
+          <a:prstGeom prst="ellipse">
+            <a:avLst/>
+          </a:prstGeom>
+          <a:solidFill>
+            <a:srgbClr val="4FD1C5">
+              <a:alpha val="7000"/>
+            </a:srgbClr>
+          </a:solidFill>
+          <a:ln>
+            <a:noFill/>
+          </a:ln>
+          <a:effectLst>
+            <a:softEdge rad="1828800"/>
+          </a:effectLst>
+        </p:spPr>
+        <p:style>
+          <a:lnRef idx="1">
+            <a:schemeClr val="accent1"/>
+          </a:lnRef>
+          <a:fillRef idx="3">
+            <a:schemeClr val="accent1"/>
+          </a:fillRef>
+          <a:effectRef idx="2">
+            <a:schemeClr val="accent1"/>
+          </a:effectRef>
+          <a:fontRef idx="minor">
+            <a:schemeClr val="lt1"/>
+          </a:fontRef>
+        </p:style>
+        <p:txBody>
+          <a:bodyPr rtlCol="0" anchor="ctr"/>
+          <a:lstStyle/>
+          <a:p>
+            <a:pPr algn="ctr"/>
+          </a:p>
+        </p:txBody>
+      </p:sp>
       <p:pic>
         <p:nvPicPr>
-          <p:cNvPr id="3" name="Picture 2" descr="logo_white.png"/>
+          <p:cNvPr id="5" name="Picture 4" descr="logo_white.png"/>
           <p:cNvPicPr>
             <a:picLocks noChangeAspect="1"/>
           </p:cNvPicPr>
@@ -6988,7 +7387,7 @@
       </p:pic>
       <p:sp>
         <p:nvSpPr>
-          <p:cNvPr id="4" name="Rounded Rectangle 3"/>
+          <p:cNvPr id="6" name="Rounded Rectangle 5"/>
           <p:cNvSpPr/>
           <p:nvPr/>
         </p:nvSpPr>
@@ -7043,25 +7442,68 @@
       </p:sp>
       <p:sp>
         <p:nvSpPr>
-          <p:cNvPr id="5" name="Rounded Rectangle 4"/>
+          <p:cNvPr id="7" name="TextBox 6"/>
+          <p:cNvSpPr txBox="1"/>
+          <p:nvPr/>
+        </p:nvSpPr>
+        <p:spPr>
+          <a:xfrm>
+            <a:off x="566928" y="932688"/>
+            <a:ext cx="11057839" cy="868680"/>
+          </a:xfrm>
+          <a:prstGeom prst="rect">
+            <a:avLst/>
+          </a:prstGeom>
+          <a:noFill/>
+        </p:spPr>
+        <p:txBody>
+          <a:bodyPr wrap="square" lIns="0" rIns="0" tIns="0" bIns="0">
+            <a:spAutoFit/>
+          </a:bodyPr>
+          <a:lstStyle/>
+          <a:p>
+            <a:r>
+              <a:rPr sz="4000" b="1">
+                <a:solidFill>
+                  <a:srgbClr val="FFF6ED"/>
+                </a:solidFill>
+                <a:latin typeface="Segoe UI"/>
+              </a:rPr>
+              <a:t>Builders who already</a:t>
+            </a:r>
+            <a:r>
+              <a:rPr sz="4000" b="1">
+                <a:solidFill>
+                  <a:srgbClr val="4FD1C5"/>
+                </a:solidFill>
+                <a:latin typeface="Segoe UI"/>
+              </a:rPr>
+              <a:t> shipped the hard part.</a:t>
+            </a:r>
+          </a:p>
+        </p:txBody>
+      </p:sp>
+      <p:sp>
+        <p:nvSpPr>
+          <p:cNvPr id="8" name="Rounded Rectangle 7"/>
           <p:cNvSpPr/>
           <p:nvPr/>
         </p:nvSpPr>
         <p:spPr>
           <a:xfrm>
-            <a:off x="10088575" y="365760"/>
-            <a:ext cx="1572768" cy="329184"/>
+            <a:off x="566928" y="1527048"/>
+            <a:ext cx="960120" cy="38100"/>
           </a:xfrm>
           <a:prstGeom prst="roundRect">
             <a:avLst>
               <a:gd name="adj" fmla="val 50000"/>
             </a:avLst>
           </a:prstGeom>
-          <a:noFill/>
-          <a:ln w="12700">
-            <a:solidFill>
-              <a:srgbClr val="FFF6ED"/>
-            </a:solidFill>
+          <a:solidFill>
+            <a:srgbClr val="4FD1C5"/>
+          </a:solidFill>
+          <a:ln>
+            <a:noFill/>
           </a:ln>
           <a:effectLst/>
         </p:spPr>
@@ -7080,68 +7522,16 @@
           </a:fontRef>
         </p:style>
         <p:txBody>
-          <a:bodyPr rtlCol="0" anchor="ctr" lIns="0" rIns="0" tIns="0" bIns="0"/>
+          <a:bodyPr rtlCol="0" anchor="ctr"/>
           <a:lstStyle/>
           <a:p>
             <a:pPr algn="ctr"/>
-            <a:r>
-              <a:rPr sz="1100">
-                <a:solidFill>
-                  <a:srgbClr val="FFF6ED"/>
-                </a:solidFill>
-                <a:latin typeface="Segoe UI"/>
-              </a:rPr>
-              <a:t>August 8, 2026</a:t>
-            </a:r>
-          </a:p>
-        </p:txBody>
-      </p:sp>
-      <p:sp>
-        <p:nvSpPr>
-          <p:cNvPr id="6" name="TextBox 5"/>
-          <p:cNvSpPr txBox="1"/>
-          <p:nvPr/>
-        </p:nvSpPr>
-        <p:spPr>
-          <a:xfrm>
-            <a:off x="566928" y="932688"/>
-            <a:ext cx="11057839" cy="868680"/>
-          </a:xfrm>
-          <a:prstGeom prst="rect">
-            <a:avLst/>
-          </a:prstGeom>
-          <a:noFill/>
-        </p:spPr>
-        <p:txBody>
-          <a:bodyPr wrap="square" lIns="0" rIns="0" tIns="0" bIns="0">
-            <a:spAutoFit/>
-          </a:bodyPr>
-          <a:lstStyle/>
-          <a:p>
-            <a:r>
-              <a:rPr sz="4000" b="1">
-                <a:solidFill>
-                  <a:srgbClr val="FFF6ED"/>
-                </a:solidFill>
-                <a:latin typeface="Segoe UI"/>
-              </a:rPr>
-              <a:t>Builders who already</a:t>
-            </a:r>
-            <a:r>
-              <a:rPr sz="4000" b="1">
-                <a:solidFill>
-                  <a:srgbClr val="4FD1C5"/>
-                </a:solidFill>
-                <a:latin typeface="Segoe UI"/>
-              </a:rPr>
-              <a:t> shipped the hard part.</a:t>
-            </a:r>
-          </a:p>
-        </p:txBody>
-      </p:sp>
-      <p:sp>
-        <p:nvSpPr>
-          <p:cNvPr id="7" name="TextBox 6"/>
+          </a:p>
+        </p:txBody>
+      </p:sp>
+      <p:sp>
+        <p:nvSpPr>
+          <p:cNvPr id="9" name="TextBox 8"/>
           <p:cNvSpPr txBox="1"/>
           <p:nvPr/>
         </p:nvSpPr>
@@ -7183,7 +7573,7 @@
       </p:sp>
       <p:sp>
         <p:nvSpPr>
-          <p:cNvPr id="8" name="Rounded Rectangle 7"/>
+          <p:cNvPr id="10" name="Rounded Rectangle 9"/>
           <p:cNvSpPr/>
           <p:nvPr/>
         </p:nvSpPr>
@@ -7197,9 +7587,17 @@
               <a:gd name="adj" fmla="val 6000"/>
             </a:avLst>
           </a:prstGeom>
-          <a:solidFill>
-            <a:srgbClr val="1C123F"/>
-          </a:solidFill>
+          <a:gradFill rotWithShape="1">
+            <a:gsLst>
+              <a:gs pos="0">
+                <a:srgbClr val="2A1E53"/>
+              </a:gs>
+              <a:gs pos="100000">
+                <a:srgbClr val="1C123F"/>
+              </a:gs>
+            </a:gsLst>
+            <a:lin scaled="0" ang="5400000"/>
+          </a:gradFill>
           <a:ln w="15240">
             <a:solidFill>
               <a:srgbClr val="4CC9F0"/>
@@ -7229,7 +7627,7 @@
       </p:sp>
       <p:sp>
         <p:nvSpPr>
-          <p:cNvPr id="9" name="Rounded Rectangle 8"/>
+          <p:cNvPr id="11" name="Rounded Rectangle 10"/>
           <p:cNvSpPr/>
           <p:nvPr/>
         </p:nvSpPr>
@@ -7243,9 +7641,17 @@
               <a:gd name="adj" fmla="val 50000"/>
             </a:avLst>
           </a:prstGeom>
-          <a:solidFill>
-            <a:srgbClr val="2A2145"/>
-          </a:solidFill>
+          <a:gradFill rotWithShape="1">
+            <a:gsLst>
+              <a:gs pos="0">
+                <a:srgbClr val="382D59"/>
+              </a:gs>
+              <a:gs pos="100000">
+                <a:srgbClr val="2A2145"/>
+              </a:gs>
+            </a:gsLst>
+            <a:lin scaled="0" ang="5400000"/>
+          </a:gradFill>
           <a:ln w="13970">
             <a:solidFill>
               <a:srgbClr val="4CC9F0"/>
@@ -7286,7 +7692,7 @@
       </p:sp>
       <p:sp>
         <p:nvSpPr>
-          <p:cNvPr id="10" name="TextBox 9"/>
+          <p:cNvPr id="12" name="TextBox 11"/>
           <p:cNvSpPr txBox="1"/>
           <p:nvPr/>
         </p:nvSpPr>
@@ -7328,7 +7734,7 @@
       </p:sp>
       <p:sp>
         <p:nvSpPr>
-          <p:cNvPr id="11" name="TextBox 10"/>
+          <p:cNvPr id="13" name="TextBox 12"/>
           <p:cNvSpPr txBox="1"/>
           <p:nvPr/>
         </p:nvSpPr>
@@ -7370,7 +7776,7 @@
       </p:sp>
       <p:sp>
         <p:nvSpPr>
-          <p:cNvPr id="12" name="TextBox 11"/>
+          <p:cNvPr id="14" name="TextBox 13"/>
           <p:cNvSpPr txBox="1"/>
           <p:nvPr/>
         </p:nvSpPr>
@@ -7412,7 +7818,7 @@
       </p:sp>
       <p:sp>
         <p:nvSpPr>
-          <p:cNvPr id="13" name="Rounded Rectangle 12"/>
+          <p:cNvPr id="15" name="Rounded Rectangle 14"/>
           <p:cNvSpPr/>
           <p:nvPr/>
         </p:nvSpPr>
@@ -7426,9 +7832,17 @@
               <a:gd name="adj" fmla="val 6000"/>
             </a:avLst>
           </a:prstGeom>
-          <a:solidFill>
-            <a:srgbClr val="1C123F"/>
-          </a:solidFill>
+          <a:gradFill rotWithShape="1">
+            <a:gsLst>
+              <a:gs pos="0">
+                <a:srgbClr val="2A1E53"/>
+              </a:gs>
+              <a:gs pos="100000">
+                <a:srgbClr val="1C123F"/>
+              </a:gs>
+            </a:gsLst>
+            <a:lin scaled="0" ang="5400000"/>
+          </a:gradFill>
           <a:ln w="15240">
             <a:solidFill>
               <a:srgbClr val="4CC9F0"/>
@@ -7458,7 +7872,7 @@
       </p:sp>
       <p:sp>
         <p:nvSpPr>
-          <p:cNvPr id="14" name="Rounded Rectangle 13"/>
+          <p:cNvPr id="16" name="Rounded Rectangle 15"/>
           <p:cNvSpPr/>
           <p:nvPr/>
         </p:nvSpPr>
@@ -7472,9 +7886,17 @@
               <a:gd name="adj" fmla="val 50000"/>
             </a:avLst>
           </a:prstGeom>
-          <a:solidFill>
-            <a:srgbClr val="2A2145"/>
-          </a:solidFill>
+          <a:gradFill rotWithShape="1">
+            <a:gsLst>
+              <a:gs pos="0">
+                <a:srgbClr val="382D59"/>
+              </a:gs>
+              <a:gs pos="100000">
+                <a:srgbClr val="2A2145"/>
+              </a:gs>
+            </a:gsLst>
+            <a:lin scaled="0" ang="5400000"/>
+          </a:gradFill>
           <a:ln w="13970">
             <a:solidFill>
               <a:srgbClr val="4CC9F0"/>
@@ -7515,7 +7937,7 @@
       </p:sp>
       <p:sp>
         <p:nvSpPr>
-          <p:cNvPr id="15" name="TextBox 14"/>
+          <p:cNvPr id="17" name="TextBox 16"/>
           <p:cNvSpPr txBox="1"/>
           <p:nvPr/>
         </p:nvSpPr>
@@ -7557,7 +7979,7 @@
       </p:sp>
       <p:sp>
         <p:nvSpPr>
-          <p:cNvPr id="16" name="TextBox 15"/>
+          <p:cNvPr id="18" name="TextBox 17"/>
           <p:cNvSpPr txBox="1"/>
           <p:nvPr/>
         </p:nvSpPr>
@@ -7599,7 +8021,7 @@
       </p:sp>
       <p:sp>
         <p:nvSpPr>
-          <p:cNvPr id="17" name="TextBox 16"/>
+          <p:cNvPr id="19" name="TextBox 18"/>
           <p:cNvSpPr txBox="1"/>
           <p:nvPr/>
         </p:nvSpPr>
@@ -7641,7 +8063,7 @@
       </p:sp>
       <p:sp>
         <p:nvSpPr>
-          <p:cNvPr id="18" name="Rounded Rectangle 17"/>
+          <p:cNvPr id="20" name="Rounded Rectangle 19"/>
           <p:cNvSpPr/>
           <p:nvPr/>
         </p:nvSpPr>
@@ -7655,9 +8077,17 @@
               <a:gd name="adj" fmla="val 6000"/>
             </a:avLst>
           </a:prstGeom>
-          <a:solidFill>
-            <a:srgbClr val="1C123F"/>
-          </a:solidFill>
+          <a:gradFill rotWithShape="1">
+            <a:gsLst>
+              <a:gs pos="0">
+                <a:srgbClr val="2A1E53"/>
+              </a:gs>
+              <a:gs pos="100000">
+                <a:srgbClr val="1C123F"/>
+              </a:gs>
+            </a:gsLst>
+            <a:lin scaled="0" ang="5400000"/>
+          </a:gradFill>
           <a:ln w="15240">
             <a:solidFill>
               <a:srgbClr val="4CC9F0"/>
@@ -7687,7 +8117,7 @@
       </p:sp>
       <p:sp>
         <p:nvSpPr>
-          <p:cNvPr id="19" name="Rounded Rectangle 18"/>
+          <p:cNvPr id="21" name="Rounded Rectangle 20"/>
           <p:cNvSpPr/>
           <p:nvPr/>
         </p:nvSpPr>
@@ -7701,9 +8131,17 @@
               <a:gd name="adj" fmla="val 50000"/>
             </a:avLst>
           </a:prstGeom>
-          <a:solidFill>
-            <a:srgbClr val="2A2145"/>
-          </a:solidFill>
+          <a:gradFill rotWithShape="1">
+            <a:gsLst>
+              <a:gs pos="0">
+                <a:srgbClr val="382D59"/>
+              </a:gs>
+              <a:gs pos="100000">
+                <a:srgbClr val="2A2145"/>
+              </a:gs>
+            </a:gsLst>
+            <a:lin scaled="0" ang="5400000"/>
+          </a:gradFill>
           <a:ln w="13970">
             <a:solidFill>
               <a:srgbClr val="4CC9F0"/>
@@ -7744,7 +8182,7 @@
       </p:sp>
       <p:sp>
         <p:nvSpPr>
-          <p:cNvPr id="20" name="TextBox 19"/>
+          <p:cNvPr id="22" name="TextBox 21"/>
           <p:cNvSpPr txBox="1"/>
           <p:nvPr/>
         </p:nvSpPr>
@@ -7786,7 +8224,7 @@
       </p:sp>
       <p:sp>
         <p:nvSpPr>
-          <p:cNvPr id="21" name="TextBox 20"/>
+          <p:cNvPr id="23" name="TextBox 22"/>
           <p:cNvSpPr txBox="1"/>
           <p:nvPr/>
         </p:nvSpPr>
@@ -7828,7 +8266,7 @@
       </p:sp>
       <p:sp>
         <p:nvSpPr>
-          <p:cNvPr id="22" name="TextBox 21"/>
+          <p:cNvPr id="24" name="TextBox 23"/>
           <p:cNvSpPr txBox="1"/>
           <p:nvPr/>
         </p:nvSpPr>
@@ -7870,7 +8308,7 @@
       </p:sp>
       <p:sp>
         <p:nvSpPr>
-          <p:cNvPr id="23" name="Rounded Rectangle 22"/>
+          <p:cNvPr id="25" name="Rounded Rectangle 24"/>
           <p:cNvSpPr/>
           <p:nvPr/>
         </p:nvSpPr>
@@ -7884,9 +8322,17 @@
               <a:gd name="adj" fmla="val 6000"/>
             </a:avLst>
           </a:prstGeom>
-          <a:solidFill>
-            <a:srgbClr val="1C123F"/>
-          </a:solidFill>
+          <a:gradFill rotWithShape="1">
+            <a:gsLst>
+              <a:gs pos="0">
+                <a:srgbClr val="2A1E53"/>
+              </a:gs>
+              <a:gs pos="100000">
+                <a:srgbClr val="1C123F"/>
+              </a:gs>
+            </a:gsLst>
+            <a:lin scaled="0" ang="5400000"/>
+          </a:gradFill>
           <a:ln w="16510">
             <a:solidFill>
               <a:srgbClr val="FFB020"/>
@@ -7916,7 +8362,7 @@
       </p:sp>
       <p:sp>
         <p:nvSpPr>
-          <p:cNvPr id="24" name="TextBox 23"/>
+          <p:cNvPr id="26" name="TextBox 25"/>
           <p:cNvSpPr txBox="1"/>
           <p:nvPr/>
         </p:nvSpPr>
@@ -8007,9 +8453,17 @@
           <a:prstGeom prst="rect">
             <a:avLst/>
           </a:prstGeom>
-          <a:solidFill>
-            <a:srgbClr val="0E042D"/>
-          </a:solidFill>
+          <a:gradFill rotWithShape="1">
+            <a:gsLst>
+              <a:gs pos="0">
+                <a:srgbClr val="1A0C42"/>
+              </a:gs>
+              <a:gs pos="100000">
+                <a:srgbClr val="08021C"/>
+              </a:gs>
+            </a:gsLst>
+            <a:lin scaled="0" ang="2700000"/>
+          </a:gradFill>
           <a:ln>
             <a:noFill/>
           </a:ln>
@@ -8037,9 +8491,105 @@
           </a:p>
         </p:txBody>
       </p:sp>
+      <p:sp>
+        <p:nvSpPr>
+          <p:cNvPr id="3" name="Oval 2"/>
+          <p:cNvSpPr/>
+          <p:nvPr/>
+        </p:nvSpPr>
+        <p:spPr>
+          <a:xfrm>
+            <a:off x="7406640" y="-3840480"/>
+            <a:ext cx="7863840" cy="7863840"/>
+          </a:xfrm>
+          <a:prstGeom prst="ellipse">
+            <a:avLst/>
+          </a:prstGeom>
+          <a:solidFill>
+            <a:srgbClr val="8B6CFF">
+              <a:alpha val="11000"/>
+            </a:srgbClr>
+          </a:solidFill>
+          <a:ln>
+            <a:noFill/>
+          </a:ln>
+          <a:effectLst>
+            <a:softEdge rad="2011680"/>
+          </a:effectLst>
+        </p:spPr>
+        <p:style>
+          <a:lnRef idx="1">
+            <a:schemeClr val="accent1"/>
+          </a:lnRef>
+          <a:fillRef idx="3">
+            <a:schemeClr val="accent1"/>
+          </a:fillRef>
+          <a:effectRef idx="2">
+            <a:schemeClr val="accent1"/>
+          </a:effectRef>
+          <a:fontRef idx="minor">
+            <a:schemeClr val="lt1"/>
+          </a:fontRef>
+        </p:style>
+        <p:txBody>
+          <a:bodyPr rtlCol="0" anchor="ctr"/>
+          <a:lstStyle/>
+          <a:p>
+            <a:pPr algn="ctr"/>
+          </a:p>
+        </p:txBody>
+      </p:sp>
+      <p:sp>
+        <p:nvSpPr>
+          <p:cNvPr id="4" name="Oval 3"/>
+          <p:cNvSpPr/>
+          <p:nvPr/>
+        </p:nvSpPr>
+        <p:spPr>
+          <a:xfrm>
+            <a:off x="-3383280" y="3840480"/>
+            <a:ext cx="6400800" cy="6400800"/>
+          </a:xfrm>
+          <a:prstGeom prst="ellipse">
+            <a:avLst/>
+          </a:prstGeom>
+          <a:solidFill>
+            <a:srgbClr val="4FD1C5">
+              <a:alpha val="7000"/>
+            </a:srgbClr>
+          </a:solidFill>
+          <a:ln>
+            <a:noFill/>
+          </a:ln>
+          <a:effectLst>
+            <a:softEdge rad="1828800"/>
+          </a:effectLst>
+        </p:spPr>
+        <p:style>
+          <a:lnRef idx="1">
+            <a:schemeClr val="accent1"/>
+          </a:lnRef>
+          <a:fillRef idx="3">
+            <a:schemeClr val="accent1"/>
+          </a:fillRef>
+          <a:effectRef idx="2">
+            <a:schemeClr val="accent1"/>
+          </a:effectRef>
+          <a:fontRef idx="minor">
+            <a:schemeClr val="lt1"/>
+          </a:fontRef>
+        </p:style>
+        <p:txBody>
+          <a:bodyPr rtlCol="0" anchor="ctr"/>
+          <a:lstStyle/>
+          <a:p>
+            <a:pPr algn="ctr"/>
+          </a:p>
+        </p:txBody>
+      </p:sp>
       <p:pic>
         <p:nvPicPr>
-          <p:cNvPr id="3" name="Picture 2" descr="logo_white.png"/>
+          <p:cNvPr id="5" name="Picture 4" descr="logo_white.png"/>
           <p:cNvPicPr>
             <a:picLocks noChangeAspect="1"/>
           </p:cNvPicPr>
@@ -8063,7 +8613,7 @@
       </p:pic>
       <p:sp>
         <p:nvSpPr>
-          <p:cNvPr id="4" name="Rounded Rectangle 3"/>
+          <p:cNvPr id="6" name="Rounded Rectangle 5"/>
           <p:cNvSpPr/>
           <p:nvPr/>
         </p:nvSpPr>
@@ -8118,25 +8668,68 @@
       </p:sp>
       <p:sp>
         <p:nvSpPr>
-          <p:cNvPr id="5" name="Rounded Rectangle 4"/>
+          <p:cNvPr id="7" name="TextBox 6"/>
+          <p:cNvSpPr txBox="1"/>
+          <p:nvPr/>
+        </p:nvSpPr>
+        <p:spPr>
+          <a:xfrm>
+            <a:off x="566928" y="932688"/>
+            <a:ext cx="11057839" cy="868680"/>
+          </a:xfrm>
+          <a:prstGeom prst="rect">
+            <a:avLst/>
+          </a:prstGeom>
+          <a:noFill/>
+        </p:spPr>
+        <p:txBody>
+          <a:bodyPr wrap="square" lIns="0" rIns="0" tIns="0" bIns="0">
+            <a:spAutoFit/>
+          </a:bodyPr>
+          <a:lstStyle/>
+          <a:p>
+            <a:r>
+              <a:rPr sz="4000" b="1">
+                <a:solidFill>
+                  <a:srgbClr val="FFF6ED"/>
+                </a:solidFill>
+                <a:latin typeface="Segoe UI"/>
+              </a:rPr>
+              <a:t>Raising</a:t>
+            </a:r>
+            <a:r>
+              <a:rPr sz="4000" b="1">
+                <a:solidFill>
+                  <a:srgbClr val="4FD1C5"/>
+                </a:solidFill>
+                <a:latin typeface="Segoe UI"/>
+              </a:rPr>
+              <a:t> $1.5M-$2.5M seed.</a:t>
+            </a:r>
+          </a:p>
+        </p:txBody>
+      </p:sp>
+      <p:sp>
+        <p:nvSpPr>
+          <p:cNvPr id="8" name="Rounded Rectangle 7"/>
           <p:cNvSpPr/>
           <p:nvPr/>
         </p:nvSpPr>
         <p:spPr>
           <a:xfrm>
-            <a:off x="10088575" y="365760"/>
-            <a:ext cx="1572768" cy="329184"/>
+            <a:off x="566928" y="1527048"/>
+            <a:ext cx="960120" cy="38100"/>
           </a:xfrm>
           <a:prstGeom prst="roundRect">
             <a:avLst>
               <a:gd name="adj" fmla="val 50000"/>
             </a:avLst>
           </a:prstGeom>
-          <a:noFill/>
-          <a:ln w="12700">
-            <a:solidFill>
-              <a:srgbClr val="FFF6ED"/>
-            </a:solidFill>
+          <a:solidFill>
+            <a:srgbClr val="4FD1C5"/>
+          </a:solidFill>
+          <a:ln>
+            <a:noFill/>
           </a:ln>
           <a:effectLst/>
         </p:spPr>
@@ -8155,68 +8748,16 @@
           </a:fontRef>
         </p:style>
         <p:txBody>
-          <a:bodyPr rtlCol="0" anchor="ctr" lIns="0" rIns="0" tIns="0" bIns="0"/>
+          <a:bodyPr rtlCol="0" anchor="ctr"/>
           <a:lstStyle/>
           <a:p>
             <a:pPr algn="ctr"/>
-            <a:r>
-              <a:rPr sz="1100">
-                <a:solidFill>
-                  <a:srgbClr val="FFF6ED"/>
-                </a:solidFill>
-                <a:latin typeface="Segoe UI"/>
-              </a:rPr>
-              <a:t>August 8, 2026</a:t>
-            </a:r>
-          </a:p>
-        </p:txBody>
-      </p:sp>
-      <p:sp>
-        <p:nvSpPr>
-          <p:cNvPr id="6" name="TextBox 5"/>
-          <p:cNvSpPr txBox="1"/>
-          <p:nvPr/>
-        </p:nvSpPr>
-        <p:spPr>
-          <a:xfrm>
-            <a:off x="566928" y="932688"/>
-            <a:ext cx="11057839" cy="868680"/>
-          </a:xfrm>
-          <a:prstGeom prst="rect">
-            <a:avLst/>
-          </a:prstGeom>
-          <a:noFill/>
-        </p:spPr>
-        <p:txBody>
-          <a:bodyPr wrap="square" lIns="0" rIns="0" tIns="0" bIns="0">
-            <a:spAutoFit/>
-          </a:bodyPr>
-          <a:lstStyle/>
-          <a:p>
-            <a:r>
-              <a:rPr sz="4000" b="1">
-                <a:solidFill>
-                  <a:srgbClr val="FFF6ED"/>
-                </a:solidFill>
-                <a:latin typeface="Segoe UI"/>
-              </a:rPr>
-              <a:t>Raising</a:t>
-            </a:r>
-            <a:r>
-              <a:rPr sz="4000" b="1">
-                <a:solidFill>
-                  <a:srgbClr val="4FD1C5"/>
-                </a:solidFill>
-                <a:latin typeface="Segoe UI"/>
-              </a:rPr>
-              <a:t> $1.5M-$2.5M seed.</a:t>
-            </a:r>
-          </a:p>
-        </p:txBody>
-      </p:sp>
-      <p:sp>
-        <p:nvSpPr>
-          <p:cNvPr id="7" name="TextBox 6"/>
+          </a:p>
+        </p:txBody>
+      </p:sp>
+      <p:sp>
+        <p:nvSpPr>
+          <p:cNvPr id="9" name="TextBox 8"/>
           <p:cNvSpPr txBox="1"/>
           <p:nvPr/>
         </p:nvSpPr>
@@ -8258,7 +8799,7 @@
       </p:sp>
       <p:sp>
         <p:nvSpPr>
-          <p:cNvPr id="8" name="Rounded Rectangle 7"/>
+          <p:cNvPr id="10" name="Rounded Rectangle 9"/>
           <p:cNvSpPr/>
           <p:nvPr/>
         </p:nvSpPr>
@@ -8272,9 +8813,17 @@
               <a:gd name="adj" fmla="val 6000"/>
             </a:avLst>
           </a:prstGeom>
-          <a:solidFill>
-            <a:srgbClr val="1C123F"/>
-          </a:solidFill>
+          <a:gradFill rotWithShape="1">
+            <a:gsLst>
+              <a:gs pos="0">
+                <a:srgbClr val="2A1E53"/>
+              </a:gs>
+              <a:gs pos="100000">
+                <a:srgbClr val="1C123F"/>
+              </a:gs>
+            </a:gsLst>
+            <a:lin scaled="0" ang="5400000"/>
+          </a:gradFill>
           <a:ln w="15240">
             <a:solidFill>
               <a:srgbClr val="4FD1C5"/>
@@ -8304,7 +8853,7 @@
       </p:sp>
       <p:sp>
         <p:nvSpPr>
-          <p:cNvPr id="9" name="TextBox 8"/>
+          <p:cNvPr id="11" name="TextBox 10"/>
           <p:cNvSpPr txBox="1"/>
           <p:nvPr/>
         </p:nvSpPr>
@@ -8346,7 +8895,7 @@
       </p:sp>
       <p:sp>
         <p:nvSpPr>
-          <p:cNvPr id="10" name="TextBox 9"/>
+          <p:cNvPr id="12" name="TextBox 11"/>
           <p:cNvSpPr txBox="1"/>
           <p:nvPr/>
         </p:nvSpPr>
@@ -8388,7 +8937,7 @@
       </p:sp>
       <p:sp>
         <p:nvSpPr>
-          <p:cNvPr id="11" name="TextBox 10"/>
+          <p:cNvPr id="13" name="TextBox 12"/>
           <p:cNvSpPr txBox="1"/>
           <p:nvPr/>
         </p:nvSpPr>
@@ -8430,7 +8979,7 @@
       </p:sp>
       <p:sp>
         <p:nvSpPr>
-          <p:cNvPr id="12" name="Rounded Rectangle 11"/>
+          <p:cNvPr id="14" name="Rounded Rectangle 13"/>
           <p:cNvSpPr/>
           <p:nvPr/>
         </p:nvSpPr>
@@ -8444,9 +8993,17 @@
               <a:gd name="adj" fmla="val 6000"/>
             </a:avLst>
           </a:prstGeom>
-          <a:solidFill>
-            <a:srgbClr val="1C123F"/>
-          </a:solidFill>
+          <a:gradFill rotWithShape="1">
+            <a:gsLst>
+              <a:gs pos="0">
+                <a:srgbClr val="2A1E53"/>
+              </a:gs>
+              <a:gs pos="100000">
+                <a:srgbClr val="1C123F"/>
+              </a:gs>
+            </a:gsLst>
+            <a:lin scaled="0" ang="5400000"/>
+          </a:gradFill>
           <a:ln w="15240">
             <a:solidFill>
               <a:srgbClr val="4CC9F0"/>
@@ -8476,7 +9033,7 @@
       </p:sp>
       <p:sp>
         <p:nvSpPr>
-          <p:cNvPr id="13" name="TextBox 12"/>
+          <p:cNvPr id="15" name="TextBox 14"/>
           <p:cNvSpPr txBox="1"/>
           <p:nvPr/>
         </p:nvSpPr>
@@ -8518,7 +9075,7 @@
       </p:sp>
       <p:sp>
         <p:nvSpPr>
-          <p:cNvPr id="14" name="TextBox 13"/>
+          <p:cNvPr id="16" name="TextBox 15"/>
           <p:cNvSpPr txBox="1"/>
           <p:nvPr/>
         </p:nvSpPr>
@@ -8560,7 +9117,7 @@
       </p:sp>
       <p:sp>
         <p:nvSpPr>
-          <p:cNvPr id="15" name="TextBox 14"/>
+          <p:cNvPr id="17" name="TextBox 16"/>
           <p:cNvSpPr txBox="1"/>
           <p:nvPr/>
         </p:nvSpPr>
@@ -8602,7 +9159,7 @@
       </p:sp>
       <p:sp>
         <p:nvSpPr>
-          <p:cNvPr id="16" name="Rounded Rectangle 15"/>
+          <p:cNvPr id="18" name="Rounded Rectangle 17"/>
           <p:cNvSpPr/>
           <p:nvPr/>
         </p:nvSpPr>
@@ -8616,9 +9173,17 @@
               <a:gd name="adj" fmla="val 6000"/>
             </a:avLst>
           </a:prstGeom>
-          <a:solidFill>
-            <a:srgbClr val="1C123F"/>
-          </a:solidFill>
+          <a:gradFill rotWithShape="1">
+            <a:gsLst>
+              <a:gs pos="0">
+                <a:srgbClr val="2A1E53"/>
+              </a:gs>
+              <a:gs pos="100000">
+                <a:srgbClr val="1C123F"/>
+              </a:gs>
+            </a:gsLst>
+            <a:lin scaled="0" ang="5400000"/>
+          </a:gradFill>
           <a:ln w="15240">
             <a:solidFill>
               <a:srgbClr val="8B6CFF"/>
@@ -8648,7 +9213,7 @@
       </p:sp>
       <p:sp>
         <p:nvSpPr>
-          <p:cNvPr id="17" name="TextBox 16"/>
+          <p:cNvPr id="19" name="TextBox 18"/>
           <p:cNvSpPr txBox="1"/>
           <p:nvPr/>
         </p:nvSpPr>
@@ -8690,7 +9255,7 @@
       </p:sp>
       <p:sp>
         <p:nvSpPr>
-          <p:cNvPr id="18" name="TextBox 17"/>
+          <p:cNvPr id="20" name="TextBox 19"/>
           <p:cNvSpPr txBox="1"/>
           <p:nvPr/>
         </p:nvSpPr>
@@ -8732,7 +9297,7 @@
       </p:sp>
       <p:sp>
         <p:nvSpPr>
-          <p:cNvPr id="19" name="TextBox 18"/>
+          <p:cNvPr id="21" name="TextBox 20"/>
           <p:cNvSpPr txBox="1"/>
           <p:nvPr/>
         </p:nvSpPr>
@@ -8774,7 +9339,7 @@
       </p:sp>
       <p:sp>
         <p:nvSpPr>
-          <p:cNvPr id="20" name="Rounded Rectangle 19"/>
+          <p:cNvPr id="22" name="Rounded Rectangle 21"/>
           <p:cNvSpPr/>
           <p:nvPr/>
         </p:nvSpPr>
@@ -8788,9 +9353,17 @@
               <a:gd name="adj" fmla="val 6000"/>
             </a:avLst>
           </a:prstGeom>
-          <a:solidFill>
-            <a:srgbClr val="1C123F"/>
-          </a:solidFill>
+          <a:gradFill rotWithShape="1">
+            <a:gsLst>
+              <a:gs pos="0">
+                <a:srgbClr val="2A1E53"/>
+              </a:gs>
+              <a:gs pos="100000">
+                <a:srgbClr val="1C123F"/>
+              </a:gs>
+            </a:gsLst>
+            <a:lin scaled="0" ang="5400000"/>
+          </a:gradFill>
           <a:ln w="15240">
             <a:solidFill>
               <a:srgbClr val="FFB020"/>
@@ -8820,7 +9393,7 @@
       </p:sp>
       <p:sp>
         <p:nvSpPr>
-          <p:cNvPr id="21" name="TextBox 20"/>
+          <p:cNvPr id="23" name="TextBox 22"/>
           <p:cNvSpPr txBox="1"/>
           <p:nvPr/>
         </p:nvSpPr>
@@ -8862,7 +9435,7 @@
       </p:sp>
       <p:sp>
         <p:nvSpPr>
-          <p:cNvPr id="22" name="TextBox 21"/>
+          <p:cNvPr id="24" name="TextBox 23"/>
           <p:cNvSpPr txBox="1"/>
           <p:nvPr/>
         </p:nvSpPr>
@@ -8904,7 +9477,7 @@
       </p:sp>
       <p:sp>
         <p:nvSpPr>
-          <p:cNvPr id="23" name="TextBox 22"/>
+          <p:cNvPr id="25" name="TextBox 24"/>
           <p:cNvSpPr txBox="1"/>
           <p:nvPr/>
         </p:nvSpPr>
@@ -8946,7 +9519,7 @@
       </p:sp>
       <p:sp>
         <p:nvSpPr>
-          <p:cNvPr id="24" name="TextBox 23"/>
+          <p:cNvPr id="26" name="TextBox 25"/>
           <p:cNvSpPr txBox="1"/>
           <p:nvPr/>
         </p:nvSpPr>
@@ -8988,7 +9561,7 @@
       </p:sp>
       <p:sp>
         <p:nvSpPr>
-          <p:cNvPr id="25" name="Rounded Rectangle 24"/>
+          <p:cNvPr id="27" name="Rounded Rectangle 26"/>
           <p:cNvSpPr/>
           <p:nvPr/>
         </p:nvSpPr>
@@ -9002,9 +9575,17 @@
               <a:gd name="adj" fmla="val 6000"/>
             </a:avLst>
           </a:prstGeom>
-          <a:solidFill>
-            <a:srgbClr val="1C123F"/>
-          </a:solidFill>
+          <a:gradFill rotWithShape="1">
+            <a:gsLst>
+              <a:gs pos="0">
+                <a:srgbClr val="2A1E53"/>
+              </a:gs>
+              <a:gs pos="100000">
+                <a:srgbClr val="1C123F"/>
+              </a:gs>
+            </a:gsLst>
+            <a:lin scaled="0" ang="5400000"/>
+          </a:gradFill>
           <a:ln w="12700">
             <a:solidFill>
               <a:srgbClr val="2A2145"/>
@@ -9034,7 +9615,7 @@
       </p:sp>
       <p:sp>
         <p:nvSpPr>
-          <p:cNvPr id="26" name="TextBox 25"/>
+          <p:cNvPr id="28" name="TextBox 27"/>
           <p:cNvSpPr txBox="1"/>
           <p:nvPr/>
         </p:nvSpPr>
@@ -9076,7 +9657,7 @@
       </p:sp>
       <p:sp>
         <p:nvSpPr>
-          <p:cNvPr id="27" name="TextBox 26"/>
+          <p:cNvPr id="29" name="TextBox 28"/>
           <p:cNvSpPr txBox="1"/>
           <p:nvPr/>
         </p:nvSpPr>
@@ -9118,7 +9699,7 @@
       </p:sp>
       <p:sp>
         <p:nvSpPr>
-          <p:cNvPr id="28" name="Rounded Rectangle 27"/>
+          <p:cNvPr id="30" name="Rounded Rectangle 29"/>
           <p:cNvSpPr/>
           <p:nvPr/>
         </p:nvSpPr>
@@ -9132,9 +9713,17 @@
               <a:gd name="adj" fmla="val 6000"/>
             </a:avLst>
           </a:prstGeom>
-          <a:solidFill>
-            <a:srgbClr val="1C123F"/>
-          </a:solidFill>
+          <a:gradFill rotWithShape="1">
+            <a:gsLst>
+              <a:gs pos="0">
+                <a:srgbClr val="2A1E53"/>
+              </a:gs>
+              <a:gs pos="100000">
+                <a:srgbClr val="1C123F"/>
+              </a:gs>
+            </a:gsLst>
+            <a:lin scaled="0" ang="5400000"/>
+          </a:gradFill>
           <a:ln w="12700">
             <a:solidFill>
               <a:srgbClr val="2A2145"/>
@@ -9164,7 +9753,7 @@
       </p:sp>
       <p:sp>
         <p:nvSpPr>
-          <p:cNvPr id="29" name="TextBox 28"/>
+          <p:cNvPr id="31" name="TextBox 30"/>
           <p:cNvSpPr txBox="1"/>
           <p:nvPr/>
         </p:nvSpPr>
@@ -9206,7 +9795,7 @@
       </p:sp>
       <p:sp>
         <p:nvSpPr>
-          <p:cNvPr id="30" name="TextBox 29"/>
+          <p:cNvPr id="32" name="TextBox 31"/>
           <p:cNvSpPr txBox="1"/>
           <p:nvPr/>
         </p:nvSpPr>
@@ -9248,7 +9837,7 @@
       </p:sp>
       <p:sp>
         <p:nvSpPr>
-          <p:cNvPr id="31" name="Rounded Rectangle 30"/>
+          <p:cNvPr id="33" name="Rounded Rectangle 32"/>
           <p:cNvSpPr/>
           <p:nvPr/>
         </p:nvSpPr>
@@ -9262,9 +9851,17 @@
               <a:gd name="adj" fmla="val 6000"/>
             </a:avLst>
           </a:prstGeom>
-          <a:solidFill>
-            <a:srgbClr val="1C123F"/>
-          </a:solidFill>
+          <a:gradFill rotWithShape="1">
+            <a:gsLst>
+              <a:gs pos="0">
+                <a:srgbClr val="2A1E53"/>
+              </a:gs>
+              <a:gs pos="100000">
+                <a:srgbClr val="1C123F"/>
+              </a:gs>
+            </a:gsLst>
+            <a:lin scaled="0" ang="5400000"/>
+          </a:gradFill>
           <a:ln w="12700">
             <a:solidFill>
               <a:srgbClr val="2A2145"/>
@@ -9294,7 +9891,7 @@
       </p:sp>
       <p:sp>
         <p:nvSpPr>
-          <p:cNvPr id="32" name="TextBox 31"/>
+          <p:cNvPr id="34" name="TextBox 33"/>
           <p:cNvSpPr txBox="1"/>
           <p:nvPr/>
         </p:nvSpPr>
@@ -9336,7 +9933,7 @@
       </p:sp>
       <p:sp>
         <p:nvSpPr>
-          <p:cNvPr id="33" name="TextBox 32"/>
+          <p:cNvPr id="35" name="TextBox 34"/>
           <p:cNvSpPr txBox="1"/>
           <p:nvPr/>
         </p:nvSpPr>
@@ -9378,7 +9975,7 @@
       </p:sp>
       <p:sp>
         <p:nvSpPr>
-          <p:cNvPr id="34" name="TextBox 33"/>
+          <p:cNvPr id="36" name="TextBox 35"/>
           <p:cNvSpPr txBox="1"/>
           <p:nvPr/>
         </p:nvSpPr>
@@ -9450,9 +10047,17 @@
           <a:prstGeom prst="rect">
             <a:avLst/>
           </a:prstGeom>
-          <a:solidFill>
-            <a:srgbClr val="0E042D"/>
-          </a:solidFill>
+          <a:gradFill rotWithShape="1">
+            <a:gsLst>
+              <a:gs pos="0">
+                <a:srgbClr val="1A0C42"/>
+              </a:gs>
+              <a:gs pos="100000">
+                <a:srgbClr val="08021C"/>
+              </a:gs>
+            </a:gsLst>
+            <a:lin scaled="0" ang="2700000"/>
+          </a:gradFill>
           <a:ln>
             <a:noFill/>
           </a:ln>
@@ -9480,9 +10085,105 @@
           </a:p>
         </p:txBody>
       </p:sp>
+      <p:sp>
+        <p:nvSpPr>
+          <p:cNvPr id="3" name="Oval 2"/>
+          <p:cNvSpPr/>
+          <p:nvPr/>
+        </p:nvSpPr>
+        <p:spPr>
+          <a:xfrm>
+            <a:off x="7406640" y="-3840480"/>
+            <a:ext cx="7863840" cy="7863840"/>
+          </a:xfrm>
+          <a:prstGeom prst="ellipse">
+            <a:avLst/>
+          </a:prstGeom>
+          <a:solidFill>
+            <a:srgbClr val="8B6CFF">
+              <a:alpha val="11000"/>
+            </a:srgbClr>
+          </a:solidFill>
+          <a:ln>
+            <a:noFill/>
+          </a:ln>
+          <a:effectLst>
+            <a:softEdge rad="2011680"/>
+          </a:effectLst>
+        </p:spPr>
+        <p:style>
+          <a:lnRef idx="1">
+            <a:schemeClr val="accent1"/>
+          </a:lnRef>
+          <a:fillRef idx="3">
+            <a:schemeClr val="accent1"/>
+          </a:fillRef>
+          <a:effectRef idx="2">
+            <a:schemeClr val="accent1"/>
+          </a:effectRef>
+          <a:fontRef idx="minor">
+            <a:schemeClr val="lt1"/>
+          </a:fontRef>
+        </p:style>
+        <p:txBody>
+          <a:bodyPr rtlCol="0" anchor="ctr"/>
+          <a:lstStyle/>
+          <a:p>
+            <a:pPr algn="ctr"/>
+          </a:p>
+        </p:txBody>
+      </p:sp>
+      <p:sp>
+        <p:nvSpPr>
+          <p:cNvPr id="4" name="Oval 3"/>
+          <p:cNvSpPr/>
+          <p:nvPr/>
+        </p:nvSpPr>
+        <p:spPr>
+          <a:xfrm>
+            <a:off x="-3383280" y="3840480"/>
+            <a:ext cx="6400800" cy="6400800"/>
+          </a:xfrm>
+          <a:prstGeom prst="ellipse">
+            <a:avLst/>
+          </a:prstGeom>
+          <a:solidFill>
+            <a:srgbClr val="4FD1C5">
+              <a:alpha val="7000"/>
+            </a:srgbClr>
+          </a:solidFill>
+          <a:ln>
+            <a:noFill/>
+          </a:ln>
+          <a:effectLst>
+            <a:softEdge rad="1828800"/>
+          </a:effectLst>
+        </p:spPr>
+        <p:style>
+          <a:lnRef idx="1">
+            <a:schemeClr val="accent1"/>
+          </a:lnRef>
+          <a:fillRef idx="3">
+            <a:schemeClr val="accent1"/>
+          </a:fillRef>
+          <a:effectRef idx="2">
+            <a:schemeClr val="accent1"/>
+          </a:effectRef>
+          <a:fontRef idx="minor">
+            <a:schemeClr val="lt1"/>
+          </a:fontRef>
+        </p:style>
+        <p:txBody>
+          <a:bodyPr rtlCol="0" anchor="ctr"/>
+          <a:lstStyle/>
+          <a:p>
+            <a:pPr algn="ctr"/>
+          </a:p>
+        </p:txBody>
+      </p:sp>
       <p:pic>
         <p:nvPicPr>
-          <p:cNvPr id="3" name="Picture 2" descr="logo_white.png"/>
+          <p:cNvPr id="5" name="Picture 4" descr="logo_white.png"/>
           <p:cNvPicPr>
             <a:picLocks noChangeAspect="1"/>
           </p:cNvPicPr>
@@ -9506,7 +10207,7 @@
       </p:pic>
       <p:pic>
         <p:nvPicPr>
-          <p:cNvPr id="4" name="Picture 3" descr="prism.png"/>
+          <p:cNvPr id="6" name="Picture 5" descr="prism.png"/>
           <p:cNvPicPr>
             <a:picLocks noChangeAspect="1"/>
           </p:cNvPicPr>
@@ -9530,7 +10231,7 @@
       </p:pic>
       <p:sp>
         <p:nvSpPr>
-          <p:cNvPr id="5" name="TextBox 4"/>
+          <p:cNvPr id="7" name="TextBox 6"/>
           <p:cNvSpPr txBox="1"/>
           <p:nvPr/>
         </p:nvSpPr>
@@ -9591,7 +10292,7 @@
       </p:sp>
       <p:sp>
         <p:nvSpPr>
-          <p:cNvPr id="6" name="TextBox 5"/>
+          <p:cNvPr id="8" name="TextBox 7"/>
           <p:cNvSpPr txBox="1"/>
           <p:nvPr/>
         </p:nvSpPr>
@@ -9633,7 +10334,7 @@
       </p:sp>
       <p:sp>
         <p:nvSpPr>
-          <p:cNvPr id="7" name="TextBox 6"/>
+          <p:cNvPr id="9" name="TextBox 8"/>
           <p:cNvSpPr txBox="1"/>
           <p:nvPr/>
         </p:nvSpPr>
@@ -9675,7 +10376,7 @@
       </p:sp>
       <p:sp>
         <p:nvSpPr>
-          <p:cNvPr id="8" name="TextBox 7"/>
+          <p:cNvPr id="10" name="TextBox 9"/>
           <p:cNvSpPr txBox="1"/>
           <p:nvPr/>
         </p:nvSpPr>
@@ -9717,7 +10418,7 @@
       </p:sp>
       <p:sp>
         <p:nvSpPr>
-          <p:cNvPr id="9" name="TextBox 8"/>
+          <p:cNvPr id="11" name="TextBox 10"/>
           <p:cNvSpPr txBox="1"/>
           <p:nvPr/>
         </p:nvSpPr>
@@ -9759,7 +10460,7 @@
       </p:sp>
       <p:sp>
         <p:nvSpPr>
-          <p:cNvPr id="10" name="TextBox 9"/>
+          <p:cNvPr id="12" name="TextBox 11"/>
           <p:cNvSpPr txBox="1"/>
           <p:nvPr/>
         </p:nvSpPr>
@@ -9801,7 +10502,7 @@
       </p:sp>
       <p:sp>
         <p:nvSpPr>
-          <p:cNvPr id="11" name="TextBox 10"/>
+          <p:cNvPr id="13" name="TextBox 12"/>
           <p:cNvSpPr txBox="1"/>
           <p:nvPr/>
         </p:nvSpPr>
@@ -9843,7 +10544,7 @@
       </p:sp>
       <p:sp>
         <p:nvSpPr>
-          <p:cNvPr id="12" name="TextBox 11"/>
+          <p:cNvPr id="14" name="TextBox 13"/>
           <p:cNvSpPr txBox="1"/>
           <p:nvPr/>
         </p:nvSpPr>
@@ -9885,7 +10586,7 @@
       </p:sp>
       <p:sp>
         <p:nvSpPr>
-          <p:cNvPr id="13" name="Rounded Rectangle 12"/>
+          <p:cNvPr id="15" name="Rounded Rectangle 14"/>
           <p:cNvSpPr/>
           <p:nvPr/>
         </p:nvSpPr>
@@ -9934,61 +10635,6 @@
                 <a:latin typeface="Segoe UI"/>
               </a:rPr>
               <a:t>Investor Pitch Deck</a:t>
-            </a:r>
-          </a:p>
-        </p:txBody>
-      </p:sp>
-      <p:sp>
-        <p:nvSpPr>
-          <p:cNvPr id="14" name="Rounded Rectangle 13"/>
-          <p:cNvSpPr/>
-          <p:nvPr/>
-        </p:nvSpPr>
-        <p:spPr>
-          <a:xfrm>
-            <a:off x="2578608" y="6053328"/>
-            <a:ext cx="1572768" cy="329184"/>
-          </a:xfrm>
-          <a:prstGeom prst="roundRect">
-            <a:avLst>
-              <a:gd name="adj" fmla="val 50000"/>
-            </a:avLst>
-          </a:prstGeom>
-          <a:noFill/>
-          <a:ln w="12700">
-            <a:solidFill>
-              <a:srgbClr val="FFF6ED"/>
-            </a:solidFill>
-          </a:ln>
-          <a:effectLst/>
-        </p:spPr>
-        <p:style>
-          <a:lnRef idx="1">
-            <a:schemeClr val="accent1"/>
-          </a:lnRef>
-          <a:fillRef idx="3">
-            <a:schemeClr val="accent1"/>
-          </a:fillRef>
-          <a:effectRef idx="2">
-            <a:schemeClr val="accent1"/>
-          </a:effectRef>
-          <a:fontRef idx="minor">
-            <a:schemeClr val="lt1"/>
-          </a:fontRef>
-        </p:style>
-        <p:txBody>
-          <a:bodyPr rtlCol="0" anchor="ctr" lIns="0" rIns="0" tIns="0" bIns="0"/>
-          <a:lstStyle/>
-          <a:p>
-            <a:pPr algn="ctr"/>
-            <a:r>
-              <a:rPr sz="1150">
-                <a:solidFill>
-                  <a:srgbClr val="FFF6ED"/>
-                </a:solidFill>
-                <a:latin typeface="Segoe UI"/>
-              </a:rPr>
-              <a:t>August 8, 2026</a:t>
             </a:r>
           </a:p>
         </p:txBody>
@@ -10025,9 +10671,17 @@
           <a:prstGeom prst="rect">
             <a:avLst/>
           </a:prstGeom>
-          <a:solidFill>
-            <a:srgbClr val="0E042D"/>
-          </a:solidFill>
+          <a:gradFill rotWithShape="1">
+            <a:gsLst>
+              <a:gs pos="0">
+                <a:srgbClr val="1A0C42"/>
+              </a:gs>
+              <a:gs pos="100000">
+                <a:srgbClr val="08021C"/>
+              </a:gs>
+            </a:gsLst>
+            <a:lin scaled="0" ang="2700000"/>
+          </a:gradFill>
           <a:ln>
             <a:noFill/>
           </a:ln>
@@ -10055,9 +10709,105 @@
           </a:p>
         </p:txBody>
       </p:sp>
+      <p:sp>
+        <p:nvSpPr>
+          <p:cNvPr id="3" name="Oval 2"/>
+          <p:cNvSpPr/>
+          <p:nvPr/>
+        </p:nvSpPr>
+        <p:spPr>
+          <a:xfrm>
+            <a:off x="7406640" y="-3840480"/>
+            <a:ext cx="7863840" cy="7863840"/>
+          </a:xfrm>
+          <a:prstGeom prst="ellipse">
+            <a:avLst/>
+          </a:prstGeom>
+          <a:solidFill>
+            <a:srgbClr val="8B6CFF">
+              <a:alpha val="11000"/>
+            </a:srgbClr>
+          </a:solidFill>
+          <a:ln>
+            <a:noFill/>
+          </a:ln>
+          <a:effectLst>
+            <a:softEdge rad="2011680"/>
+          </a:effectLst>
+        </p:spPr>
+        <p:style>
+          <a:lnRef idx="1">
+            <a:schemeClr val="accent1"/>
+          </a:lnRef>
+          <a:fillRef idx="3">
+            <a:schemeClr val="accent1"/>
+          </a:fillRef>
+          <a:effectRef idx="2">
+            <a:schemeClr val="accent1"/>
+          </a:effectRef>
+          <a:fontRef idx="minor">
+            <a:schemeClr val="lt1"/>
+          </a:fontRef>
+        </p:style>
+        <p:txBody>
+          <a:bodyPr rtlCol="0" anchor="ctr"/>
+          <a:lstStyle/>
+          <a:p>
+            <a:pPr algn="ctr"/>
+          </a:p>
+        </p:txBody>
+      </p:sp>
+      <p:sp>
+        <p:nvSpPr>
+          <p:cNvPr id="4" name="Oval 3"/>
+          <p:cNvSpPr/>
+          <p:nvPr/>
+        </p:nvSpPr>
+        <p:spPr>
+          <a:xfrm>
+            <a:off x="-3383280" y="3840480"/>
+            <a:ext cx="6400800" cy="6400800"/>
+          </a:xfrm>
+          <a:prstGeom prst="ellipse">
+            <a:avLst/>
+          </a:prstGeom>
+          <a:solidFill>
+            <a:srgbClr val="4FD1C5">
+              <a:alpha val="7000"/>
+            </a:srgbClr>
+          </a:solidFill>
+          <a:ln>
+            <a:noFill/>
+          </a:ln>
+          <a:effectLst>
+            <a:softEdge rad="1828800"/>
+          </a:effectLst>
+        </p:spPr>
+        <p:style>
+          <a:lnRef idx="1">
+            <a:schemeClr val="accent1"/>
+          </a:lnRef>
+          <a:fillRef idx="3">
+            <a:schemeClr val="accent1"/>
+          </a:fillRef>
+          <a:effectRef idx="2">
+            <a:schemeClr val="accent1"/>
+          </a:effectRef>
+          <a:fontRef idx="minor">
+            <a:schemeClr val="lt1"/>
+          </a:fontRef>
+        </p:style>
+        <p:txBody>
+          <a:bodyPr rtlCol="0" anchor="ctr"/>
+          <a:lstStyle/>
+          <a:p>
+            <a:pPr algn="ctr"/>
+          </a:p>
+        </p:txBody>
+      </p:sp>
       <p:pic>
         <p:nvPicPr>
-          <p:cNvPr id="3" name="Picture 2" descr="logo_white.png"/>
+          <p:cNvPr id="5" name="Picture 4" descr="logo_white.png"/>
           <p:cNvPicPr>
             <a:picLocks noChangeAspect="1"/>
           </p:cNvPicPr>
@@ -10081,7 +10831,7 @@
       </p:pic>
       <p:sp>
         <p:nvSpPr>
-          <p:cNvPr id="4" name="Rounded Rectangle 3"/>
+          <p:cNvPr id="6" name="Rounded Rectangle 5"/>
           <p:cNvSpPr/>
           <p:nvPr/>
         </p:nvSpPr>
@@ -10136,25 +10886,68 @@
       </p:sp>
       <p:sp>
         <p:nvSpPr>
-          <p:cNvPr id="5" name="Rounded Rectangle 4"/>
+          <p:cNvPr id="7" name="TextBox 6"/>
+          <p:cNvSpPr txBox="1"/>
+          <p:nvPr/>
+        </p:nvSpPr>
+        <p:spPr>
+          <a:xfrm>
+            <a:off x="566928" y="932688"/>
+            <a:ext cx="11057839" cy="868680"/>
+          </a:xfrm>
+          <a:prstGeom prst="rect">
+            <a:avLst/>
+          </a:prstGeom>
+          <a:noFill/>
+        </p:spPr>
+        <p:txBody>
+          <a:bodyPr wrap="square" lIns="0" rIns="0" tIns="0" bIns="0">
+            <a:spAutoFit/>
+          </a:bodyPr>
+          <a:lstStyle/>
+          <a:p>
+            <a:r>
+              <a:rPr sz="3400" b="1">
+                <a:solidFill>
+                  <a:srgbClr val="FFF6ED"/>
+                </a:solidFill>
+                <a:latin typeface="Segoe UI"/>
+              </a:rPr>
+              <a:t>Every number</a:t>
+            </a:r>
+            <a:r>
+              <a:rPr sz="3400" b="1">
+                <a:solidFill>
+                  <a:srgbClr val="4FD1C5"/>
+                </a:solidFill>
+                <a:latin typeface="Segoe UI"/>
+              </a:rPr>
+              <a:t> has a source.</a:t>
+            </a:r>
+          </a:p>
+        </p:txBody>
+      </p:sp>
+      <p:sp>
+        <p:nvSpPr>
+          <p:cNvPr id="8" name="Rounded Rectangle 7"/>
           <p:cNvSpPr/>
           <p:nvPr/>
         </p:nvSpPr>
         <p:spPr>
           <a:xfrm>
-            <a:off x="10088575" y="365760"/>
-            <a:ext cx="1572768" cy="329184"/>
+            <a:off x="566928" y="1435608"/>
+            <a:ext cx="960120" cy="38100"/>
           </a:xfrm>
           <a:prstGeom prst="roundRect">
             <a:avLst>
               <a:gd name="adj" fmla="val 50000"/>
             </a:avLst>
           </a:prstGeom>
-          <a:noFill/>
-          <a:ln w="12700">
-            <a:solidFill>
-              <a:srgbClr val="FFF6ED"/>
-            </a:solidFill>
+          <a:solidFill>
+            <a:srgbClr val="4FD1C5"/>
+          </a:solidFill>
+          <a:ln>
+            <a:noFill/>
           </a:ln>
           <a:effectLst/>
         </p:spPr>
@@ -10173,68 +10966,16 @@
           </a:fontRef>
         </p:style>
         <p:txBody>
-          <a:bodyPr rtlCol="0" anchor="ctr" lIns="0" rIns="0" tIns="0" bIns="0"/>
+          <a:bodyPr rtlCol="0" anchor="ctr"/>
           <a:lstStyle/>
           <a:p>
             <a:pPr algn="ctr"/>
-            <a:r>
-              <a:rPr sz="1100">
-                <a:solidFill>
-                  <a:srgbClr val="FFF6ED"/>
-                </a:solidFill>
-                <a:latin typeface="Segoe UI"/>
-              </a:rPr>
-              <a:t>August 8, 2026</a:t>
-            </a:r>
-          </a:p>
-        </p:txBody>
-      </p:sp>
-      <p:sp>
-        <p:nvSpPr>
-          <p:cNvPr id="6" name="TextBox 5"/>
-          <p:cNvSpPr txBox="1"/>
-          <p:nvPr/>
-        </p:nvSpPr>
-        <p:spPr>
-          <a:xfrm>
-            <a:off x="566928" y="932688"/>
-            <a:ext cx="11057839" cy="868680"/>
-          </a:xfrm>
-          <a:prstGeom prst="rect">
-            <a:avLst/>
-          </a:prstGeom>
-          <a:noFill/>
-        </p:spPr>
-        <p:txBody>
-          <a:bodyPr wrap="square" lIns="0" rIns="0" tIns="0" bIns="0">
-            <a:spAutoFit/>
-          </a:bodyPr>
-          <a:lstStyle/>
-          <a:p>
-            <a:r>
-              <a:rPr sz="3400" b="1">
-                <a:solidFill>
-                  <a:srgbClr val="FFF6ED"/>
-                </a:solidFill>
-                <a:latin typeface="Segoe UI"/>
-              </a:rPr>
-              <a:t>Every number</a:t>
-            </a:r>
-            <a:r>
-              <a:rPr sz="3400" b="1">
-                <a:solidFill>
-                  <a:srgbClr val="4FD1C5"/>
-                </a:solidFill>
-                <a:latin typeface="Segoe UI"/>
-              </a:rPr>
-              <a:t> has a source.</a:t>
-            </a:r>
-          </a:p>
-        </p:txBody>
-      </p:sp>
-      <p:sp>
-        <p:nvSpPr>
-          <p:cNvPr id="7" name="TextBox 6"/>
+          </a:p>
+        </p:txBody>
+      </p:sp>
+      <p:sp>
+        <p:nvSpPr>
+          <p:cNvPr id="9" name="TextBox 8"/>
           <p:cNvSpPr txBox="1"/>
           <p:nvPr/>
         </p:nvSpPr>
@@ -10276,23 +11017,31 @@
       </p:sp>
       <p:sp>
         <p:nvSpPr>
-          <p:cNvPr id="8" name="Rounded Rectangle 7"/>
+          <p:cNvPr id="10" name="Rounded Rectangle 9"/>
           <p:cNvSpPr/>
           <p:nvPr/>
         </p:nvSpPr>
         <p:spPr>
           <a:xfrm>
             <a:off x="566928" y="2103120"/>
-            <a:ext cx="2586151" cy="3913632"/>
+            <a:ext cx="2586151" cy="2788920"/>
           </a:xfrm>
           <a:prstGeom prst="roundRect">
             <a:avLst>
               <a:gd name="adj" fmla="val 6000"/>
             </a:avLst>
           </a:prstGeom>
-          <a:solidFill>
-            <a:srgbClr val="1C123F"/>
-          </a:solidFill>
+          <a:gradFill rotWithShape="1">
+            <a:gsLst>
+              <a:gs pos="0">
+                <a:srgbClr val="2A1E53"/>
+              </a:gs>
+              <a:gs pos="100000">
+                <a:srgbClr val="1C123F"/>
+              </a:gs>
+            </a:gsLst>
+            <a:lin scaled="0" ang="5400000"/>
+          </a:gradFill>
           <a:ln w="15240">
             <a:solidFill>
               <a:srgbClr val="FF4D9D"/>
@@ -10322,7 +11071,7 @@
       </p:sp>
       <p:sp>
         <p:nvSpPr>
-          <p:cNvPr id="9" name="TextBox 8"/>
+          <p:cNvPr id="11" name="TextBox 10"/>
           <p:cNvSpPr txBox="1"/>
           <p:nvPr/>
         </p:nvSpPr>
@@ -10364,14 +11113,14 @@
       </p:sp>
       <p:sp>
         <p:nvSpPr>
-          <p:cNvPr id="10" name="TextBox 9"/>
+          <p:cNvPr id="12" name="TextBox 11"/>
           <p:cNvSpPr txBox="1"/>
           <p:nvPr/>
         </p:nvSpPr>
         <p:spPr>
           <a:xfrm>
-            <a:off x="768096" y="2651760"/>
-            <a:ext cx="2183815" cy="3200400"/>
+            <a:off x="768096" y="2633472"/>
+            <a:ext cx="2183815" cy="2103120"/>
           </a:xfrm>
           <a:prstGeom prst="rect">
             <a:avLst/>
@@ -10389,7 +11138,7 @@
                 <a:spcPct val="130000"/>
               </a:lnSpc>
               <a:spcAft>
-                <a:spcPts val="700"/>
+                <a:spcPts val="600"/>
               </a:spcAft>
             </a:pPr>
             <a:r>
@@ -10399,7 +11148,7 @@
                 </a:solidFill>
                 <a:latin typeface="Segoe UI"/>
               </a:rPr>
-              <a:t>·  8M+ deepfake files — Bright Defense</a:t>
+              <a:t>·  8M deepfake files by end-2025 — Bright Defense</a:t>
             </a:r>
           </a:p>
           <a:p>
@@ -10408,7 +11157,7 @@
                 <a:spcPct val="130000"/>
               </a:lnSpc>
               <a:spcAft>
-                <a:spcPts val="700"/>
+                <a:spcPts val="600"/>
               </a:spcAft>
             </a:pPr>
             <a:r>
@@ -10418,7 +11167,7 @@
                 </a:solidFill>
                 <a:latin typeface="Segoe UI"/>
               </a:rPr>
-              <a:t>·  $3B+ US losses, 2025 — Security Magazine</a:t>
+              <a:t>·  $893M AI-fraud losses, 22,364 cases — FBI IC3 2025</a:t>
             </a:r>
           </a:p>
           <a:p>
@@ -10427,7 +11176,7 @@
                 <a:spcPct val="130000"/>
               </a:lnSpc>
               <a:spcAft>
-                <a:spcPts val="700"/>
+                <a:spcPts val="600"/>
               </a:spcAft>
             </a:pPr>
             <a:r>
@@ -10437,7 +11186,7 @@
                 </a:solidFill>
                 <a:latin typeface="Segoe UI"/>
               </a:rPr>
-              <a:t>·  $280K average incident — DeepStrike</a:t>
+              <a:t>·  $280K average incident — IRONSCALES, Fall 2025</a:t>
             </a:r>
           </a:p>
           <a:p>
@@ -10446,7 +11195,7 @@
                 <a:spcPct val="130000"/>
               </a:lnSpc>
               <a:spcAft>
-                <a:spcPts val="700"/>
+                <a:spcPts val="600"/>
               </a:spcAft>
             </a:pPr>
             <a:r>
@@ -10456,30 +11205,38 @@
                 </a:solidFill>
                 <a:latin typeface="Segoe UI"/>
               </a:rPr>
-              <a:t>·  0.1% human accuracy — iProov</a:t>
-            </a:r>
-          </a:p>
-        </p:txBody>
-      </p:sp>
-      <p:sp>
-        <p:nvSpPr>
-          <p:cNvPr id="11" name="Rounded Rectangle 10"/>
+              <a:t>·  60% confident, 0.1% perfect — iProov, Feb 2025</a:t>
+            </a:r>
+          </a:p>
+        </p:txBody>
+      </p:sp>
+      <p:sp>
+        <p:nvSpPr>
+          <p:cNvPr id="13" name="Rounded Rectangle 12"/>
           <p:cNvSpPr/>
           <p:nvPr/>
         </p:nvSpPr>
         <p:spPr>
           <a:xfrm>
             <a:off x="3390823" y="2103120"/>
-            <a:ext cx="2586151" cy="3913632"/>
+            <a:ext cx="2586151" cy="2788920"/>
           </a:xfrm>
           <a:prstGeom prst="roundRect">
             <a:avLst>
               <a:gd name="adj" fmla="val 6000"/>
             </a:avLst>
           </a:prstGeom>
-          <a:solidFill>
-            <a:srgbClr val="1C123F"/>
-          </a:solidFill>
+          <a:gradFill rotWithShape="1">
+            <a:gsLst>
+              <a:gs pos="0">
+                <a:srgbClr val="2A1E53"/>
+              </a:gs>
+              <a:gs pos="100000">
+                <a:srgbClr val="1C123F"/>
+              </a:gs>
+            </a:gsLst>
+            <a:lin scaled="0" ang="5400000"/>
+          </a:gradFill>
           <a:ln w="15240">
             <a:solidFill>
               <a:srgbClr val="4CC9F0"/>
@@ -10509,7 +11266,7 @@
       </p:sp>
       <p:sp>
         <p:nvSpPr>
-          <p:cNvPr id="12" name="TextBox 11"/>
+          <p:cNvPr id="14" name="TextBox 13"/>
           <p:cNvSpPr txBox="1"/>
           <p:nvPr/>
         </p:nvSpPr>
@@ -10551,14 +11308,14 @@
       </p:sp>
       <p:sp>
         <p:nvSpPr>
-          <p:cNvPr id="13" name="TextBox 12"/>
+          <p:cNvPr id="15" name="TextBox 14"/>
           <p:cNvSpPr txBox="1"/>
           <p:nvPr/>
         </p:nvSpPr>
         <p:spPr>
           <a:xfrm>
-            <a:off x="3591991" y="2651760"/>
-            <a:ext cx="2183815" cy="3200400"/>
+            <a:off x="3591991" y="2633472"/>
+            <a:ext cx="2183815" cy="2103120"/>
           </a:xfrm>
           <a:prstGeom prst="rect">
             <a:avLst/>
@@ -10576,7 +11333,7 @@
                 <a:spcPct val="130000"/>
               </a:lnSpc>
               <a:spcAft>
-                <a:spcPts val="700"/>
+                <a:spcPts val="600"/>
               </a:spcAft>
             </a:pPr>
             <a:r>
@@ -10595,7 +11352,7 @@
                 <a:spcPct val="130000"/>
               </a:lnSpc>
               <a:spcAft>
-                <a:spcPts val="700"/>
+                <a:spcPts val="600"/>
               </a:spcAft>
             </a:pPr>
             <a:r>
@@ -10614,7 +11371,7 @@
                 <a:spcPct val="130000"/>
               </a:lnSpc>
               <a:spcAft>
-                <a:spcPts val="700"/>
+                <a:spcPts val="600"/>
               </a:spcAft>
             </a:pPr>
             <a:r>
@@ -10633,7 +11390,7 @@
                 <a:spcPct val="130000"/>
               </a:lnSpc>
               <a:spcAft>
-                <a:spcPts val="700"/>
+                <a:spcPts val="600"/>
               </a:spcAft>
             </a:pPr>
             <a:r>
@@ -10650,23 +11407,31 @@
       </p:sp>
       <p:sp>
         <p:nvSpPr>
-          <p:cNvPr id="14" name="Rounded Rectangle 13"/>
+          <p:cNvPr id="16" name="Rounded Rectangle 15"/>
           <p:cNvSpPr/>
           <p:nvPr/>
         </p:nvSpPr>
         <p:spPr>
           <a:xfrm>
             <a:off x="6214719" y="2103120"/>
-            <a:ext cx="2586151" cy="3913632"/>
+            <a:ext cx="2586151" cy="2788920"/>
           </a:xfrm>
           <a:prstGeom prst="roundRect">
             <a:avLst>
               <a:gd name="adj" fmla="val 6000"/>
             </a:avLst>
           </a:prstGeom>
-          <a:solidFill>
-            <a:srgbClr val="1C123F"/>
-          </a:solidFill>
+          <a:gradFill rotWithShape="1">
+            <a:gsLst>
+              <a:gs pos="0">
+                <a:srgbClr val="2A1E53"/>
+              </a:gs>
+              <a:gs pos="100000">
+                <a:srgbClr val="1C123F"/>
+              </a:gs>
+            </a:gsLst>
+            <a:lin scaled="0" ang="5400000"/>
+          </a:gradFill>
           <a:ln w="15240">
             <a:solidFill>
               <a:srgbClr val="8B6CFF"/>
@@ -10696,7 +11461,7 @@
       </p:sp>
       <p:sp>
         <p:nvSpPr>
-          <p:cNvPr id="15" name="TextBox 14"/>
+          <p:cNvPr id="17" name="TextBox 16"/>
           <p:cNvSpPr txBox="1"/>
           <p:nvPr/>
         </p:nvSpPr>
@@ -10738,14 +11503,14 @@
       </p:sp>
       <p:sp>
         <p:nvSpPr>
-          <p:cNvPr id="16" name="TextBox 15"/>
+          <p:cNvPr id="18" name="TextBox 17"/>
           <p:cNvSpPr txBox="1"/>
           <p:nvPr/>
         </p:nvSpPr>
         <p:spPr>
           <a:xfrm>
-            <a:off x="6415887" y="2651760"/>
-            <a:ext cx="2183815" cy="3200400"/>
+            <a:off x="6415887" y="2633472"/>
+            <a:ext cx="2183815" cy="2103120"/>
           </a:xfrm>
           <a:prstGeom prst="rect">
             <a:avLst/>
@@ -10763,7 +11528,7 @@
                 <a:spcPct val="130000"/>
               </a:lnSpc>
               <a:spcAft>
-                <a:spcPts val="700"/>
+                <a:spcPts val="600"/>
               </a:spcAft>
             </a:pPr>
             <a:r>
@@ -10782,7 +11547,7 @@
                 <a:spcPct val="130000"/>
               </a:lnSpc>
               <a:spcAft>
-                <a:spcPts val="700"/>
+                <a:spcPts val="600"/>
               </a:spcAft>
             </a:pPr>
             <a:r>
@@ -10801,7 +11566,7 @@
                 <a:spcPct val="130000"/>
               </a:lnSpc>
               <a:spcAft>
-                <a:spcPts val="700"/>
+                <a:spcPts val="600"/>
               </a:spcAft>
             </a:pPr>
             <a:r>
@@ -10820,7 +11585,7 @@
                 <a:spcPct val="130000"/>
               </a:lnSpc>
               <a:spcAft>
-                <a:spcPts val="700"/>
+                <a:spcPts val="600"/>
               </a:spcAft>
             </a:pPr>
             <a:r>
@@ -10837,23 +11602,31 @@
       </p:sp>
       <p:sp>
         <p:nvSpPr>
-          <p:cNvPr id="17" name="Rounded Rectangle 16"/>
+          <p:cNvPr id="19" name="Rounded Rectangle 18"/>
           <p:cNvSpPr/>
           <p:nvPr/>
         </p:nvSpPr>
         <p:spPr>
           <a:xfrm>
             <a:off x="9038615" y="2103120"/>
-            <a:ext cx="2586151" cy="3913632"/>
+            <a:ext cx="2586151" cy="2788920"/>
           </a:xfrm>
           <a:prstGeom prst="roundRect">
             <a:avLst>
               <a:gd name="adj" fmla="val 6000"/>
             </a:avLst>
           </a:prstGeom>
-          <a:solidFill>
-            <a:srgbClr val="1C123F"/>
-          </a:solidFill>
+          <a:gradFill rotWithShape="1">
+            <a:gsLst>
+              <a:gs pos="0">
+                <a:srgbClr val="2A1E53"/>
+              </a:gs>
+              <a:gs pos="100000">
+                <a:srgbClr val="1C123F"/>
+              </a:gs>
+            </a:gsLst>
+            <a:lin scaled="0" ang="5400000"/>
+          </a:gradFill>
           <a:ln w="15240">
             <a:solidFill>
               <a:srgbClr val="4FD1C5"/>
@@ -10883,7 +11656,7 @@
       </p:sp>
       <p:sp>
         <p:nvSpPr>
-          <p:cNvPr id="18" name="TextBox 17"/>
+          <p:cNvPr id="20" name="TextBox 19"/>
           <p:cNvSpPr txBox="1"/>
           <p:nvPr/>
         </p:nvSpPr>
@@ -10925,14 +11698,14 @@
       </p:sp>
       <p:sp>
         <p:nvSpPr>
-          <p:cNvPr id="19" name="TextBox 18"/>
+          <p:cNvPr id="21" name="TextBox 20"/>
           <p:cNvSpPr txBox="1"/>
           <p:nvPr/>
         </p:nvSpPr>
         <p:spPr>
           <a:xfrm>
-            <a:off x="9239783" y="2651760"/>
-            <a:ext cx="2183815" cy="3200400"/>
+            <a:off x="9239783" y="2633472"/>
+            <a:ext cx="2183815" cy="2103120"/>
           </a:xfrm>
           <a:prstGeom prst="rect">
             <a:avLst/>
@@ -10950,7 +11723,7 @@
                 <a:spcPct val="130000"/>
               </a:lnSpc>
               <a:spcAft>
-                <a:spcPts val="700"/>
+                <a:spcPts val="600"/>
               </a:spcAft>
             </a:pPr>
             <a:r>
@@ -10969,7 +11742,7 @@
                 <a:spcPct val="130000"/>
               </a:lnSpc>
               <a:spcAft>
-                <a:spcPts val="700"/>
+                <a:spcPts val="600"/>
               </a:spcAft>
             </a:pPr>
             <a:r>
@@ -10988,7 +11761,7 @@
                 <a:spcPct val="130000"/>
               </a:lnSpc>
               <a:spcAft>
-                <a:spcPts val="700"/>
+                <a:spcPts val="600"/>
               </a:spcAft>
             </a:pPr>
             <a:r>
@@ -11007,7 +11780,7 @@
                 <a:spcPct val="130000"/>
               </a:lnSpc>
               <a:spcAft>
-                <a:spcPts val="700"/>
+                <a:spcPts val="600"/>
               </a:spcAft>
             </a:pPr>
             <a:r>
@@ -11024,14 +11797,14 @@
       </p:sp>
       <p:sp>
         <p:nvSpPr>
-          <p:cNvPr id="20" name="TextBox 19"/>
+          <p:cNvPr id="22" name="TextBox 21"/>
           <p:cNvSpPr txBox="1"/>
           <p:nvPr/>
         </p:nvSpPr>
         <p:spPr>
           <a:xfrm>
-            <a:off x="566928" y="6144768"/>
-            <a:ext cx="11057839" cy="365760"/>
+            <a:off x="566928" y="5138928"/>
+            <a:ext cx="11057839" cy="548640"/>
           </a:xfrm>
           <a:prstGeom prst="rect">
             <a:avLst/>
@@ -11059,7 +11832,7 @@
                 </a:solidFill>
                 <a:latin typeface="Segoe UI"/>
               </a:rPr>
-              <a:t>ProofyX measured results are reproducible from this repository: scripts/make_pitch_figures.py regenerates every chart in this deck from the recorded evaluation runs.</a:t>
+              <a:t>Every chart is regenerated by scripts/make_pitch_figures.py. ProofyX accuracy and latency figures come from the CorefakeNet evaluation run on 332 held-out samples; the eval harness is in the repository and the run is repeatable on request.</a:t>
             </a:r>
           </a:p>
         </p:txBody>
@@ -11096,9 +11869,17 @@
           <a:prstGeom prst="rect">
             <a:avLst/>
           </a:prstGeom>
-          <a:solidFill>
-            <a:srgbClr val="0E042D"/>
-          </a:solidFill>
+          <a:gradFill rotWithShape="1">
+            <a:gsLst>
+              <a:gs pos="0">
+                <a:srgbClr val="1A0C42"/>
+              </a:gs>
+              <a:gs pos="100000">
+                <a:srgbClr val="08021C"/>
+              </a:gs>
+            </a:gsLst>
+            <a:lin scaled="0" ang="2700000"/>
+          </a:gradFill>
           <a:ln>
             <a:noFill/>
           </a:ln>
@@ -11126,9 +11907,105 @@
           </a:p>
         </p:txBody>
       </p:sp>
+      <p:sp>
+        <p:nvSpPr>
+          <p:cNvPr id="3" name="Oval 2"/>
+          <p:cNvSpPr/>
+          <p:nvPr/>
+        </p:nvSpPr>
+        <p:spPr>
+          <a:xfrm>
+            <a:off x="7406640" y="-3840480"/>
+            <a:ext cx="7863840" cy="7863840"/>
+          </a:xfrm>
+          <a:prstGeom prst="ellipse">
+            <a:avLst/>
+          </a:prstGeom>
+          <a:solidFill>
+            <a:srgbClr val="8B6CFF">
+              <a:alpha val="11000"/>
+            </a:srgbClr>
+          </a:solidFill>
+          <a:ln>
+            <a:noFill/>
+          </a:ln>
+          <a:effectLst>
+            <a:softEdge rad="2011680"/>
+          </a:effectLst>
+        </p:spPr>
+        <p:style>
+          <a:lnRef idx="1">
+            <a:schemeClr val="accent1"/>
+          </a:lnRef>
+          <a:fillRef idx="3">
+            <a:schemeClr val="accent1"/>
+          </a:fillRef>
+          <a:effectRef idx="2">
+            <a:schemeClr val="accent1"/>
+          </a:effectRef>
+          <a:fontRef idx="minor">
+            <a:schemeClr val="lt1"/>
+          </a:fontRef>
+        </p:style>
+        <p:txBody>
+          <a:bodyPr rtlCol="0" anchor="ctr"/>
+          <a:lstStyle/>
+          <a:p>
+            <a:pPr algn="ctr"/>
+          </a:p>
+        </p:txBody>
+      </p:sp>
+      <p:sp>
+        <p:nvSpPr>
+          <p:cNvPr id="4" name="Oval 3"/>
+          <p:cNvSpPr/>
+          <p:nvPr/>
+        </p:nvSpPr>
+        <p:spPr>
+          <a:xfrm>
+            <a:off x="-3383280" y="3840480"/>
+            <a:ext cx="6400800" cy="6400800"/>
+          </a:xfrm>
+          <a:prstGeom prst="ellipse">
+            <a:avLst/>
+          </a:prstGeom>
+          <a:solidFill>
+            <a:srgbClr val="4FD1C5">
+              <a:alpha val="7000"/>
+            </a:srgbClr>
+          </a:solidFill>
+          <a:ln>
+            <a:noFill/>
+          </a:ln>
+          <a:effectLst>
+            <a:softEdge rad="1828800"/>
+          </a:effectLst>
+        </p:spPr>
+        <p:style>
+          <a:lnRef idx="1">
+            <a:schemeClr val="accent1"/>
+          </a:lnRef>
+          <a:fillRef idx="3">
+            <a:schemeClr val="accent1"/>
+          </a:fillRef>
+          <a:effectRef idx="2">
+            <a:schemeClr val="accent1"/>
+          </a:effectRef>
+          <a:fontRef idx="minor">
+            <a:schemeClr val="lt1"/>
+          </a:fontRef>
+        </p:style>
+        <p:txBody>
+          <a:bodyPr rtlCol="0" anchor="ctr"/>
+          <a:lstStyle/>
+          <a:p>
+            <a:pPr algn="ctr"/>
+          </a:p>
+        </p:txBody>
+      </p:sp>
       <p:pic>
         <p:nvPicPr>
-          <p:cNvPr id="3" name="Picture 2" descr="logo_white.png"/>
+          <p:cNvPr id="5" name="Picture 4" descr="logo_white.png"/>
           <p:cNvPicPr>
             <a:picLocks noChangeAspect="1"/>
           </p:cNvPicPr>
@@ -11152,7 +12029,7 @@
       </p:pic>
       <p:sp>
         <p:nvSpPr>
-          <p:cNvPr id="4" name="Rounded Rectangle 3"/>
+          <p:cNvPr id="6" name="Rounded Rectangle 5"/>
           <p:cNvSpPr/>
           <p:nvPr/>
         </p:nvSpPr>
@@ -11207,25 +12084,68 @@
       </p:sp>
       <p:sp>
         <p:nvSpPr>
-          <p:cNvPr id="5" name="Rounded Rectangle 4"/>
+          <p:cNvPr id="7" name="TextBox 6"/>
+          <p:cNvSpPr txBox="1"/>
+          <p:nvPr/>
+        </p:nvSpPr>
+        <p:spPr>
+          <a:xfrm>
+            <a:off x="566928" y="932688"/>
+            <a:ext cx="11057839" cy="868680"/>
+          </a:xfrm>
+          <a:prstGeom prst="rect">
+            <a:avLst/>
+          </a:prstGeom>
+          <a:noFill/>
+        </p:spPr>
+        <p:txBody>
+          <a:bodyPr wrap="square" lIns="0" rIns="0" tIns="0" bIns="0">
+            <a:spAutoFit/>
+          </a:bodyPr>
+          <a:lstStyle/>
+          <a:p>
+            <a:r>
+              <a:rPr sz="4000" b="1">
+                <a:solidFill>
+                  <a:srgbClr val="FFF6ED"/>
+                </a:solidFill>
+                <a:latin typeface="Segoe UI"/>
+              </a:rPr>
+              <a:t>Nobody can tell</a:t>
+            </a:r>
+            <a:r>
+              <a:rPr sz="4000" b="1">
+                <a:solidFill>
+                  <a:srgbClr val="4FD1C5"/>
+                </a:solidFill>
+                <a:latin typeface="Segoe UI"/>
+              </a:rPr>
+              <a:t> what is real any more.</a:t>
+            </a:r>
+          </a:p>
+        </p:txBody>
+      </p:sp>
+      <p:sp>
+        <p:nvSpPr>
+          <p:cNvPr id="8" name="Rounded Rectangle 7"/>
           <p:cNvSpPr/>
           <p:nvPr/>
         </p:nvSpPr>
         <p:spPr>
           <a:xfrm>
-            <a:off x="10088575" y="365760"/>
-            <a:ext cx="1572768" cy="329184"/>
+            <a:off x="566928" y="1527048"/>
+            <a:ext cx="960120" cy="38100"/>
           </a:xfrm>
           <a:prstGeom prst="roundRect">
             <a:avLst>
               <a:gd name="adj" fmla="val 50000"/>
             </a:avLst>
           </a:prstGeom>
-          <a:noFill/>
-          <a:ln w="12700">
-            <a:solidFill>
-              <a:srgbClr val="FFF6ED"/>
-            </a:solidFill>
+          <a:solidFill>
+            <a:srgbClr val="4FD1C5"/>
+          </a:solidFill>
+          <a:ln>
+            <a:noFill/>
           </a:ln>
           <a:effectLst/>
         </p:spPr>
@@ -11244,68 +12164,16 @@
           </a:fontRef>
         </p:style>
         <p:txBody>
-          <a:bodyPr rtlCol="0" anchor="ctr" lIns="0" rIns="0" tIns="0" bIns="0"/>
+          <a:bodyPr rtlCol="0" anchor="ctr"/>
           <a:lstStyle/>
           <a:p>
             <a:pPr algn="ctr"/>
-            <a:r>
-              <a:rPr sz="1100">
-                <a:solidFill>
-                  <a:srgbClr val="FFF6ED"/>
-                </a:solidFill>
-                <a:latin typeface="Segoe UI"/>
-              </a:rPr>
-              <a:t>August 8, 2026</a:t>
-            </a:r>
-          </a:p>
-        </p:txBody>
-      </p:sp>
-      <p:sp>
-        <p:nvSpPr>
-          <p:cNvPr id="6" name="TextBox 5"/>
-          <p:cNvSpPr txBox="1"/>
-          <p:nvPr/>
-        </p:nvSpPr>
-        <p:spPr>
-          <a:xfrm>
-            <a:off x="566928" y="932688"/>
-            <a:ext cx="11057839" cy="868680"/>
-          </a:xfrm>
-          <a:prstGeom prst="rect">
-            <a:avLst/>
-          </a:prstGeom>
-          <a:noFill/>
-        </p:spPr>
-        <p:txBody>
-          <a:bodyPr wrap="square" lIns="0" rIns="0" tIns="0" bIns="0">
-            <a:spAutoFit/>
-          </a:bodyPr>
-          <a:lstStyle/>
-          <a:p>
-            <a:r>
-              <a:rPr sz="4000" b="1">
-                <a:solidFill>
-                  <a:srgbClr val="FFF6ED"/>
-                </a:solidFill>
-                <a:latin typeface="Segoe UI"/>
-              </a:rPr>
-              <a:t>Nobody can tell</a:t>
-            </a:r>
-            <a:r>
-              <a:rPr sz="4000" b="1">
-                <a:solidFill>
-                  <a:srgbClr val="4FD1C5"/>
-                </a:solidFill>
-                <a:latin typeface="Segoe UI"/>
-              </a:rPr>
-              <a:t> what is real any more.</a:t>
-            </a:r>
-          </a:p>
-        </p:txBody>
-      </p:sp>
-      <p:sp>
-        <p:nvSpPr>
-          <p:cNvPr id="7" name="TextBox 6"/>
+          </a:p>
+        </p:txBody>
+      </p:sp>
+      <p:sp>
+        <p:nvSpPr>
+          <p:cNvPr id="9" name="TextBox 8"/>
           <p:cNvSpPr txBox="1"/>
           <p:nvPr/>
         </p:nvSpPr>
@@ -11347,7 +12215,7 @@
       </p:sp>
       <p:pic>
         <p:nvPicPr>
-          <p:cNvPr id="8" name="Picture 7" descr="fig_detection_gap.png"/>
+          <p:cNvPr id="10" name="Picture 9" descr="fig_detection_gap.png"/>
           <p:cNvPicPr>
             <a:picLocks noChangeAspect="1"/>
           </p:cNvPicPr>
@@ -11361,8 +12229,8 @@
         </p:blipFill>
         <p:spPr>
           <a:xfrm>
-            <a:off x="6355080" y="2511421"/>
-            <a:ext cx="5257800" cy="2429517"/>
+            <a:off x="6355080" y="2548633"/>
+            <a:ext cx="5257800" cy="2355093"/>
           </a:xfrm>
           <a:prstGeom prst="rect">
             <a:avLst/>
@@ -11371,7 +12239,7 @@
       </p:pic>
       <p:sp>
         <p:nvSpPr>
-          <p:cNvPr id="9" name="Rounded Rectangle 8"/>
+          <p:cNvPr id="11" name="Rounded Rectangle 10"/>
           <p:cNvSpPr/>
           <p:nvPr/>
         </p:nvSpPr>
@@ -11385,9 +12253,17 @@
               <a:gd name="adj" fmla="val 6000"/>
             </a:avLst>
           </a:prstGeom>
-          <a:solidFill>
-            <a:srgbClr val="1C123F"/>
-          </a:solidFill>
+          <a:gradFill rotWithShape="1">
+            <a:gsLst>
+              <a:gs pos="0">
+                <a:srgbClr val="2A1E53"/>
+              </a:gs>
+              <a:gs pos="100000">
+                <a:srgbClr val="1C123F"/>
+              </a:gs>
+            </a:gsLst>
+            <a:lin scaled="0" ang="5400000"/>
+          </a:gradFill>
           <a:ln w="15240">
             <a:solidFill>
               <a:srgbClr val="FF4D9D"/>
@@ -11417,7 +12293,7 @@
       </p:sp>
       <p:sp>
         <p:nvSpPr>
-          <p:cNvPr id="10" name="TextBox 9"/>
+          <p:cNvPr id="12" name="TextBox 11"/>
           <p:cNvSpPr txBox="1"/>
           <p:nvPr/>
         </p:nvSpPr>
@@ -11459,7 +12335,7 @@
       </p:sp>
       <p:sp>
         <p:nvSpPr>
-          <p:cNvPr id="11" name="TextBox 10"/>
+          <p:cNvPr id="13" name="TextBox 12"/>
           <p:cNvSpPr txBox="1"/>
           <p:nvPr/>
         </p:nvSpPr>
@@ -11502,7 +12378,7 @@
       </p:sp>
       <p:sp>
         <p:nvSpPr>
-          <p:cNvPr id="12" name="Rounded Rectangle 11"/>
+          <p:cNvPr id="14" name="Rounded Rectangle 13"/>
           <p:cNvSpPr/>
           <p:nvPr/>
         </p:nvSpPr>
@@ -11516,9 +12392,17 @@
               <a:gd name="adj" fmla="val 6000"/>
             </a:avLst>
           </a:prstGeom>
-          <a:solidFill>
-            <a:srgbClr val="1C123F"/>
-          </a:solidFill>
+          <a:gradFill rotWithShape="1">
+            <a:gsLst>
+              <a:gs pos="0">
+                <a:srgbClr val="2A1E53"/>
+              </a:gs>
+              <a:gs pos="100000">
+                <a:srgbClr val="1C123F"/>
+              </a:gs>
+            </a:gsLst>
+            <a:lin scaled="0" ang="5400000"/>
+          </a:gradFill>
           <a:ln w="15240">
             <a:solidFill>
               <a:srgbClr val="FF4D9D"/>
@@ -11548,7 +12432,7 @@
       </p:sp>
       <p:sp>
         <p:nvSpPr>
-          <p:cNvPr id="13" name="TextBox 12"/>
+          <p:cNvPr id="15" name="TextBox 14"/>
           <p:cNvSpPr txBox="1"/>
           <p:nvPr/>
         </p:nvSpPr>
@@ -11583,14 +12467,14 @@
                 </a:solidFill>
                 <a:latin typeface="Segoe UI"/>
               </a:rPr>
-              <a:t>$3B+</a:t>
-            </a:r>
-          </a:p>
-        </p:txBody>
-      </p:sp>
-      <p:sp>
-        <p:nvSpPr>
-          <p:cNvPr id="14" name="TextBox 13"/>
+              <a:t>$893M</a:t>
+            </a:r>
+          </a:p>
+        </p:txBody>
+      </p:sp>
+      <p:sp>
+        <p:nvSpPr>
+          <p:cNvPr id="16" name="TextBox 15"/>
           <p:cNvSpPr txBox="1"/>
           <p:nvPr/>
         </p:nvSpPr>
@@ -11625,15 +12509,15 @@
                 </a:solidFill>
                 <a:latin typeface="Segoe UI"/>
               </a:rPr>
-              <a:t>Lost to deepfake-enabled fraud in the US,
-January to September 2025</a:t>
-            </a:r>
-          </a:p>
-        </p:txBody>
-      </p:sp>
-      <p:sp>
-        <p:nvSpPr>
-          <p:cNvPr id="15" name="Rounded Rectangle 14"/>
+              <a:t>AI-enabled fraud losses logged by the FBI
+in 2025, across 22,364 complaints</a:t>
+            </a:r>
+          </a:p>
+        </p:txBody>
+      </p:sp>
+      <p:sp>
+        <p:nvSpPr>
+          <p:cNvPr id="17" name="Rounded Rectangle 16"/>
           <p:cNvSpPr/>
           <p:nvPr/>
         </p:nvSpPr>
@@ -11647,9 +12531,17 @@
               <a:gd name="adj" fmla="val 6000"/>
             </a:avLst>
           </a:prstGeom>
-          <a:solidFill>
-            <a:srgbClr val="1C123F"/>
-          </a:solidFill>
+          <a:gradFill rotWithShape="1">
+            <a:gsLst>
+              <a:gs pos="0">
+                <a:srgbClr val="2A1E53"/>
+              </a:gs>
+              <a:gs pos="100000">
+                <a:srgbClr val="1C123F"/>
+              </a:gs>
+            </a:gsLst>
+            <a:lin scaled="0" ang="5400000"/>
+          </a:gradFill>
           <a:ln w="15240">
             <a:solidFill>
               <a:srgbClr val="FFB020"/>
@@ -11679,7 +12571,7 @@
       </p:sp>
       <p:sp>
         <p:nvSpPr>
-          <p:cNvPr id="16" name="TextBox 15"/>
+          <p:cNvPr id="18" name="TextBox 17"/>
           <p:cNvSpPr txBox="1"/>
           <p:nvPr/>
         </p:nvSpPr>
@@ -11721,7 +12613,7 @@
       </p:sp>
       <p:sp>
         <p:nvSpPr>
-          <p:cNvPr id="17" name="TextBox 16"/>
+          <p:cNvPr id="19" name="TextBox 18"/>
           <p:cNvSpPr txBox="1"/>
           <p:nvPr/>
         </p:nvSpPr>
@@ -11764,7 +12656,7 @@
       </p:sp>
       <p:sp>
         <p:nvSpPr>
-          <p:cNvPr id="18" name="TextBox 17"/>
+          <p:cNvPr id="20" name="TextBox 19"/>
           <p:cNvSpPr txBox="1"/>
           <p:nvPr/>
         </p:nvSpPr>
@@ -11800,6 +12692,48 @@
                 <a:latin typeface="Segoe UI"/>
               </a:rPr>
               <a:t>Detection is now a compliance problem, not a curiosity. Banks, newsrooms and courts need an answer they can put in a file.</a:t>
+            </a:r>
+          </a:p>
+        </p:txBody>
+      </p:sp>
+      <p:sp>
+        <p:nvSpPr>
+          <p:cNvPr id="21" name="TextBox 20"/>
+          <p:cNvSpPr txBox="1"/>
+          <p:nvPr/>
+        </p:nvSpPr>
+        <p:spPr>
+          <a:xfrm>
+            <a:off x="6355080" y="5358384"/>
+            <a:ext cx="5257800" cy="548640"/>
+          </a:xfrm>
+          <a:prstGeom prst="rect">
+            <a:avLst/>
+          </a:prstGeom>
+          <a:noFill/>
+        </p:spPr>
+        <p:txBody>
+          <a:bodyPr wrap="square" anchor="t" lIns="0" rIns="0" tIns="0" bIns="0">
+            <a:spAutoFit/>
+          </a:bodyPr>
+          <a:lstStyle/>
+          <a:p>
+            <a:pPr algn="l">
+              <a:lnSpc>
+                <a:spcPct val="128000"/>
+              </a:lnSpc>
+              <a:spcAft>
+                <a:spcPts val="0"/>
+              </a:spcAft>
+            </a:pPr>
+            <a:r>
+              <a:rPr sz="1000" b="0">
+                <a:solidFill>
+                  <a:srgbClr val="A79EC4"/>
+                </a:solidFill>
+                <a:latin typeface="Segoe UI"/>
+              </a:rPr>
+              <a:t>iProov tested 2,000 UK and US consumers on real and fake media. Six in ten backed themselves; one in a thousand got every item right.</a:t>
             </a:r>
           </a:p>
         </p:txBody>
@@ -11836,9 +12770,17 @@
           <a:prstGeom prst="rect">
             <a:avLst/>
           </a:prstGeom>
-          <a:solidFill>
-            <a:srgbClr val="0E042D"/>
-          </a:solidFill>
+          <a:gradFill rotWithShape="1">
+            <a:gsLst>
+              <a:gs pos="0">
+                <a:srgbClr val="1A0C42"/>
+              </a:gs>
+              <a:gs pos="100000">
+                <a:srgbClr val="08021C"/>
+              </a:gs>
+            </a:gsLst>
+            <a:lin scaled="0" ang="2700000"/>
+          </a:gradFill>
           <a:ln>
             <a:noFill/>
           </a:ln>
@@ -11866,9 +12808,105 @@
           </a:p>
         </p:txBody>
       </p:sp>
+      <p:sp>
+        <p:nvSpPr>
+          <p:cNvPr id="3" name="Oval 2"/>
+          <p:cNvSpPr/>
+          <p:nvPr/>
+        </p:nvSpPr>
+        <p:spPr>
+          <a:xfrm>
+            <a:off x="7406640" y="-3840480"/>
+            <a:ext cx="7863840" cy="7863840"/>
+          </a:xfrm>
+          <a:prstGeom prst="ellipse">
+            <a:avLst/>
+          </a:prstGeom>
+          <a:solidFill>
+            <a:srgbClr val="8B6CFF">
+              <a:alpha val="11000"/>
+            </a:srgbClr>
+          </a:solidFill>
+          <a:ln>
+            <a:noFill/>
+          </a:ln>
+          <a:effectLst>
+            <a:softEdge rad="2011680"/>
+          </a:effectLst>
+        </p:spPr>
+        <p:style>
+          <a:lnRef idx="1">
+            <a:schemeClr val="accent1"/>
+          </a:lnRef>
+          <a:fillRef idx="3">
+            <a:schemeClr val="accent1"/>
+          </a:fillRef>
+          <a:effectRef idx="2">
+            <a:schemeClr val="accent1"/>
+          </a:effectRef>
+          <a:fontRef idx="minor">
+            <a:schemeClr val="lt1"/>
+          </a:fontRef>
+        </p:style>
+        <p:txBody>
+          <a:bodyPr rtlCol="0" anchor="ctr"/>
+          <a:lstStyle/>
+          <a:p>
+            <a:pPr algn="ctr"/>
+          </a:p>
+        </p:txBody>
+      </p:sp>
+      <p:sp>
+        <p:nvSpPr>
+          <p:cNvPr id="4" name="Oval 3"/>
+          <p:cNvSpPr/>
+          <p:nvPr/>
+        </p:nvSpPr>
+        <p:spPr>
+          <a:xfrm>
+            <a:off x="-3383280" y="3840480"/>
+            <a:ext cx="6400800" cy="6400800"/>
+          </a:xfrm>
+          <a:prstGeom prst="ellipse">
+            <a:avLst/>
+          </a:prstGeom>
+          <a:solidFill>
+            <a:srgbClr val="4FD1C5">
+              <a:alpha val="7000"/>
+            </a:srgbClr>
+          </a:solidFill>
+          <a:ln>
+            <a:noFill/>
+          </a:ln>
+          <a:effectLst>
+            <a:softEdge rad="1828800"/>
+          </a:effectLst>
+        </p:spPr>
+        <p:style>
+          <a:lnRef idx="1">
+            <a:schemeClr val="accent1"/>
+          </a:lnRef>
+          <a:fillRef idx="3">
+            <a:schemeClr val="accent1"/>
+          </a:fillRef>
+          <a:effectRef idx="2">
+            <a:schemeClr val="accent1"/>
+          </a:effectRef>
+          <a:fontRef idx="minor">
+            <a:schemeClr val="lt1"/>
+          </a:fontRef>
+        </p:style>
+        <p:txBody>
+          <a:bodyPr rtlCol="0" anchor="ctr"/>
+          <a:lstStyle/>
+          <a:p>
+            <a:pPr algn="ctr"/>
+          </a:p>
+        </p:txBody>
+      </p:sp>
       <p:pic>
         <p:nvPicPr>
-          <p:cNvPr id="3" name="Picture 2" descr="logo_white.png"/>
+          <p:cNvPr id="5" name="Picture 4" descr="logo_white.png"/>
           <p:cNvPicPr>
             <a:picLocks noChangeAspect="1"/>
           </p:cNvPicPr>
@@ -11892,7 +12930,7 @@
       </p:pic>
       <p:sp>
         <p:nvSpPr>
-          <p:cNvPr id="4" name="Rounded Rectangle 3"/>
+          <p:cNvPr id="6" name="Rounded Rectangle 5"/>
           <p:cNvSpPr/>
           <p:nvPr/>
         </p:nvSpPr>
@@ -11947,25 +12985,68 @@
       </p:sp>
       <p:sp>
         <p:nvSpPr>
-          <p:cNvPr id="5" name="Rounded Rectangle 4"/>
+          <p:cNvPr id="7" name="TextBox 6"/>
+          <p:cNvSpPr txBox="1"/>
+          <p:nvPr/>
+        </p:nvSpPr>
+        <p:spPr>
+          <a:xfrm>
+            <a:off x="566928" y="932688"/>
+            <a:ext cx="11057839" cy="868680"/>
+          </a:xfrm>
+          <a:prstGeom prst="rect">
+            <a:avLst/>
+          </a:prstGeom>
+          <a:noFill/>
+        </p:spPr>
+        <p:txBody>
+          <a:bodyPr wrap="square" lIns="0" rIns="0" tIns="0" bIns="0">
+            <a:spAutoFit/>
+          </a:bodyPr>
+          <a:lstStyle/>
+          <a:p>
+            <a:r>
+              <a:rPr sz="4000" b="1">
+                <a:solidFill>
+                  <a:srgbClr val="FFF6ED"/>
+                </a:solidFill>
+                <a:latin typeface="Segoe UI"/>
+              </a:rPr>
+              <a:t>Detection just became</a:t>
+            </a:r>
+            <a:r>
+              <a:rPr sz="4000" b="1">
+                <a:solidFill>
+                  <a:srgbClr val="4FD1C5"/>
+                </a:solidFill>
+                <a:latin typeface="Segoe UI"/>
+              </a:rPr>
+              <a:t> legally mandatory.</a:t>
+            </a:r>
+          </a:p>
+        </p:txBody>
+      </p:sp>
+      <p:sp>
+        <p:nvSpPr>
+          <p:cNvPr id="8" name="Rounded Rectangle 7"/>
           <p:cNvSpPr/>
           <p:nvPr/>
         </p:nvSpPr>
         <p:spPr>
           <a:xfrm>
-            <a:off x="10088575" y="365760"/>
-            <a:ext cx="1572768" cy="329184"/>
+            <a:off x="566928" y="1527048"/>
+            <a:ext cx="960120" cy="38100"/>
           </a:xfrm>
           <a:prstGeom prst="roundRect">
             <a:avLst>
               <a:gd name="adj" fmla="val 50000"/>
             </a:avLst>
           </a:prstGeom>
-          <a:noFill/>
-          <a:ln w="12700">
-            <a:solidFill>
-              <a:srgbClr val="FFF6ED"/>
-            </a:solidFill>
+          <a:solidFill>
+            <a:srgbClr val="4FD1C5"/>
+          </a:solidFill>
+          <a:ln>
+            <a:noFill/>
           </a:ln>
           <a:effectLst/>
         </p:spPr>
@@ -11984,68 +13065,16 @@
           </a:fontRef>
         </p:style>
         <p:txBody>
-          <a:bodyPr rtlCol="0" anchor="ctr" lIns="0" rIns="0" tIns="0" bIns="0"/>
+          <a:bodyPr rtlCol="0" anchor="ctr"/>
           <a:lstStyle/>
           <a:p>
             <a:pPr algn="ctr"/>
-            <a:r>
-              <a:rPr sz="1100">
-                <a:solidFill>
-                  <a:srgbClr val="FFF6ED"/>
-                </a:solidFill>
-                <a:latin typeface="Segoe UI"/>
-              </a:rPr>
-              <a:t>August 8, 2026</a:t>
-            </a:r>
-          </a:p>
-        </p:txBody>
-      </p:sp>
-      <p:sp>
-        <p:nvSpPr>
-          <p:cNvPr id="6" name="TextBox 5"/>
-          <p:cNvSpPr txBox="1"/>
-          <p:nvPr/>
-        </p:nvSpPr>
-        <p:spPr>
-          <a:xfrm>
-            <a:off x="566928" y="932688"/>
-            <a:ext cx="11057839" cy="868680"/>
-          </a:xfrm>
-          <a:prstGeom prst="rect">
-            <a:avLst/>
-          </a:prstGeom>
-          <a:noFill/>
-        </p:spPr>
-        <p:txBody>
-          <a:bodyPr wrap="square" lIns="0" rIns="0" tIns="0" bIns="0">
-            <a:spAutoFit/>
-          </a:bodyPr>
-          <a:lstStyle/>
-          <a:p>
-            <a:r>
-              <a:rPr sz="4000" b="1">
-                <a:solidFill>
-                  <a:srgbClr val="FFF6ED"/>
-                </a:solidFill>
-                <a:latin typeface="Segoe UI"/>
-              </a:rPr>
-              <a:t>Detection just became</a:t>
-            </a:r>
-            <a:r>
-              <a:rPr sz="4000" b="1">
-                <a:solidFill>
-                  <a:srgbClr val="4FD1C5"/>
-                </a:solidFill>
-                <a:latin typeface="Segoe UI"/>
-              </a:rPr>
-              <a:t> legally mandatory.</a:t>
-            </a:r>
-          </a:p>
-        </p:txBody>
-      </p:sp>
-      <p:sp>
-        <p:nvSpPr>
-          <p:cNvPr id="7" name="TextBox 6"/>
+          </a:p>
+        </p:txBody>
+      </p:sp>
+      <p:sp>
+        <p:nvSpPr>
+          <p:cNvPr id="9" name="TextBox 8"/>
           <p:cNvSpPr txBox="1"/>
           <p:nvPr/>
         </p:nvSpPr>
@@ -12087,7 +13116,7 @@
       </p:sp>
       <p:sp>
         <p:nvSpPr>
-          <p:cNvPr id="8" name="Rounded Rectangle 7"/>
+          <p:cNvPr id="10" name="Rounded Rectangle 9"/>
           <p:cNvSpPr/>
           <p:nvPr/>
         </p:nvSpPr>
@@ -12101,9 +13130,17 @@
               <a:gd name="adj" fmla="val 6000"/>
             </a:avLst>
           </a:prstGeom>
-          <a:solidFill>
-            <a:srgbClr val="1C123F"/>
-          </a:solidFill>
+          <a:gradFill rotWithShape="1">
+            <a:gsLst>
+              <a:gs pos="0">
+                <a:srgbClr val="2A1E53"/>
+              </a:gs>
+              <a:gs pos="100000">
+                <a:srgbClr val="1C123F"/>
+              </a:gs>
+            </a:gsLst>
+            <a:lin scaled="0" ang="5400000"/>
+          </a:gradFill>
           <a:ln w="15240">
             <a:solidFill>
               <a:srgbClr val="8B6CFF"/>
@@ -12133,7 +13170,7 @@
       </p:sp>
       <p:sp>
         <p:nvSpPr>
-          <p:cNvPr id="9" name="TextBox 8"/>
+          <p:cNvPr id="11" name="TextBox 10"/>
           <p:cNvSpPr txBox="1"/>
           <p:nvPr/>
         </p:nvSpPr>
@@ -12175,7 +13212,7 @@
       </p:sp>
       <p:sp>
         <p:nvSpPr>
-          <p:cNvPr id="10" name="TextBox 9"/>
+          <p:cNvPr id="12" name="TextBox 11"/>
           <p:cNvSpPr txBox="1"/>
           <p:nvPr/>
         </p:nvSpPr>
@@ -12217,7 +13254,7 @@
       </p:sp>
       <p:sp>
         <p:nvSpPr>
-          <p:cNvPr id="11" name="TextBox 10"/>
+          <p:cNvPr id="13" name="TextBox 12"/>
           <p:cNvSpPr txBox="1"/>
           <p:nvPr/>
         </p:nvSpPr>
@@ -12259,7 +13296,7 @@
       </p:sp>
       <p:sp>
         <p:nvSpPr>
-          <p:cNvPr id="12" name="Rounded Rectangle 11"/>
+          <p:cNvPr id="14" name="Rounded Rectangle 13"/>
           <p:cNvSpPr/>
           <p:nvPr/>
         </p:nvSpPr>
@@ -12273,9 +13310,17 @@
               <a:gd name="adj" fmla="val 6000"/>
             </a:avLst>
           </a:prstGeom>
-          <a:solidFill>
-            <a:srgbClr val="1C123F"/>
-          </a:solidFill>
+          <a:gradFill rotWithShape="1">
+            <a:gsLst>
+              <a:gs pos="0">
+                <a:srgbClr val="2A1E53"/>
+              </a:gs>
+              <a:gs pos="100000">
+                <a:srgbClr val="1C123F"/>
+              </a:gs>
+            </a:gsLst>
+            <a:lin scaled="0" ang="5400000"/>
+          </a:gradFill>
           <a:ln w="15240">
             <a:solidFill>
               <a:srgbClr val="4CC9F0"/>
@@ -12305,7 +13350,7 @@
       </p:sp>
       <p:sp>
         <p:nvSpPr>
-          <p:cNvPr id="13" name="TextBox 12"/>
+          <p:cNvPr id="15" name="TextBox 14"/>
           <p:cNvSpPr txBox="1"/>
           <p:nvPr/>
         </p:nvSpPr>
@@ -12347,7 +13392,7 @@
       </p:sp>
       <p:sp>
         <p:nvSpPr>
-          <p:cNvPr id="14" name="TextBox 13"/>
+          <p:cNvPr id="16" name="TextBox 15"/>
           <p:cNvSpPr txBox="1"/>
           <p:nvPr/>
         </p:nvSpPr>
@@ -12389,7 +13434,7 @@
       </p:sp>
       <p:sp>
         <p:nvSpPr>
-          <p:cNvPr id="15" name="TextBox 14"/>
+          <p:cNvPr id="17" name="TextBox 16"/>
           <p:cNvSpPr txBox="1"/>
           <p:nvPr/>
         </p:nvSpPr>
@@ -12431,7 +13476,7 @@
       </p:sp>
       <p:sp>
         <p:nvSpPr>
-          <p:cNvPr id="16" name="Rounded Rectangle 15"/>
+          <p:cNvPr id="18" name="Rounded Rectangle 17"/>
           <p:cNvSpPr/>
           <p:nvPr/>
         </p:nvSpPr>
@@ -12445,9 +13490,17 @@
               <a:gd name="adj" fmla="val 6000"/>
             </a:avLst>
           </a:prstGeom>
-          <a:solidFill>
-            <a:srgbClr val="1C123F"/>
-          </a:solidFill>
+          <a:gradFill rotWithShape="1">
+            <a:gsLst>
+              <a:gs pos="0">
+                <a:srgbClr val="2A1E53"/>
+              </a:gs>
+              <a:gs pos="100000">
+                <a:srgbClr val="1C123F"/>
+              </a:gs>
+            </a:gsLst>
+            <a:lin scaled="0" ang="5400000"/>
+          </a:gradFill>
           <a:ln w="15240">
             <a:solidFill>
               <a:srgbClr val="4FD1C5"/>
@@ -12477,7 +13530,7 @@
       </p:sp>
       <p:sp>
         <p:nvSpPr>
-          <p:cNvPr id="17" name="TextBox 16"/>
+          <p:cNvPr id="19" name="TextBox 18"/>
           <p:cNvSpPr txBox="1"/>
           <p:nvPr/>
         </p:nvSpPr>
@@ -12519,7 +13572,7 @@
       </p:sp>
       <p:sp>
         <p:nvSpPr>
-          <p:cNvPr id="18" name="TextBox 17"/>
+          <p:cNvPr id="20" name="TextBox 19"/>
           <p:cNvSpPr txBox="1"/>
           <p:nvPr/>
         </p:nvSpPr>
@@ -12561,7 +13614,7 @@
       </p:sp>
       <p:sp>
         <p:nvSpPr>
-          <p:cNvPr id="19" name="TextBox 18"/>
+          <p:cNvPr id="21" name="TextBox 20"/>
           <p:cNvSpPr txBox="1"/>
           <p:nvPr/>
         </p:nvSpPr>
@@ -12603,7 +13656,7 @@
       </p:sp>
       <p:sp>
         <p:nvSpPr>
-          <p:cNvPr id="20" name="Rounded Rectangle 19"/>
+          <p:cNvPr id="22" name="Rounded Rectangle 21"/>
           <p:cNvSpPr/>
           <p:nvPr/>
         </p:nvSpPr>
@@ -12617,9 +13670,17 @@
               <a:gd name="adj" fmla="val 6000"/>
             </a:avLst>
           </a:prstGeom>
-          <a:solidFill>
-            <a:srgbClr val="1C123F"/>
-          </a:solidFill>
+          <a:gradFill rotWithShape="1">
+            <a:gsLst>
+              <a:gs pos="0">
+                <a:srgbClr val="2A1E53"/>
+              </a:gs>
+              <a:gs pos="100000">
+                <a:srgbClr val="1C123F"/>
+              </a:gs>
+            </a:gsLst>
+            <a:lin scaled="0" ang="5400000"/>
+          </a:gradFill>
           <a:ln w="15240">
             <a:solidFill>
               <a:srgbClr val="FFB020"/>
@@ -12649,7 +13710,7 @@
       </p:sp>
       <p:sp>
         <p:nvSpPr>
-          <p:cNvPr id="21" name="TextBox 20"/>
+          <p:cNvPr id="23" name="TextBox 22"/>
           <p:cNvSpPr txBox="1"/>
           <p:nvPr/>
         </p:nvSpPr>
@@ -12691,7 +13752,7 @@
       </p:sp>
       <p:sp>
         <p:nvSpPr>
-          <p:cNvPr id="22" name="TextBox 21"/>
+          <p:cNvPr id="24" name="TextBox 23"/>
           <p:cNvSpPr txBox="1"/>
           <p:nvPr/>
         </p:nvSpPr>
@@ -12733,7 +13794,7 @@
       </p:sp>
       <p:sp>
         <p:nvSpPr>
-          <p:cNvPr id="23" name="TextBox 22"/>
+          <p:cNvPr id="25" name="TextBox 24"/>
           <p:cNvSpPr txBox="1"/>
           <p:nvPr/>
         </p:nvSpPr>
@@ -12775,7 +13836,7 @@
       </p:sp>
       <p:sp>
         <p:nvSpPr>
-          <p:cNvPr id="24" name="Rounded Rectangle 23"/>
+          <p:cNvPr id="26" name="Rounded Rectangle 25"/>
           <p:cNvSpPr/>
           <p:nvPr/>
         </p:nvSpPr>
@@ -12789,9 +13850,17 @@
               <a:gd name="adj" fmla="val 6000"/>
             </a:avLst>
           </a:prstGeom>
-          <a:solidFill>
-            <a:srgbClr val="1C123F"/>
-          </a:solidFill>
+          <a:gradFill rotWithShape="1">
+            <a:gsLst>
+              <a:gs pos="0">
+                <a:srgbClr val="2A1E53"/>
+              </a:gs>
+              <a:gs pos="100000">
+                <a:srgbClr val="1C123F"/>
+              </a:gs>
+            </a:gsLst>
+            <a:lin scaled="0" ang="5400000"/>
+          </a:gradFill>
           <a:ln w="17780">
             <a:solidFill>
               <a:srgbClr val="4FD1C5"/>
@@ -12821,7 +13890,7 @@
       </p:sp>
       <p:sp>
         <p:nvSpPr>
-          <p:cNvPr id="25" name="TextBox 24"/>
+          <p:cNvPr id="27" name="TextBox 26"/>
           <p:cNvSpPr txBox="1"/>
           <p:nvPr/>
         </p:nvSpPr>
@@ -12893,9 +13962,17 @@
           <a:prstGeom prst="rect">
             <a:avLst/>
           </a:prstGeom>
-          <a:solidFill>
-            <a:srgbClr val="0E042D"/>
-          </a:solidFill>
+          <a:gradFill rotWithShape="1">
+            <a:gsLst>
+              <a:gs pos="0">
+                <a:srgbClr val="1A0C42"/>
+              </a:gs>
+              <a:gs pos="100000">
+                <a:srgbClr val="08021C"/>
+              </a:gs>
+            </a:gsLst>
+            <a:lin scaled="0" ang="2700000"/>
+          </a:gradFill>
           <a:ln>
             <a:noFill/>
           </a:ln>
@@ -12923,9 +14000,105 @@
           </a:p>
         </p:txBody>
       </p:sp>
+      <p:sp>
+        <p:nvSpPr>
+          <p:cNvPr id="3" name="Oval 2"/>
+          <p:cNvSpPr/>
+          <p:nvPr/>
+        </p:nvSpPr>
+        <p:spPr>
+          <a:xfrm>
+            <a:off x="7406640" y="-3840480"/>
+            <a:ext cx="7863840" cy="7863840"/>
+          </a:xfrm>
+          <a:prstGeom prst="ellipse">
+            <a:avLst/>
+          </a:prstGeom>
+          <a:solidFill>
+            <a:srgbClr val="8B6CFF">
+              <a:alpha val="11000"/>
+            </a:srgbClr>
+          </a:solidFill>
+          <a:ln>
+            <a:noFill/>
+          </a:ln>
+          <a:effectLst>
+            <a:softEdge rad="2011680"/>
+          </a:effectLst>
+        </p:spPr>
+        <p:style>
+          <a:lnRef idx="1">
+            <a:schemeClr val="accent1"/>
+          </a:lnRef>
+          <a:fillRef idx="3">
+            <a:schemeClr val="accent1"/>
+          </a:fillRef>
+          <a:effectRef idx="2">
+            <a:schemeClr val="accent1"/>
+          </a:effectRef>
+          <a:fontRef idx="minor">
+            <a:schemeClr val="lt1"/>
+          </a:fontRef>
+        </p:style>
+        <p:txBody>
+          <a:bodyPr rtlCol="0" anchor="ctr"/>
+          <a:lstStyle/>
+          <a:p>
+            <a:pPr algn="ctr"/>
+          </a:p>
+        </p:txBody>
+      </p:sp>
+      <p:sp>
+        <p:nvSpPr>
+          <p:cNvPr id="4" name="Oval 3"/>
+          <p:cNvSpPr/>
+          <p:nvPr/>
+        </p:nvSpPr>
+        <p:spPr>
+          <a:xfrm>
+            <a:off x="-3383280" y="3840480"/>
+            <a:ext cx="6400800" cy="6400800"/>
+          </a:xfrm>
+          <a:prstGeom prst="ellipse">
+            <a:avLst/>
+          </a:prstGeom>
+          <a:solidFill>
+            <a:srgbClr val="4FD1C5">
+              <a:alpha val="7000"/>
+            </a:srgbClr>
+          </a:solidFill>
+          <a:ln>
+            <a:noFill/>
+          </a:ln>
+          <a:effectLst>
+            <a:softEdge rad="1828800"/>
+          </a:effectLst>
+        </p:spPr>
+        <p:style>
+          <a:lnRef idx="1">
+            <a:schemeClr val="accent1"/>
+          </a:lnRef>
+          <a:fillRef idx="3">
+            <a:schemeClr val="accent1"/>
+          </a:fillRef>
+          <a:effectRef idx="2">
+            <a:schemeClr val="accent1"/>
+          </a:effectRef>
+          <a:fontRef idx="minor">
+            <a:schemeClr val="lt1"/>
+          </a:fontRef>
+        </p:style>
+        <p:txBody>
+          <a:bodyPr rtlCol="0" anchor="ctr"/>
+          <a:lstStyle/>
+          <a:p>
+            <a:pPr algn="ctr"/>
+          </a:p>
+        </p:txBody>
+      </p:sp>
       <p:pic>
         <p:nvPicPr>
-          <p:cNvPr id="3" name="Picture 2" descr="logo_white.png"/>
+          <p:cNvPr id="5" name="Picture 4" descr="logo_white.png"/>
           <p:cNvPicPr>
             <a:picLocks noChangeAspect="1"/>
           </p:cNvPicPr>
@@ -12949,7 +14122,7 @@
       </p:pic>
       <p:sp>
         <p:nvSpPr>
-          <p:cNvPr id="4" name="Rounded Rectangle 3"/>
+          <p:cNvPr id="6" name="Rounded Rectangle 5"/>
           <p:cNvSpPr/>
           <p:nvPr/>
         </p:nvSpPr>
@@ -13004,25 +14177,68 @@
       </p:sp>
       <p:sp>
         <p:nvSpPr>
-          <p:cNvPr id="5" name="Rounded Rectangle 4"/>
+          <p:cNvPr id="7" name="TextBox 6"/>
+          <p:cNvSpPr txBox="1"/>
+          <p:nvPr/>
+        </p:nvSpPr>
+        <p:spPr>
+          <a:xfrm>
+            <a:off x="566928" y="932688"/>
+            <a:ext cx="11057839" cy="868680"/>
+          </a:xfrm>
+          <a:prstGeom prst="rect">
+            <a:avLst/>
+          </a:prstGeom>
+          <a:noFill/>
+        </p:spPr>
+        <p:txBody>
+          <a:bodyPr wrap="square" lIns="0" rIns="0" tIns="0" bIns="0">
+            <a:spAutoFit/>
+          </a:bodyPr>
+          <a:lstStyle/>
+          <a:p>
+            <a:r>
+              <a:rPr sz="4000" b="1">
+                <a:solidFill>
+                  <a:srgbClr val="FFF6ED"/>
+                </a:solidFill>
+                <a:latin typeface="Segoe UI"/>
+              </a:rPr>
+              <a:t>One number, and</a:t>
+            </a:r>
+            <a:r>
+              <a:rPr sz="4000" b="1">
+                <a:solidFill>
+                  <a:srgbClr val="4FD1C5"/>
+                </a:solidFill>
+                <a:latin typeface="Segoe UI"/>
+              </a:rPr>
+              <a:t> the reason behind it.</a:t>
+            </a:r>
+          </a:p>
+        </p:txBody>
+      </p:sp>
+      <p:sp>
+        <p:nvSpPr>
+          <p:cNvPr id="8" name="Rounded Rectangle 7"/>
           <p:cNvSpPr/>
           <p:nvPr/>
         </p:nvSpPr>
         <p:spPr>
           <a:xfrm>
-            <a:off x="10088575" y="365760"/>
-            <a:ext cx="1572768" cy="329184"/>
+            <a:off x="566928" y="1527048"/>
+            <a:ext cx="960120" cy="38100"/>
           </a:xfrm>
           <a:prstGeom prst="roundRect">
             <a:avLst>
               <a:gd name="adj" fmla="val 50000"/>
             </a:avLst>
           </a:prstGeom>
-          <a:noFill/>
-          <a:ln w="12700">
-            <a:solidFill>
-              <a:srgbClr val="FFF6ED"/>
-            </a:solidFill>
+          <a:solidFill>
+            <a:srgbClr val="4FD1C5"/>
+          </a:solidFill>
+          <a:ln>
+            <a:noFill/>
           </a:ln>
           <a:effectLst/>
         </p:spPr>
@@ -13041,68 +14257,16 @@
           </a:fontRef>
         </p:style>
         <p:txBody>
-          <a:bodyPr rtlCol="0" anchor="ctr" lIns="0" rIns="0" tIns="0" bIns="0"/>
+          <a:bodyPr rtlCol="0" anchor="ctr"/>
           <a:lstStyle/>
           <a:p>
             <a:pPr algn="ctr"/>
-            <a:r>
-              <a:rPr sz="1100">
-                <a:solidFill>
-                  <a:srgbClr val="FFF6ED"/>
-                </a:solidFill>
-                <a:latin typeface="Segoe UI"/>
-              </a:rPr>
-              <a:t>August 8, 2026</a:t>
-            </a:r>
-          </a:p>
-        </p:txBody>
-      </p:sp>
-      <p:sp>
-        <p:nvSpPr>
-          <p:cNvPr id="6" name="TextBox 5"/>
-          <p:cNvSpPr txBox="1"/>
-          <p:nvPr/>
-        </p:nvSpPr>
-        <p:spPr>
-          <a:xfrm>
-            <a:off x="566928" y="932688"/>
-            <a:ext cx="11057839" cy="868680"/>
-          </a:xfrm>
-          <a:prstGeom prst="rect">
-            <a:avLst/>
-          </a:prstGeom>
-          <a:noFill/>
-        </p:spPr>
-        <p:txBody>
-          <a:bodyPr wrap="square" lIns="0" rIns="0" tIns="0" bIns="0">
-            <a:spAutoFit/>
-          </a:bodyPr>
-          <a:lstStyle/>
-          <a:p>
-            <a:r>
-              <a:rPr sz="4000" b="1">
-                <a:solidFill>
-                  <a:srgbClr val="FFF6ED"/>
-                </a:solidFill>
-                <a:latin typeface="Segoe UI"/>
-              </a:rPr>
-              <a:t>One number, and</a:t>
-            </a:r>
-            <a:r>
-              <a:rPr sz="4000" b="1">
-                <a:solidFill>
-                  <a:srgbClr val="4FD1C5"/>
-                </a:solidFill>
-                <a:latin typeface="Segoe UI"/>
-              </a:rPr>
-              <a:t> the reason behind it.</a:t>
-            </a:r>
-          </a:p>
-        </p:txBody>
-      </p:sp>
-      <p:sp>
-        <p:nvSpPr>
-          <p:cNvPr id="7" name="TextBox 6"/>
+          </a:p>
+        </p:txBody>
+      </p:sp>
+      <p:sp>
+        <p:nvSpPr>
+          <p:cNvPr id="9" name="TextBox 8"/>
           <p:cNvSpPr txBox="1"/>
           <p:nvPr/>
         </p:nvSpPr>
@@ -13144,7 +14308,7 @@
       </p:sp>
       <p:pic>
         <p:nvPicPr>
-          <p:cNvPr id="8" name="Picture 7" descr="modality_flow.png"/>
+          <p:cNvPr id="10" name="Picture 9" descr="modality_flow.png"/>
           <p:cNvPicPr>
             <a:picLocks noChangeAspect="1"/>
           </p:cNvPicPr>
@@ -13168,7 +14332,7 @@
       </p:pic>
       <p:sp>
         <p:nvSpPr>
-          <p:cNvPr id="9" name="Rounded Rectangle 8"/>
+          <p:cNvPr id="11" name="Rounded Rectangle 10"/>
           <p:cNvSpPr/>
           <p:nvPr/>
         </p:nvSpPr>
@@ -13182,9 +14346,17 @@
               <a:gd name="adj" fmla="val 6000"/>
             </a:avLst>
           </a:prstGeom>
-          <a:solidFill>
-            <a:srgbClr val="1C123F"/>
-          </a:solidFill>
+          <a:gradFill rotWithShape="1">
+            <a:gsLst>
+              <a:gs pos="0">
+                <a:srgbClr val="2A1E53"/>
+              </a:gs>
+              <a:gs pos="100000">
+                <a:srgbClr val="1C123F"/>
+              </a:gs>
+            </a:gsLst>
+            <a:lin scaled="0" ang="5400000"/>
+          </a:gradFill>
           <a:ln w="15240">
             <a:solidFill>
               <a:srgbClr val="4FD1C5"/>
@@ -13214,7 +14386,7 @@
       </p:sp>
       <p:sp>
         <p:nvSpPr>
-          <p:cNvPr id="10" name="TextBox 9"/>
+          <p:cNvPr id="12" name="TextBox 11"/>
           <p:cNvSpPr txBox="1"/>
           <p:nvPr/>
         </p:nvSpPr>
@@ -13256,7 +14428,7 @@
       </p:sp>
       <p:sp>
         <p:nvSpPr>
-          <p:cNvPr id="11" name="TextBox 10"/>
+          <p:cNvPr id="13" name="TextBox 12"/>
           <p:cNvSpPr txBox="1"/>
           <p:nvPr/>
         </p:nvSpPr>
@@ -13298,7 +14470,7 @@
       </p:sp>
       <p:sp>
         <p:nvSpPr>
-          <p:cNvPr id="12" name="TextBox 11"/>
+          <p:cNvPr id="14" name="TextBox 13"/>
           <p:cNvSpPr txBox="1"/>
           <p:nvPr/>
         </p:nvSpPr>
@@ -13340,7 +14512,7 @@
       </p:sp>
       <p:sp>
         <p:nvSpPr>
-          <p:cNvPr id="13" name="Rounded Rectangle 12"/>
+          <p:cNvPr id="15" name="Rounded Rectangle 14"/>
           <p:cNvSpPr/>
           <p:nvPr/>
         </p:nvSpPr>
@@ -13354,9 +14526,17 @@
               <a:gd name="adj" fmla="val 6000"/>
             </a:avLst>
           </a:prstGeom>
-          <a:solidFill>
-            <a:srgbClr val="1C123F"/>
-          </a:solidFill>
+          <a:gradFill rotWithShape="1">
+            <a:gsLst>
+              <a:gs pos="0">
+                <a:srgbClr val="2A1E53"/>
+              </a:gs>
+              <a:gs pos="100000">
+                <a:srgbClr val="1C123F"/>
+              </a:gs>
+            </a:gsLst>
+            <a:lin scaled="0" ang="5400000"/>
+          </a:gradFill>
           <a:ln w="15240">
             <a:solidFill>
               <a:srgbClr val="4CC9F0"/>
@@ -13386,7 +14566,7 @@
       </p:sp>
       <p:sp>
         <p:nvSpPr>
-          <p:cNvPr id="14" name="TextBox 13"/>
+          <p:cNvPr id="16" name="TextBox 15"/>
           <p:cNvSpPr txBox="1"/>
           <p:nvPr/>
         </p:nvSpPr>
@@ -13428,7 +14608,7 @@
       </p:sp>
       <p:sp>
         <p:nvSpPr>
-          <p:cNvPr id="15" name="TextBox 14"/>
+          <p:cNvPr id="17" name="TextBox 16"/>
           <p:cNvSpPr txBox="1"/>
           <p:nvPr/>
         </p:nvSpPr>
@@ -13470,7 +14650,7 @@
       </p:sp>
       <p:sp>
         <p:nvSpPr>
-          <p:cNvPr id="16" name="TextBox 15"/>
+          <p:cNvPr id="18" name="TextBox 17"/>
           <p:cNvSpPr txBox="1"/>
           <p:nvPr/>
         </p:nvSpPr>
@@ -13512,7 +14692,7 @@
       </p:sp>
       <p:sp>
         <p:nvSpPr>
-          <p:cNvPr id="17" name="Rounded Rectangle 16"/>
+          <p:cNvPr id="19" name="Rounded Rectangle 18"/>
           <p:cNvSpPr/>
           <p:nvPr/>
         </p:nvSpPr>
@@ -13526,9 +14706,17 @@
               <a:gd name="adj" fmla="val 6000"/>
             </a:avLst>
           </a:prstGeom>
-          <a:solidFill>
-            <a:srgbClr val="1C123F"/>
-          </a:solidFill>
+          <a:gradFill rotWithShape="1">
+            <a:gsLst>
+              <a:gs pos="0">
+                <a:srgbClr val="2A1E53"/>
+              </a:gs>
+              <a:gs pos="100000">
+                <a:srgbClr val="1C123F"/>
+              </a:gs>
+            </a:gsLst>
+            <a:lin scaled="0" ang="5400000"/>
+          </a:gradFill>
           <a:ln w="15240">
             <a:solidFill>
               <a:srgbClr val="8B6CFF"/>
@@ -13558,7 +14746,7 @@
       </p:sp>
       <p:sp>
         <p:nvSpPr>
-          <p:cNvPr id="18" name="TextBox 17"/>
+          <p:cNvPr id="20" name="TextBox 19"/>
           <p:cNvSpPr txBox="1"/>
           <p:nvPr/>
         </p:nvSpPr>
@@ -13600,7 +14788,7 @@
       </p:sp>
       <p:sp>
         <p:nvSpPr>
-          <p:cNvPr id="19" name="TextBox 18"/>
+          <p:cNvPr id="21" name="TextBox 20"/>
           <p:cNvSpPr txBox="1"/>
           <p:nvPr/>
         </p:nvSpPr>
@@ -13642,7 +14830,7 @@
       </p:sp>
       <p:sp>
         <p:nvSpPr>
-          <p:cNvPr id="20" name="TextBox 19"/>
+          <p:cNvPr id="22" name="TextBox 21"/>
           <p:cNvSpPr txBox="1"/>
           <p:nvPr/>
         </p:nvSpPr>
@@ -13714,9 +14902,17 @@
           <a:prstGeom prst="rect">
             <a:avLst/>
           </a:prstGeom>
-          <a:solidFill>
-            <a:srgbClr val="0E042D"/>
-          </a:solidFill>
+          <a:gradFill rotWithShape="1">
+            <a:gsLst>
+              <a:gs pos="0">
+                <a:srgbClr val="1A0C42"/>
+              </a:gs>
+              <a:gs pos="100000">
+                <a:srgbClr val="08021C"/>
+              </a:gs>
+            </a:gsLst>
+            <a:lin scaled="0" ang="2700000"/>
+          </a:gradFill>
           <a:ln>
             <a:noFill/>
           </a:ln>
@@ -13744,9 +14940,105 @@
           </a:p>
         </p:txBody>
       </p:sp>
+      <p:sp>
+        <p:nvSpPr>
+          <p:cNvPr id="3" name="Oval 2"/>
+          <p:cNvSpPr/>
+          <p:nvPr/>
+        </p:nvSpPr>
+        <p:spPr>
+          <a:xfrm>
+            <a:off x="7406640" y="-3840480"/>
+            <a:ext cx="7863840" cy="7863840"/>
+          </a:xfrm>
+          <a:prstGeom prst="ellipse">
+            <a:avLst/>
+          </a:prstGeom>
+          <a:solidFill>
+            <a:srgbClr val="8B6CFF">
+              <a:alpha val="11000"/>
+            </a:srgbClr>
+          </a:solidFill>
+          <a:ln>
+            <a:noFill/>
+          </a:ln>
+          <a:effectLst>
+            <a:softEdge rad="2011680"/>
+          </a:effectLst>
+        </p:spPr>
+        <p:style>
+          <a:lnRef idx="1">
+            <a:schemeClr val="accent1"/>
+          </a:lnRef>
+          <a:fillRef idx="3">
+            <a:schemeClr val="accent1"/>
+          </a:fillRef>
+          <a:effectRef idx="2">
+            <a:schemeClr val="accent1"/>
+          </a:effectRef>
+          <a:fontRef idx="minor">
+            <a:schemeClr val="lt1"/>
+          </a:fontRef>
+        </p:style>
+        <p:txBody>
+          <a:bodyPr rtlCol="0" anchor="ctr"/>
+          <a:lstStyle/>
+          <a:p>
+            <a:pPr algn="ctr"/>
+          </a:p>
+        </p:txBody>
+      </p:sp>
+      <p:sp>
+        <p:nvSpPr>
+          <p:cNvPr id="4" name="Oval 3"/>
+          <p:cNvSpPr/>
+          <p:nvPr/>
+        </p:nvSpPr>
+        <p:spPr>
+          <a:xfrm>
+            <a:off x="-3383280" y="3840480"/>
+            <a:ext cx="6400800" cy="6400800"/>
+          </a:xfrm>
+          <a:prstGeom prst="ellipse">
+            <a:avLst/>
+          </a:prstGeom>
+          <a:solidFill>
+            <a:srgbClr val="4FD1C5">
+              <a:alpha val="7000"/>
+            </a:srgbClr>
+          </a:solidFill>
+          <a:ln>
+            <a:noFill/>
+          </a:ln>
+          <a:effectLst>
+            <a:softEdge rad="1828800"/>
+          </a:effectLst>
+        </p:spPr>
+        <p:style>
+          <a:lnRef idx="1">
+            <a:schemeClr val="accent1"/>
+          </a:lnRef>
+          <a:fillRef idx="3">
+            <a:schemeClr val="accent1"/>
+          </a:fillRef>
+          <a:effectRef idx="2">
+            <a:schemeClr val="accent1"/>
+          </a:effectRef>
+          <a:fontRef idx="minor">
+            <a:schemeClr val="lt1"/>
+          </a:fontRef>
+        </p:style>
+        <p:txBody>
+          <a:bodyPr rtlCol="0" anchor="ctr"/>
+          <a:lstStyle/>
+          <a:p>
+            <a:pPr algn="ctr"/>
+          </a:p>
+        </p:txBody>
+      </p:sp>
       <p:pic>
         <p:nvPicPr>
-          <p:cNvPr id="3" name="Picture 2" descr="logo_white.png"/>
+          <p:cNvPr id="5" name="Picture 4" descr="logo_white.png"/>
           <p:cNvPicPr>
             <a:picLocks noChangeAspect="1"/>
           </p:cNvPicPr>
@@ -13770,7 +15062,7 @@
       </p:pic>
       <p:sp>
         <p:nvSpPr>
-          <p:cNvPr id="4" name="Rounded Rectangle 3"/>
+          <p:cNvPr id="6" name="Rounded Rectangle 5"/>
           <p:cNvSpPr/>
           <p:nvPr/>
         </p:nvSpPr>
@@ -13825,25 +15117,68 @@
       </p:sp>
       <p:sp>
         <p:nvSpPr>
-          <p:cNvPr id="5" name="Rounded Rectangle 4"/>
+          <p:cNvPr id="7" name="TextBox 6"/>
+          <p:cNvSpPr txBox="1"/>
+          <p:nvPr/>
+        </p:nvSpPr>
+        <p:spPr>
+          <a:xfrm>
+            <a:off x="566928" y="932688"/>
+            <a:ext cx="11057839" cy="868680"/>
+          </a:xfrm>
+          <a:prstGeom prst="rect">
+            <a:avLst/>
+          </a:prstGeom>
+          <a:noFill/>
+        </p:spPr>
+        <p:txBody>
+          <a:bodyPr wrap="square" lIns="0" rIns="0" tIns="0" bIns="0">
+            <a:spAutoFit/>
+          </a:bodyPr>
+          <a:lstStyle/>
+          <a:p>
+            <a:r>
+              <a:rPr sz="4000" b="1">
+                <a:solidFill>
+                  <a:srgbClr val="FFF6ED"/>
+                </a:solidFill>
+                <a:latin typeface="Segoe UI"/>
+              </a:rPr>
+              <a:t>Upload. Score.</a:t>
+            </a:r>
+            <a:r>
+              <a:rPr sz="4000" b="1">
+                <a:solidFill>
+                  <a:srgbClr val="4FD1C5"/>
+                </a:solidFill>
+                <a:latin typeface="Segoe UI"/>
+              </a:rPr>
+              <a:t> Act.</a:t>
+            </a:r>
+          </a:p>
+        </p:txBody>
+      </p:sp>
+      <p:sp>
+        <p:nvSpPr>
+          <p:cNvPr id="8" name="Rounded Rectangle 7"/>
           <p:cNvSpPr/>
           <p:nvPr/>
         </p:nvSpPr>
         <p:spPr>
           <a:xfrm>
-            <a:off x="10088575" y="365760"/>
-            <a:ext cx="1572768" cy="329184"/>
+            <a:off x="566928" y="1527048"/>
+            <a:ext cx="960120" cy="38100"/>
           </a:xfrm>
           <a:prstGeom prst="roundRect">
             <a:avLst>
               <a:gd name="adj" fmla="val 50000"/>
             </a:avLst>
           </a:prstGeom>
-          <a:noFill/>
-          <a:ln w="12700">
-            <a:solidFill>
-              <a:srgbClr val="FFF6ED"/>
-            </a:solidFill>
+          <a:solidFill>
+            <a:srgbClr val="4FD1C5"/>
+          </a:solidFill>
+          <a:ln>
+            <a:noFill/>
           </a:ln>
           <a:effectLst/>
         </p:spPr>
@@ -13862,68 +15197,16 @@
           </a:fontRef>
         </p:style>
         <p:txBody>
-          <a:bodyPr rtlCol="0" anchor="ctr" lIns="0" rIns="0" tIns="0" bIns="0"/>
+          <a:bodyPr rtlCol="0" anchor="ctr"/>
           <a:lstStyle/>
           <a:p>
             <a:pPr algn="ctr"/>
-            <a:r>
-              <a:rPr sz="1100">
-                <a:solidFill>
-                  <a:srgbClr val="FFF6ED"/>
-                </a:solidFill>
-                <a:latin typeface="Segoe UI"/>
-              </a:rPr>
-              <a:t>August 8, 2026</a:t>
-            </a:r>
-          </a:p>
-        </p:txBody>
-      </p:sp>
-      <p:sp>
-        <p:nvSpPr>
-          <p:cNvPr id="6" name="TextBox 5"/>
-          <p:cNvSpPr txBox="1"/>
-          <p:nvPr/>
-        </p:nvSpPr>
-        <p:spPr>
-          <a:xfrm>
-            <a:off x="566928" y="932688"/>
-            <a:ext cx="11057839" cy="868680"/>
-          </a:xfrm>
-          <a:prstGeom prst="rect">
-            <a:avLst/>
-          </a:prstGeom>
-          <a:noFill/>
-        </p:spPr>
-        <p:txBody>
-          <a:bodyPr wrap="square" lIns="0" rIns="0" tIns="0" bIns="0">
-            <a:spAutoFit/>
-          </a:bodyPr>
-          <a:lstStyle/>
-          <a:p>
-            <a:r>
-              <a:rPr sz="4000" b="1">
-                <a:solidFill>
-                  <a:srgbClr val="FFF6ED"/>
-                </a:solidFill>
-                <a:latin typeface="Segoe UI"/>
-              </a:rPr>
-              <a:t>Upload. Score.</a:t>
-            </a:r>
-            <a:r>
-              <a:rPr sz="4000" b="1">
-                <a:solidFill>
-                  <a:srgbClr val="4FD1C5"/>
-                </a:solidFill>
-                <a:latin typeface="Segoe UI"/>
-              </a:rPr>
-              <a:t> Act.</a:t>
-            </a:r>
-          </a:p>
-        </p:txBody>
-      </p:sp>
-      <p:sp>
-        <p:nvSpPr>
-          <p:cNvPr id="7" name="TextBox 6"/>
+          </a:p>
+        </p:txBody>
+      </p:sp>
+      <p:sp>
+        <p:nvSpPr>
+          <p:cNvPr id="9" name="TextBox 8"/>
           <p:cNvSpPr txBox="1"/>
           <p:nvPr/>
         </p:nvSpPr>
@@ -13965,7 +15248,7 @@
       </p:sp>
       <p:pic>
         <p:nvPicPr>
-          <p:cNvPr id="8" name="Picture 7" descr="ui_dashboard.png"/>
+          <p:cNvPr id="10" name="Picture 9" descr="ui_dashboard.png"/>
           <p:cNvPicPr>
             <a:picLocks noChangeAspect="1"/>
           </p:cNvPicPr>
@@ -13989,7 +15272,7 @@
       </p:pic>
       <p:sp>
         <p:nvSpPr>
-          <p:cNvPr id="9" name="Rounded Rectangle 8"/>
+          <p:cNvPr id="11" name="Rounded Rectangle 10"/>
           <p:cNvSpPr/>
           <p:nvPr/>
         </p:nvSpPr>
@@ -14033,7 +15316,7 @@
       </p:sp>
       <p:sp>
         <p:nvSpPr>
-          <p:cNvPr id="10" name="TextBox 9"/>
+          <p:cNvPr id="12" name="TextBox 11"/>
           <p:cNvSpPr txBox="1"/>
           <p:nvPr/>
         </p:nvSpPr>
@@ -14075,7 +15358,7 @@
       </p:sp>
       <p:sp>
         <p:nvSpPr>
-          <p:cNvPr id="11" name="Rounded Rectangle 10"/>
+          <p:cNvPr id="13" name="Rounded Rectangle 12"/>
           <p:cNvSpPr/>
           <p:nvPr/>
         </p:nvSpPr>
@@ -14089,9 +15372,17 @@
               <a:gd name="adj" fmla="val 6000"/>
             </a:avLst>
           </a:prstGeom>
-          <a:solidFill>
-            <a:srgbClr val="1C123F"/>
-          </a:solidFill>
+          <a:gradFill rotWithShape="1">
+            <a:gsLst>
+              <a:gs pos="0">
+                <a:srgbClr val="2A1E53"/>
+              </a:gs>
+              <a:gs pos="100000">
+                <a:srgbClr val="1C123F"/>
+              </a:gs>
+            </a:gsLst>
+            <a:lin scaled="0" ang="5400000"/>
+          </a:gradFill>
           <a:ln w="12700">
             <a:solidFill>
               <a:srgbClr val="2A2145"/>
@@ -14121,7 +15412,7 @@
       </p:sp>
       <p:sp>
         <p:nvSpPr>
-          <p:cNvPr id="12" name="Rounded Rectangle 11"/>
+          <p:cNvPr id="14" name="Rounded Rectangle 13"/>
           <p:cNvSpPr/>
           <p:nvPr/>
         </p:nvSpPr>
@@ -14135,9 +15426,17 @@
               <a:gd name="adj" fmla="val 50000"/>
             </a:avLst>
           </a:prstGeom>
-          <a:solidFill>
-            <a:srgbClr val="4FD1C5"/>
-          </a:solidFill>
+          <a:gradFill rotWithShape="1">
+            <a:gsLst>
+              <a:gs pos="0">
+                <a:srgbClr val="5DDDD9"/>
+              </a:gs>
+              <a:gs pos="100000">
+                <a:srgbClr val="4FD1C5"/>
+              </a:gs>
+            </a:gsLst>
+            <a:lin scaled="0" ang="5400000"/>
+          </a:gradFill>
           <a:ln>
             <a:noFill/>
           </a:ln>
@@ -14176,7 +15475,7 @@
       </p:sp>
       <p:sp>
         <p:nvSpPr>
-          <p:cNvPr id="13" name="TextBox 12"/>
+          <p:cNvPr id="15" name="TextBox 14"/>
           <p:cNvSpPr txBox="1"/>
           <p:nvPr/>
         </p:nvSpPr>
@@ -14218,7 +15517,7 @@
       </p:sp>
       <p:sp>
         <p:nvSpPr>
-          <p:cNvPr id="14" name="TextBox 13"/>
+          <p:cNvPr id="16" name="TextBox 15"/>
           <p:cNvSpPr txBox="1"/>
           <p:nvPr/>
         </p:nvSpPr>
@@ -14260,7 +15559,7 @@
       </p:sp>
       <p:sp>
         <p:nvSpPr>
-          <p:cNvPr id="15" name="Rounded Rectangle 14"/>
+          <p:cNvPr id="17" name="Rounded Rectangle 16"/>
           <p:cNvSpPr/>
           <p:nvPr/>
         </p:nvSpPr>
@@ -14274,9 +15573,17 @@
               <a:gd name="adj" fmla="val 6000"/>
             </a:avLst>
           </a:prstGeom>
-          <a:solidFill>
-            <a:srgbClr val="1C123F"/>
-          </a:solidFill>
+          <a:gradFill rotWithShape="1">
+            <a:gsLst>
+              <a:gs pos="0">
+                <a:srgbClr val="2A1E53"/>
+              </a:gs>
+              <a:gs pos="100000">
+                <a:srgbClr val="1C123F"/>
+              </a:gs>
+            </a:gsLst>
+            <a:lin scaled="0" ang="5400000"/>
+          </a:gradFill>
           <a:ln w="12700">
             <a:solidFill>
               <a:srgbClr val="2A2145"/>
@@ -14306,7 +15613,7 @@
       </p:sp>
       <p:sp>
         <p:nvSpPr>
-          <p:cNvPr id="16" name="Rounded Rectangle 15"/>
+          <p:cNvPr id="18" name="Rounded Rectangle 17"/>
           <p:cNvSpPr/>
           <p:nvPr/>
         </p:nvSpPr>
@@ -14320,9 +15627,17 @@
               <a:gd name="adj" fmla="val 50000"/>
             </a:avLst>
           </a:prstGeom>
-          <a:solidFill>
-            <a:srgbClr val="4FD1C5"/>
-          </a:solidFill>
+          <a:gradFill rotWithShape="1">
+            <a:gsLst>
+              <a:gs pos="0">
+                <a:srgbClr val="5DDDD9"/>
+              </a:gs>
+              <a:gs pos="100000">
+                <a:srgbClr val="4FD1C5"/>
+              </a:gs>
+            </a:gsLst>
+            <a:lin scaled="0" ang="5400000"/>
+          </a:gradFill>
           <a:ln>
             <a:noFill/>
           </a:ln>
@@ -14361,7 +15676,7 @@
       </p:sp>
       <p:sp>
         <p:nvSpPr>
-          <p:cNvPr id="17" name="TextBox 16"/>
+          <p:cNvPr id="19" name="TextBox 18"/>
           <p:cNvSpPr txBox="1"/>
           <p:nvPr/>
         </p:nvSpPr>
@@ -14403,7 +15718,7 @@
       </p:sp>
       <p:sp>
         <p:nvSpPr>
-          <p:cNvPr id="18" name="TextBox 17"/>
+          <p:cNvPr id="20" name="TextBox 19"/>
           <p:cNvSpPr txBox="1"/>
           <p:nvPr/>
         </p:nvSpPr>
@@ -14445,7 +15760,7 @@
       </p:sp>
       <p:sp>
         <p:nvSpPr>
-          <p:cNvPr id="19" name="Rounded Rectangle 18"/>
+          <p:cNvPr id="21" name="Rounded Rectangle 20"/>
           <p:cNvSpPr/>
           <p:nvPr/>
         </p:nvSpPr>
@@ -14459,9 +15774,17 @@
               <a:gd name="adj" fmla="val 6000"/>
             </a:avLst>
           </a:prstGeom>
-          <a:solidFill>
-            <a:srgbClr val="1C123F"/>
-          </a:solidFill>
+          <a:gradFill rotWithShape="1">
+            <a:gsLst>
+              <a:gs pos="0">
+                <a:srgbClr val="2A1E53"/>
+              </a:gs>
+              <a:gs pos="100000">
+                <a:srgbClr val="1C123F"/>
+              </a:gs>
+            </a:gsLst>
+            <a:lin scaled="0" ang="5400000"/>
+          </a:gradFill>
           <a:ln w="12700">
             <a:solidFill>
               <a:srgbClr val="2A2145"/>
@@ -14491,7 +15814,7 @@
       </p:sp>
       <p:sp>
         <p:nvSpPr>
-          <p:cNvPr id="20" name="Rounded Rectangle 19"/>
+          <p:cNvPr id="22" name="Rounded Rectangle 21"/>
           <p:cNvSpPr/>
           <p:nvPr/>
         </p:nvSpPr>
@@ -14505,9 +15828,17 @@
               <a:gd name="adj" fmla="val 50000"/>
             </a:avLst>
           </a:prstGeom>
-          <a:solidFill>
-            <a:srgbClr val="4FD1C5"/>
-          </a:solidFill>
+          <a:gradFill rotWithShape="1">
+            <a:gsLst>
+              <a:gs pos="0">
+                <a:srgbClr val="5DDDD9"/>
+              </a:gs>
+              <a:gs pos="100000">
+                <a:srgbClr val="4FD1C5"/>
+              </a:gs>
+            </a:gsLst>
+            <a:lin scaled="0" ang="5400000"/>
+          </a:gradFill>
           <a:ln>
             <a:noFill/>
           </a:ln>
@@ -14546,7 +15877,7 @@
       </p:sp>
       <p:sp>
         <p:nvSpPr>
-          <p:cNvPr id="21" name="TextBox 20"/>
+          <p:cNvPr id="23" name="TextBox 22"/>
           <p:cNvSpPr txBox="1"/>
           <p:nvPr/>
         </p:nvSpPr>
@@ -14588,7 +15919,7 @@
       </p:sp>
       <p:sp>
         <p:nvSpPr>
-          <p:cNvPr id="22" name="TextBox 21"/>
+          <p:cNvPr id="24" name="TextBox 23"/>
           <p:cNvSpPr txBox="1"/>
           <p:nvPr/>
         </p:nvSpPr>
@@ -14630,7 +15961,7 @@
       </p:sp>
       <p:sp>
         <p:nvSpPr>
-          <p:cNvPr id="23" name="Rounded Rectangle 22"/>
+          <p:cNvPr id="25" name="Rounded Rectangle 24"/>
           <p:cNvSpPr/>
           <p:nvPr/>
         </p:nvSpPr>
@@ -14644,9 +15975,17 @@
               <a:gd name="adj" fmla="val 6000"/>
             </a:avLst>
           </a:prstGeom>
-          <a:solidFill>
-            <a:srgbClr val="1C123F"/>
-          </a:solidFill>
+          <a:gradFill rotWithShape="1">
+            <a:gsLst>
+              <a:gs pos="0">
+                <a:srgbClr val="2A1E53"/>
+              </a:gs>
+              <a:gs pos="100000">
+                <a:srgbClr val="1C123F"/>
+              </a:gs>
+            </a:gsLst>
+            <a:lin scaled="0" ang="5400000"/>
+          </a:gradFill>
           <a:ln w="12700">
             <a:solidFill>
               <a:srgbClr val="2A2145"/>
@@ -14676,7 +16015,7 @@
       </p:sp>
       <p:sp>
         <p:nvSpPr>
-          <p:cNvPr id="24" name="Rounded Rectangle 23"/>
+          <p:cNvPr id="26" name="Rounded Rectangle 25"/>
           <p:cNvSpPr/>
           <p:nvPr/>
         </p:nvSpPr>
@@ -14690,9 +16029,17 @@
               <a:gd name="adj" fmla="val 50000"/>
             </a:avLst>
           </a:prstGeom>
-          <a:solidFill>
-            <a:srgbClr val="4FD1C5"/>
-          </a:solidFill>
+          <a:gradFill rotWithShape="1">
+            <a:gsLst>
+              <a:gs pos="0">
+                <a:srgbClr val="5DDDD9"/>
+              </a:gs>
+              <a:gs pos="100000">
+                <a:srgbClr val="4FD1C5"/>
+              </a:gs>
+            </a:gsLst>
+            <a:lin scaled="0" ang="5400000"/>
+          </a:gradFill>
           <a:ln>
             <a:noFill/>
           </a:ln>
@@ -14731,7 +16078,7 @@
       </p:sp>
       <p:sp>
         <p:nvSpPr>
-          <p:cNvPr id="25" name="TextBox 24"/>
+          <p:cNvPr id="27" name="TextBox 26"/>
           <p:cNvSpPr txBox="1"/>
           <p:nvPr/>
         </p:nvSpPr>
@@ -14773,7 +16120,7 @@
       </p:sp>
       <p:sp>
         <p:nvSpPr>
-          <p:cNvPr id="26" name="TextBox 25"/>
+          <p:cNvPr id="28" name="TextBox 27"/>
           <p:cNvSpPr txBox="1"/>
           <p:nvPr/>
         </p:nvSpPr>
@@ -14815,7 +16162,7 @@
       </p:sp>
       <p:sp>
         <p:nvSpPr>
-          <p:cNvPr id="27" name="Rounded Rectangle 26"/>
+          <p:cNvPr id="29" name="Rounded Rectangle 28"/>
           <p:cNvSpPr/>
           <p:nvPr/>
         </p:nvSpPr>
@@ -14870,7 +16217,7 @@
       </p:sp>
       <p:sp>
         <p:nvSpPr>
-          <p:cNvPr id="28" name="Rounded Rectangle 27"/>
+          <p:cNvPr id="30" name="Rounded Rectangle 29"/>
           <p:cNvSpPr/>
           <p:nvPr/>
         </p:nvSpPr>
@@ -14925,7 +16272,7 @@
       </p:sp>
       <p:sp>
         <p:nvSpPr>
-          <p:cNvPr id="29" name="Rounded Rectangle 28"/>
+          <p:cNvPr id="31" name="Rounded Rectangle 30"/>
           <p:cNvSpPr/>
           <p:nvPr/>
         </p:nvSpPr>
@@ -14980,7 +16327,7 @@
       </p:sp>
       <p:sp>
         <p:nvSpPr>
-          <p:cNvPr id="30" name="Rounded Rectangle 29"/>
+          <p:cNvPr id="32" name="Rounded Rectangle 31"/>
           <p:cNvSpPr/>
           <p:nvPr/>
         </p:nvSpPr>
@@ -15035,7 +16382,7 @@
       </p:sp>
       <p:sp>
         <p:nvSpPr>
-          <p:cNvPr id="31" name="TextBox 30"/>
+          <p:cNvPr id="33" name="TextBox 32"/>
           <p:cNvSpPr txBox="1"/>
           <p:nvPr/>
         </p:nvSpPr>
@@ -15107,9 +16454,17 @@
           <a:prstGeom prst="rect">
             <a:avLst/>
           </a:prstGeom>
-          <a:solidFill>
-            <a:srgbClr val="0E042D"/>
-          </a:solidFill>
+          <a:gradFill rotWithShape="1">
+            <a:gsLst>
+              <a:gs pos="0">
+                <a:srgbClr val="1A0C42"/>
+              </a:gs>
+              <a:gs pos="100000">
+                <a:srgbClr val="08021C"/>
+              </a:gs>
+            </a:gsLst>
+            <a:lin scaled="0" ang="2700000"/>
+          </a:gradFill>
           <a:ln>
             <a:noFill/>
           </a:ln>
@@ -15137,9 +16492,105 @@
           </a:p>
         </p:txBody>
       </p:sp>
+      <p:sp>
+        <p:nvSpPr>
+          <p:cNvPr id="3" name="Oval 2"/>
+          <p:cNvSpPr/>
+          <p:nvPr/>
+        </p:nvSpPr>
+        <p:spPr>
+          <a:xfrm>
+            <a:off x="7406640" y="-3840480"/>
+            <a:ext cx="7863840" cy="7863840"/>
+          </a:xfrm>
+          <a:prstGeom prst="ellipse">
+            <a:avLst/>
+          </a:prstGeom>
+          <a:solidFill>
+            <a:srgbClr val="8B6CFF">
+              <a:alpha val="11000"/>
+            </a:srgbClr>
+          </a:solidFill>
+          <a:ln>
+            <a:noFill/>
+          </a:ln>
+          <a:effectLst>
+            <a:softEdge rad="2011680"/>
+          </a:effectLst>
+        </p:spPr>
+        <p:style>
+          <a:lnRef idx="1">
+            <a:schemeClr val="accent1"/>
+          </a:lnRef>
+          <a:fillRef idx="3">
+            <a:schemeClr val="accent1"/>
+          </a:fillRef>
+          <a:effectRef idx="2">
+            <a:schemeClr val="accent1"/>
+          </a:effectRef>
+          <a:fontRef idx="minor">
+            <a:schemeClr val="lt1"/>
+          </a:fontRef>
+        </p:style>
+        <p:txBody>
+          <a:bodyPr rtlCol="0" anchor="ctr"/>
+          <a:lstStyle/>
+          <a:p>
+            <a:pPr algn="ctr"/>
+          </a:p>
+        </p:txBody>
+      </p:sp>
+      <p:sp>
+        <p:nvSpPr>
+          <p:cNvPr id="4" name="Oval 3"/>
+          <p:cNvSpPr/>
+          <p:nvPr/>
+        </p:nvSpPr>
+        <p:spPr>
+          <a:xfrm>
+            <a:off x="-3383280" y="3840480"/>
+            <a:ext cx="6400800" cy="6400800"/>
+          </a:xfrm>
+          <a:prstGeom prst="ellipse">
+            <a:avLst/>
+          </a:prstGeom>
+          <a:solidFill>
+            <a:srgbClr val="4FD1C5">
+              <a:alpha val="7000"/>
+            </a:srgbClr>
+          </a:solidFill>
+          <a:ln>
+            <a:noFill/>
+          </a:ln>
+          <a:effectLst>
+            <a:softEdge rad="1828800"/>
+          </a:effectLst>
+        </p:spPr>
+        <p:style>
+          <a:lnRef idx="1">
+            <a:schemeClr val="accent1"/>
+          </a:lnRef>
+          <a:fillRef idx="3">
+            <a:schemeClr val="accent1"/>
+          </a:fillRef>
+          <a:effectRef idx="2">
+            <a:schemeClr val="accent1"/>
+          </a:effectRef>
+          <a:fontRef idx="minor">
+            <a:schemeClr val="lt1"/>
+          </a:fontRef>
+        </p:style>
+        <p:txBody>
+          <a:bodyPr rtlCol="0" anchor="ctr"/>
+          <a:lstStyle/>
+          <a:p>
+            <a:pPr algn="ctr"/>
+          </a:p>
+        </p:txBody>
+      </p:sp>
       <p:pic>
         <p:nvPicPr>
-          <p:cNvPr id="3" name="Picture 2" descr="logo_white.png"/>
+          <p:cNvPr id="5" name="Picture 4" descr="logo_white.png"/>
           <p:cNvPicPr>
             <a:picLocks noChangeAspect="1"/>
           </p:cNvPicPr>
@@ -15163,7 +16614,7 @@
       </p:pic>
       <p:sp>
         <p:nvSpPr>
-          <p:cNvPr id="4" name="Rounded Rectangle 3"/>
+          <p:cNvPr id="6" name="Rounded Rectangle 5"/>
           <p:cNvSpPr/>
           <p:nvPr/>
         </p:nvSpPr>
@@ -15218,25 +16669,68 @@
       </p:sp>
       <p:sp>
         <p:nvSpPr>
-          <p:cNvPr id="5" name="Rounded Rectangle 4"/>
+          <p:cNvPr id="7" name="TextBox 6"/>
+          <p:cNvSpPr txBox="1"/>
+          <p:nvPr/>
+        </p:nvSpPr>
+        <p:spPr>
+          <a:xfrm>
+            <a:off x="566928" y="932688"/>
+            <a:ext cx="11057839" cy="868680"/>
+          </a:xfrm>
+          <a:prstGeom prst="rect">
+            <a:avLst/>
+          </a:prstGeom>
+          <a:noFill/>
+        </p:spPr>
+        <p:txBody>
+          <a:bodyPr wrap="square" lIns="0" rIns="0" tIns="0" bIns="0">
+            <a:spAutoFit/>
+          </a:bodyPr>
+          <a:lstStyle/>
+          <a:p>
+            <a:r>
+              <a:rPr sz="4000" b="1">
+                <a:solidFill>
+                  <a:srgbClr val="FFF6ED"/>
+                </a:solidFill>
+                <a:latin typeface="Segoe UI"/>
+              </a:rPr>
+              <a:t>What is measured,</a:t>
+            </a:r>
+            <a:r>
+              <a:rPr sz="4000" b="1">
+                <a:solidFill>
+                  <a:srgbClr val="4FD1C5"/>
+                </a:solidFill>
+                <a:latin typeface="Segoe UI"/>
+              </a:rPr>
+              <a:t> and what is not.</a:t>
+            </a:r>
+          </a:p>
+        </p:txBody>
+      </p:sp>
+      <p:sp>
+        <p:nvSpPr>
+          <p:cNvPr id="8" name="Rounded Rectangle 7"/>
           <p:cNvSpPr/>
           <p:nvPr/>
         </p:nvSpPr>
         <p:spPr>
           <a:xfrm>
-            <a:off x="10088575" y="365760"/>
-            <a:ext cx="1572768" cy="329184"/>
+            <a:off x="566928" y="1527048"/>
+            <a:ext cx="960120" cy="38100"/>
           </a:xfrm>
           <a:prstGeom prst="roundRect">
             <a:avLst>
               <a:gd name="adj" fmla="val 50000"/>
             </a:avLst>
           </a:prstGeom>
-          <a:noFill/>
-          <a:ln w="12700">
-            <a:solidFill>
-              <a:srgbClr val="FFF6ED"/>
-            </a:solidFill>
+          <a:solidFill>
+            <a:srgbClr val="4FD1C5"/>
+          </a:solidFill>
+          <a:ln>
+            <a:noFill/>
           </a:ln>
           <a:effectLst/>
         </p:spPr>
@@ -15255,68 +16749,16 @@
           </a:fontRef>
         </p:style>
         <p:txBody>
-          <a:bodyPr rtlCol="0" anchor="ctr" lIns="0" rIns="0" tIns="0" bIns="0"/>
+          <a:bodyPr rtlCol="0" anchor="ctr"/>
           <a:lstStyle/>
           <a:p>
             <a:pPr algn="ctr"/>
-            <a:r>
-              <a:rPr sz="1100">
-                <a:solidFill>
-                  <a:srgbClr val="FFF6ED"/>
-                </a:solidFill>
-                <a:latin typeface="Segoe UI"/>
-              </a:rPr>
-              <a:t>August 8, 2026</a:t>
-            </a:r>
-          </a:p>
-        </p:txBody>
-      </p:sp>
-      <p:sp>
-        <p:nvSpPr>
-          <p:cNvPr id="6" name="TextBox 5"/>
-          <p:cNvSpPr txBox="1"/>
-          <p:nvPr/>
-        </p:nvSpPr>
-        <p:spPr>
-          <a:xfrm>
-            <a:off x="566928" y="932688"/>
-            <a:ext cx="11057839" cy="868680"/>
-          </a:xfrm>
-          <a:prstGeom prst="rect">
-            <a:avLst/>
-          </a:prstGeom>
-          <a:noFill/>
-        </p:spPr>
-        <p:txBody>
-          <a:bodyPr wrap="square" lIns="0" rIns="0" tIns="0" bIns="0">
-            <a:spAutoFit/>
-          </a:bodyPr>
-          <a:lstStyle/>
-          <a:p>
-            <a:r>
-              <a:rPr sz="4000" b="1">
-                <a:solidFill>
-                  <a:srgbClr val="FFF6ED"/>
-                </a:solidFill>
-                <a:latin typeface="Segoe UI"/>
-              </a:rPr>
-              <a:t>What is measured,</a:t>
-            </a:r>
-            <a:r>
-              <a:rPr sz="4000" b="1">
-                <a:solidFill>
-                  <a:srgbClr val="4FD1C5"/>
-                </a:solidFill>
-                <a:latin typeface="Segoe UI"/>
-              </a:rPr>
-              <a:t> and what is not.</a:t>
-            </a:r>
-          </a:p>
-        </p:txBody>
-      </p:sp>
-      <p:sp>
-        <p:nvSpPr>
-          <p:cNvPr id="7" name="TextBox 6"/>
+          </a:p>
+        </p:txBody>
+      </p:sp>
+      <p:sp>
+        <p:nvSpPr>
+          <p:cNvPr id="9" name="TextBox 8"/>
           <p:cNvSpPr txBox="1"/>
           <p:nvPr/>
         </p:nvSpPr>
@@ -15358,7 +16800,7 @@
       </p:sp>
       <p:graphicFrame>
         <p:nvGraphicFramePr>
-          <p:cNvPr id="8" name="Table 7"/>
+          <p:cNvPr id="10" name="Table 9"/>
           <p:cNvGraphicFramePr>
             <a:graphicFrameLocks noGrp="1"/>
           </p:cNvGraphicFramePr>
@@ -16138,7 +17580,7 @@
       </p:graphicFrame>
       <p:sp>
         <p:nvSpPr>
-          <p:cNvPr id="9" name="Rounded Rectangle 8"/>
+          <p:cNvPr id="11" name="Rounded Rectangle 10"/>
           <p:cNvSpPr/>
           <p:nvPr/>
         </p:nvSpPr>
@@ -16152,9 +17594,17 @@
               <a:gd name="adj" fmla="val 6000"/>
             </a:avLst>
           </a:prstGeom>
-          <a:solidFill>
-            <a:srgbClr val="1C123F"/>
-          </a:solidFill>
+          <a:gradFill rotWithShape="1">
+            <a:gsLst>
+              <a:gs pos="0">
+                <a:srgbClr val="2A1E53"/>
+              </a:gs>
+              <a:gs pos="100000">
+                <a:srgbClr val="1C123F"/>
+              </a:gs>
+            </a:gsLst>
+            <a:lin scaled="0" ang="5400000"/>
+          </a:gradFill>
           <a:ln w="16510">
             <a:solidFill>
               <a:srgbClr val="FFB020"/>
@@ -16184,7 +17634,7 @@
       </p:sp>
       <p:sp>
         <p:nvSpPr>
-          <p:cNvPr id="10" name="TextBox 9"/>
+          <p:cNvPr id="12" name="TextBox 11"/>
           <p:cNvSpPr txBox="1"/>
           <p:nvPr/>
         </p:nvSpPr>
@@ -16256,9 +17706,17 @@
           <a:prstGeom prst="rect">
             <a:avLst/>
           </a:prstGeom>
-          <a:solidFill>
-            <a:srgbClr val="0E042D"/>
-          </a:solidFill>
+          <a:gradFill rotWithShape="1">
+            <a:gsLst>
+              <a:gs pos="0">
+                <a:srgbClr val="1A0C42"/>
+              </a:gs>
+              <a:gs pos="100000">
+                <a:srgbClr val="08021C"/>
+              </a:gs>
+            </a:gsLst>
+            <a:lin scaled="0" ang="2700000"/>
+          </a:gradFill>
           <a:ln>
             <a:noFill/>
           </a:ln>
@@ -16286,9 +17744,105 @@
           </a:p>
         </p:txBody>
       </p:sp>
+      <p:sp>
+        <p:nvSpPr>
+          <p:cNvPr id="3" name="Oval 2"/>
+          <p:cNvSpPr/>
+          <p:nvPr/>
+        </p:nvSpPr>
+        <p:spPr>
+          <a:xfrm>
+            <a:off x="7406640" y="-3840480"/>
+            <a:ext cx="7863840" cy="7863840"/>
+          </a:xfrm>
+          <a:prstGeom prst="ellipse">
+            <a:avLst/>
+          </a:prstGeom>
+          <a:solidFill>
+            <a:srgbClr val="8B6CFF">
+              <a:alpha val="11000"/>
+            </a:srgbClr>
+          </a:solidFill>
+          <a:ln>
+            <a:noFill/>
+          </a:ln>
+          <a:effectLst>
+            <a:softEdge rad="2011680"/>
+          </a:effectLst>
+        </p:spPr>
+        <p:style>
+          <a:lnRef idx="1">
+            <a:schemeClr val="accent1"/>
+          </a:lnRef>
+          <a:fillRef idx="3">
+            <a:schemeClr val="accent1"/>
+          </a:fillRef>
+          <a:effectRef idx="2">
+            <a:schemeClr val="accent1"/>
+          </a:effectRef>
+          <a:fontRef idx="minor">
+            <a:schemeClr val="lt1"/>
+          </a:fontRef>
+        </p:style>
+        <p:txBody>
+          <a:bodyPr rtlCol="0" anchor="ctr"/>
+          <a:lstStyle/>
+          <a:p>
+            <a:pPr algn="ctr"/>
+          </a:p>
+        </p:txBody>
+      </p:sp>
+      <p:sp>
+        <p:nvSpPr>
+          <p:cNvPr id="4" name="Oval 3"/>
+          <p:cNvSpPr/>
+          <p:nvPr/>
+        </p:nvSpPr>
+        <p:spPr>
+          <a:xfrm>
+            <a:off x="-3383280" y="3840480"/>
+            <a:ext cx="6400800" cy="6400800"/>
+          </a:xfrm>
+          <a:prstGeom prst="ellipse">
+            <a:avLst/>
+          </a:prstGeom>
+          <a:solidFill>
+            <a:srgbClr val="4FD1C5">
+              <a:alpha val="7000"/>
+            </a:srgbClr>
+          </a:solidFill>
+          <a:ln>
+            <a:noFill/>
+          </a:ln>
+          <a:effectLst>
+            <a:softEdge rad="1828800"/>
+          </a:effectLst>
+        </p:spPr>
+        <p:style>
+          <a:lnRef idx="1">
+            <a:schemeClr val="accent1"/>
+          </a:lnRef>
+          <a:fillRef idx="3">
+            <a:schemeClr val="accent1"/>
+          </a:fillRef>
+          <a:effectRef idx="2">
+            <a:schemeClr val="accent1"/>
+          </a:effectRef>
+          <a:fontRef idx="minor">
+            <a:schemeClr val="lt1"/>
+          </a:fontRef>
+        </p:style>
+        <p:txBody>
+          <a:bodyPr rtlCol="0" anchor="ctr"/>
+          <a:lstStyle/>
+          <a:p>
+            <a:pPr algn="ctr"/>
+          </a:p>
+        </p:txBody>
+      </p:sp>
       <p:pic>
         <p:nvPicPr>
-          <p:cNvPr id="3" name="Picture 2" descr="logo_white.png"/>
+          <p:cNvPr id="5" name="Picture 4" descr="logo_white.png"/>
           <p:cNvPicPr>
             <a:picLocks noChangeAspect="1"/>
           </p:cNvPicPr>
@@ -16312,7 +17866,7 @@
       </p:pic>
       <p:sp>
         <p:nvSpPr>
-          <p:cNvPr id="4" name="Rounded Rectangle 3"/>
+          <p:cNvPr id="6" name="Rounded Rectangle 5"/>
           <p:cNvSpPr/>
           <p:nvPr/>
         </p:nvSpPr>
@@ -16367,25 +17921,68 @@
       </p:sp>
       <p:sp>
         <p:nvSpPr>
-          <p:cNvPr id="5" name="Rounded Rectangle 4"/>
+          <p:cNvPr id="7" name="TextBox 6"/>
+          <p:cNvSpPr txBox="1"/>
+          <p:nvPr/>
+        </p:nvSpPr>
+        <p:spPr>
+          <a:xfrm>
+            <a:off x="566928" y="932688"/>
+            <a:ext cx="11057839" cy="868680"/>
+          </a:xfrm>
+          <a:prstGeom prst="rect">
+            <a:avLst/>
+          </a:prstGeom>
+          <a:noFill/>
+        </p:spPr>
+        <p:txBody>
+          <a:bodyPr wrap="square" lIns="0" rIns="0" tIns="0" bIns="0">
+            <a:spAutoFit/>
+          </a:bodyPr>
+          <a:lstStyle/>
+          <a:p>
+            <a:r>
+              <a:rPr sz="4000" b="1">
+                <a:solidFill>
+                  <a:srgbClr val="FFF6ED"/>
+                </a:solidFill>
+                <a:latin typeface="Segoe UI"/>
+              </a:rPr>
+              <a:t>A $170M market</a:t>
+            </a:r>
+            <a:r>
+              <a:rPr sz="4000" b="1">
+                <a:solidFill>
+                  <a:srgbClr val="4FD1C5"/>
+                </a:solidFill>
+                <a:latin typeface="Segoe UI"/>
+              </a:rPr>
+              <a:t> compounding at 47.6%.</a:t>
+            </a:r>
+          </a:p>
+        </p:txBody>
+      </p:sp>
+      <p:sp>
+        <p:nvSpPr>
+          <p:cNvPr id="8" name="Rounded Rectangle 7"/>
           <p:cNvSpPr/>
           <p:nvPr/>
         </p:nvSpPr>
         <p:spPr>
           <a:xfrm>
-            <a:off x="10088575" y="365760"/>
-            <a:ext cx="1572768" cy="329184"/>
+            <a:off x="566928" y="1527048"/>
+            <a:ext cx="960120" cy="38100"/>
           </a:xfrm>
           <a:prstGeom prst="roundRect">
             <a:avLst>
               <a:gd name="adj" fmla="val 50000"/>
             </a:avLst>
           </a:prstGeom>
-          <a:noFill/>
-          <a:ln w="12700">
-            <a:solidFill>
-              <a:srgbClr val="FFF6ED"/>
-            </a:solidFill>
+          <a:solidFill>
+            <a:srgbClr val="4FD1C5"/>
+          </a:solidFill>
+          <a:ln>
+            <a:noFill/>
           </a:ln>
           <a:effectLst/>
         </p:spPr>
@@ -16404,68 +18001,16 @@
           </a:fontRef>
         </p:style>
         <p:txBody>
-          <a:bodyPr rtlCol="0" anchor="ctr" lIns="0" rIns="0" tIns="0" bIns="0"/>
+          <a:bodyPr rtlCol="0" anchor="ctr"/>
           <a:lstStyle/>
           <a:p>
             <a:pPr algn="ctr"/>
-            <a:r>
-              <a:rPr sz="1100">
-                <a:solidFill>
-                  <a:srgbClr val="FFF6ED"/>
-                </a:solidFill>
-                <a:latin typeface="Segoe UI"/>
-              </a:rPr>
-              <a:t>August 8, 2026</a:t>
-            </a:r>
-          </a:p>
-        </p:txBody>
-      </p:sp>
-      <p:sp>
-        <p:nvSpPr>
-          <p:cNvPr id="6" name="TextBox 5"/>
-          <p:cNvSpPr txBox="1"/>
-          <p:nvPr/>
-        </p:nvSpPr>
-        <p:spPr>
-          <a:xfrm>
-            <a:off x="566928" y="932688"/>
-            <a:ext cx="11057839" cy="868680"/>
-          </a:xfrm>
-          <a:prstGeom prst="rect">
-            <a:avLst/>
-          </a:prstGeom>
-          <a:noFill/>
-        </p:spPr>
-        <p:txBody>
-          <a:bodyPr wrap="square" lIns="0" rIns="0" tIns="0" bIns="0">
-            <a:spAutoFit/>
-          </a:bodyPr>
-          <a:lstStyle/>
-          <a:p>
-            <a:r>
-              <a:rPr sz="4000" b="1">
-                <a:solidFill>
-                  <a:srgbClr val="FFF6ED"/>
-                </a:solidFill>
-                <a:latin typeface="Segoe UI"/>
-              </a:rPr>
-              <a:t>A $170M market</a:t>
-            </a:r>
-            <a:r>
-              <a:rPr sz="4000" b="1">
-                <a:solidFill>
-                  <a:srgbClr val="4FD1C5"/>
-                </a:solidFill>
-                <a:latin typeface="Segoe UI"/>
-              </a:rPr>
-              <a:t> compounding at 47.6%.</a:t>
-            </a:r>
-          </a:p>
-        </p:txBody>
-      </p:sp>
-      <p:sp>
-        <p:nvSpPr>
-          <p:cNvPr id="7" name="TextBox 6"/>
+          </a:p>
+        </p:txBody>
+      </p:sp>
+      <p:sp>
+        <p:nvSpPr>
+          <p:cNvPr id="9" name="TextBox 8"/>
           <p:cNvSpPr txBox="1"/>
           <p:nvPr/>
         </p:nvSpPr>
@@ -16507,7 +18052,7 @@
       </p:sp>
       <p:pic>
         <p:nvPicPr>
-          <p:cNvPr id="8" name="Picture 7" descr="fig_market_growth.png"/>
+          <p:cNvPr id="10" name="Picture 9" descr="fig_market_growth.png"/>
           <p:cNvPicPr>
             <a:picLocks noChangeAspect="1"/>
           </p:cNvPicPr>
@@ -16531,7 +18076,7 @@
       </p:pic>
       <p:sp>
         <p:nvSpPr>
-          <p:cNvPr id="9" name="Rounded Rectangle 8"/>
+          <p:cNvPr id="11" name="Rounded Rectangle 10"/>
           <p:cNvSpPr/>
           <p:nvPr/>
         </p:nvSpPr>
@@ -16545,9 +18090,17 @@
               <a:gd name="adj" fmla="val 6000"/>
             </a:avLst>
           </a:prstGeom>
-          <a:solidFill>
-            <a:srgbClr val="1C123F"/>
-          </a:solidFill>
+          <a:gradFill rotWithShape="1">
+            <a:gsLst>
+              <a:gs pos="0">
+                <a:srgbClr val="2A1E53"/>
+              </a:gs>
+              <a:gs pos="100000">
+                <a:srgbClr val="1C123F"/>
+              </a:gs>
+            </a:gsLst>
+            <a:lin scaled="0" ang="5400000"/>
+          </a:gradFill>
           <a:ln w="15240">
             <a:solidFill>
               <a:srgbClr val="4CC9F0"/>
@@ -16577,7 +18130,7 @@
       </p:sp>
       <p:sp>
         <p:nvSpPr>
-          <p:cNvPr id="10" name="TextBox 9"/>
+          <p:cNvPr id="12" name="TextBox 11"/>
           <p:cNvSpPr txBox="1"/>
           <p:nvPr/>
         </p:nvSpPr>
@@ -16619,7 +18172,7 @@
       </p:sp>
       <p:sp>
         <p:nvSpPr>
-          <p:cNvPr id="11" name="TextBox 10"/>
+          <p:cNvPr id="13" name="TextBox 12"/>
           <p:cNvSpPr txBox="1"/>
           <p:nvPr/>
         </p:nvSpPr>
@@ -16662,7 +18215,7 @@
       </p:sp>
       <p:sp>
         <p:nvSpPr>
-          <p:cNvPr id="12" name="Rounded Rectangle 11"/>
+          <p:cNvPr id="14" name="Rounded Rectangle 13"/>
           <p:cNvSpPr/>
           <p:nvPr/>
         </p:nvSpPr>
@@ -16676,9 +18229,17 @@
               <a:gd name="adj" fmla="val 6000"/>
             </a:avLst>
           </a:prstGeom>
-          <a:solidFill>
-            <a:srgbClr val="1C123F"/>
-          </a:solidFill>
+          <a:gradFill rotWithShape="1">
+            <a:gsLst>
+              <a:gs pos="0">
+                <a:srgbClr val="2A1E53"/>
+              </a:gs>
+              <a:gs pos="100000">
+                <a:srgbClr val="1C123F"/>
+              </a:gs>
+            </a:gsLst>
+            <a:lin scaled="0" ang="5400000"/>
+          </a:gradFill>
           <a:ln w="15240">
             <a:solidFill>
               <a:srgbClr val="8B6CFF"/>
@@ -16708,7 +18269,7 @@
       </p:sp>
       <p:sp>
         <p:nvSpPr>
-          <p:cNvPr id="13" name="TextBox 12"/>
+          <p:cNvPr id="15" name="TextBox 14"/>
           <p:cNvSpPr txBox="1"/>
           <p:nvPr/>
         </p:nvSpPr>
@@ -16750,7 +18311,7 @@
       </p:sp>
       <p:sp>
         <p:nvSpPr>
-          <p:cNvPr id="14" name="TextBox 13"/>
+          <p:cNvPr id="16" name="TextBox 15"/>
           <p:cNvSpPr txBox="1"/>
           <p:nvPr/>
         </p:nvSpPr>
@@ -16793,7 +18354,7 @@
       </p:sp>
       <p:sp>
         <p:nvSpPr>
-          <p:cNvPr id="15" name="Rounded Rectangle 14"/>
+          <p:cNvPr id="17" name="Rounded Rectangle 16"/>
           <p:cNvSpPr/>
           <p:nvPr/>
         </p:nvSpPr>
@@ -16807,9 +18368,17 @@
               <a:gd name="adj" fmla="val 6000"/>
             </a:avLst>
           </a:prstGeom>
-          <a:solidFill>
-            <a:srgbClr val="1C123F"/>
-          </a:solidFill>
+          <a:gradFill rotWithShape="1">
+            <a:gsLst>
+              <a:gs pos="0">
+                <a:srgbClr val="2A1E53"/>
+              </a:gs>
+              <a:gs pos="100000">
+                <a:srgbClr val="1C123F"/>
+              </a:gs>
+            </a:gsLst>
+            <a:lin scaled="0" ang="5400000"/>
+          </a:gradFill>
           <a:ln w="15240">
             <a:solidFill>
               <a:srgbClr val="4FD1C5"/>
@@ -16839,7 +18408,7 @@
       </p:sp>
       <p:sp>
         <p:nvSpPr>
-          <p:cNvPr id="16" name="TextBox 15"/>
+          <p:cNvPr id="18" name="TextBox 17"/>
           <p:cNvSpPr txBox="1"/>
           <p:nvPr/>
         </p:nvSpPr>
@@ -16881,7 +18450,7 @@
       </p:sp>
       <p:sp>
         <p:nvSpPr>
-          <p:cNvPr id="17" name="TextBox 16"/>
+          <p:cNvPr id="19" name="TextBox 18"/>
           <p:cNvSpPr txBox="1"/>
           <p:nvPr/>
         </p:nvSpPr>
@@ -16924,7 +18493,7 @@
       </p:sp>
       <p:sp>
         <p:nvSpPr>
-          <p:cNvPr id="18" name="TextBox 17"/>
+          <p:cNvPr id="20" name="TextBox 19"/>
           <p:cNvSpPr txBox="1"/>
           <p:nvPr/>
         </p:nvSpPr>
@@ -16996,9 +18565,17 @@
           <a:prstGeom prst="rect">
             <a:avLst/>
           </a:prstGeom>
-          <a:solidFill>
-            <a:srgbClr val="0E042D"/>
-          </a:solidFill>
+          <a:gradFill rotWithShape="1">
+            <a:gsLst>
+              <a:gs pos="0">
+                <a:srgbClr val="1A0C42"/>
+              </a:gs>
+              <a:gs pos="100000">
+                <a:srgbClr val="08021C"/>
+              </a:gs>
+            </a:gsLst>
+            <a:lin scaled="0" ang="2700000"/>
+          </a:gradFill>
           <a:ln>
             <a:noFill/>
           </a:ln>
@@ -17026,9 +18603,105 @@
           </a:p>
         </p:txBody>
       </p:sp>
+      <p:sp>
+        <p:nvSpPr>
+          <p:cNvPr id="3" name="Oval 2"/>
+          <p:cNvSpPr/>
+          <p:nvPr/>
+        </p:nvSpPr>
+        <p:spPr>
+          <a:xfrm>
+            <a:off x="7406640" y="-3840480"/>
+            <a:ext cx="7863840" cy="7863840"/>
+          </a:xfrm>
+          <a:prstGeom prst="ellipse">
+            <a:avLst/>
+          </a:prstGeom>
+          <a:solidFill>
+            <a:srgbClr val="8B6CFF">
+              <a:alpha val="11000"/>
+            </a:srgbClr>
+          </a:solidFill>
+          <a:ln>
+            <a:noFill/>
+          </a:ln>
+          <a:effectLst>
+            <a:softEdge rad="2011680"/>
+          </a:effectLst>
+        </p:spPr>
+        <p:style>
+          <a:lnRef idx="1">
+            <a:schemeClr val="accent1"/>
+          </a:lnRef>
+          <a:fillRef idx="3">
+            <a:schemeClr val="accent1"/>
+          </a:fillRef>
+          <a:effectRef idx="2">
+            <a:schemeClr val="accent1"/>
+          </a:effectRef>
+          <a:fontRef idx="minor">
+            <a:schemeClr val="lt1"/>
+          </a:fontRef>
+        </p:style>
+        <p:txBody>
+          <a:bodyPr rtlCol="0" anchor="ctr"/>
+          <a:lstStyle/>
+          <a:p>
+            <a:pPr algn="ctr"/>
+          </a:p>
+        </p:txBody>
+      </p:sp>
+      <p:sp>
+        <p:nvSpPr>
+          <p:cNvPr id="4" name="Oval 3"/>
+          <p:cNvSpPr/>
+          <p:nvPr/>
+        </p:nvSpPr>
+        <p:spPr>
+          <a:xfrm>
+            <a:off x="-3383280" y="3840480"/>
+            <a:ext cx="6400800" cy="6400800"/>
+          </a:xfrm>
+          <a:prstGeom prst="ellipse">
+            <a:avLst/>
+          </a:prstGeom>
+          <a:solidFill>
+            <a:srgbClr val="4FD1C5">
+              <a:alpha val="7000"/>
+            </a:srgbClr>
+          </a:solidFill>
+          <a:ln>
+            <a:noFill/>
+          </a:ln>
+          <a:effectLst>
+            <a:softEdge rad="1828800"/>
+          </a:effectLst>
+        </p:spPr>
+        <p:style>
+          <a:lnRef idx="1">
+            <a:schemeClr val="accent1"/>
+          </a:lnRef>
+          <a:fillRef idx="3">
+            <a:schemeClr val="accent1"/>
+          </a:fillRef>
+          <a:effectRef idx="2">
+            <a:schemeClr val="accent1"/>
+          </a:effectRef>
+          <a:fontRef idx="minor">
+            <a:schemeClr val="lt1"/>
+          </a:fontRef>
+        </p:style>
+        <p:txBody>
+          <a:bodyPr rtlCol="0" anchor="ctr"/>
+          <a:lstStyle/>
+          <a:p>
+            <a:pPr algn="ctr"/>
+          </a:p>
+        </p:txBody>
+      </p:sp>
       <p:pic>
         <p:nvPicPr>
-          <p:cNvPr id="3" name="Picture 2" descr="logo_white.png"/>
+          <p:cNvPr id="5" name="Picture 4" descr="logo_white.png"/>
           <p:cNvPicPr>
             <a:picLocks noChangeAspect="1"/>
           </p:cNvPicPr>
@@ -17052,7 +18725,7 @@
       </p:pic>
       <p:sp>
         <p:nvSpPr>
-          <p:cNvPr id="4" name="Rounded Rectangle 3"/>
+          <p:cNvPr id="6" name="Rounded Rectangle 5"/>
           <p:cNvSpPr/>
           <p:nvPr/>
         </p:nvSpPr>
@@ -17107,25 +18780,68 @@
       </p:sp>
       <p:sp>
         <p:nvSpPr>
-          <p:cNvPr id="5" name="Rounded Rectangle 4"/>
+          <p:cNvPr id="7" name="TextBox 6"/>
+          <p:cNvSpPr txBox="1"/>
+          <p:nvPr/>
+        </p:nvSpPr>
+        <p:spPr>
+          <a:xfrm>
+            <a:off x="566928" y="932688"/>
+            <a:ext cx="11057839" cy="868680"/>
+          </a:xfrm>
+          <a:prstGeom prst="rect">
+            <a:avLst/>
+          </a:prstGeom>
+          <a:noFill/>
+        </p:spPr>
+        <p:txBody>
+          <a:bodyPr wrap="square" lIns="0" rIns="0" tIns="0" bIns="0">
+            <a:spAutoFit/>
+          </a:bodyPr>
+          <a:lstStyle/>
+          <a:p>
+            <a:r>
+              <a:rPr sz="4000" b="1">
+                <a:solidFill>
+                  <a:srgbClr val="FFF6ED"/>
+                </a:solidFill>
+                <a:latin typeface="Segoe UI"/>
+              </a:rPr>
+              <a:t>TAM, SAM and the</a:t>
+            </a:r>
+            <a:r>
+              <a:rPr sz="4000" b="1">
+                <a:solidFill>
+                  <a:srgbClr val="4FD1C5"/>
+                </a:solidFill>
+                <a:latin typeface="Segoe UI"/>
+              </a:rPr>
+              <a:t> share we are underwriting.</a:t>
+            </a:r>
+          </a:p>
+        </p:txBody>
+      </p:sp>
+      <p:sp>
+        <p:nvSpPr>
+          <p:cNvPr id="8" name="Rounded Rectangle 7"/>
           <p:cNvSpPr/>
           <p:nvPr/>
         </p:nvSpPr>
         <p:spPr>
           <a:xfrm>
-            <a:off x="10088575" y="365760"/>
-            <a:ext cx="1572768" cy="329184"/>
+            <a:off x="566928" y="1527048"/>
+            <a:ext cx="960120" cy="38100"/>
           </a:xfrm>
           <a:prstGeom prst="roundRect">
             <a:avLst>
               <a:gd name="adj" fmla="val 50000"/>
             </a:avLst>
           </a:prstGeom>
-          <a:noFill/>
-          <a:ln w="12700">
-            <a:solidFill>
-              <a:srgbClr val="FFF6ED"/>
-            </a:solidFill>
+          <a:solidFill>
+            <a:srgbClr val="4FD1C5"/>
+          </a:solidFill>
+          <a:ln>
+            <a:noFill/>
           </a:ln>
           <a:effectLst/>
         </p:spPr>
@@ -17144,68 +18860,16 @@
           </a:fontRef>
         </p:style>
         <p:txBody>
-          <a:bodyPr rtlCol="0" anchor="ctr" lIns="0" rIns="0" tIns="0" bIns="0"/>
+          <a:bodyPr rtlCol="0" anchor="ctr"/>
           <a:lstStyle/>
           <a:p>
             <a:pPr algn="ctr"/>
-            <a:r>
-              <a:rPr sz="1100">
-                <a:solidFill>
-                  <a:srgbClr val="FFF6ED"/>
-                </a:solidFill>
-                <a:latin typeface="Segoe UI"/>
-              </a:rPr>
-              <a:t>August 8, 2026</a:t>
-            </a:r>
-          </a:p>
-        </p:txBody>
-      </p:sp>
-      <p:sp>
-        <p:nvSpPr>
-          <p:cNvPr id="6" name="TextBox 5"/>
-          <p:cNvSpPr txBox="1"/>
-          <p:nvPr/>
-        </p:nvSpPr>
-        <p:spPr>
-          <a:xfrm>
-            <a:off x="566928" y="932688"/>
-            <a:ext cx="11057839" cy="868680"/>
-          </a:xfrm>
-          <a:prstGeom prst="rect">
-            <a:avLst/>
-          </a:prstGeom>
-          <a:noFill/>
-        </p:spPr>
-        <p:txBody>
-          <a:bodyPr wrap="square" lIns="0" rIns="0" tIns="0" bIns="0">
-            <a:spAutoFit/>
-          </a:bodyPr>
-          <a:lstStyle/>
-          <a:p>
-            <a:r>
-              <a:rPr sz="4000" b="1">
-                <a:solidFill>
-                  <a:srgbClr val="FFF6ED"/>
-                </a:solidFill>
-                <a:latin typeface="Segoe UI"/>
-              </a:rPr>
-              <a:t>TAM, SAM and the</a:t>
-            </a:r>
-            <a:r>
-              <a:rPr sz="4000" b="1">
-                <a:solidFill>
-                  <a:srgbClr val="4FD1C5"/>
-                </a:solidFill>
-                <a:latin typeface="Segoe UI"/>
-              </a:rPr>
-              <a:t> share we are underwriting.</a:t>
-            </a:r>
-          </a:p>
-        </p:txBody>
-      </p:sp>
-      <p:sp>
-        <p:nvSpPr>
-          <p:cNvPr id="7" name="TextBox 6"/>
+          </a:p>
+        </p:txBody>
+      </p:sp>
+      <p:sp>
+        <p:nvSpPr>
+          <p:cNvPr id="9" name="TextBox 8"/>
           <p:cNvSpPr txBox="1"/>
           <p:nvPr/>
         </p:nvSpPr>
@@ -17247,7 +18911,7 @@
       </p:sp>
       <p:pic>
         <p:nvPicPr>
-          <p:cNvPr id="8" name="Picture 7" descr="fig_tam_sam_som.png"/>
+          <p:cNvPr id="10" name="Picture 9" descr="fig_tam_sam_som.png"/>
           <p:cNvPicPr>
             <a:picLocks noChangeAspect="1"/>
           </p:cNvPicPr>
@@ -17271,7 +18935,7 @@
       </p:pic>
       <p:sp>
         <p:nvSpPr>
-          <p:cNvPr id="9" name="TextBox 8"/>
+          <p:cNvPr id="11" name="TextBox 10"/>
           <p:cNvSpPr txBox="1"/>
           <p:nvPr/>
         </p:nvSpPr>
@@ -17313,7 +18977,7 @@
       </p:sp>
       <p:sp>
         <p:nvSpPr>
-          <p:cNvPr id="10" name="Rounded Rectangle 9"/>
+          <p:cNvPr id="12" name="Rounded Rectangle 11"/>
           <p:cNvSpPr/>
           <p:nvPr/>
         </p:nvSpPr>
@@ -17327,9 +18991,17 @@
               <a:gd name="adj" fmla="val 6000"/>
             </a:avLst>
           </a:prstGeom>
-          <a:solidFill>
-            <a:srgbClr val="1C123F"/>
-          </a:solidFill>
+          <a:gradFill rotWithShape="1">
+            <a:gsLst>
+              <a:gs pos="0">
+                <a:srgbClr val="2A1E53"/>
+              </a:gs>
+              <a:gs pos="100000">
+                <a:srgbClr val="1C123F"/>
+              </a:gs>
+            </a:gsLst>
+            <a:lin scaled="0" ang="5400000"/>
+          </a:gradFill>
           <a:ln w="12700">
             <a:solidFill>
               <a:srgbClr val="2A2145"/>
@@ -17359,7 +19031,7 @@
       </p:sp>
       <p:sp>
         <p:nvSpPr>
-          <p:cNvPr id="11" name="TextBox 10"/>
+          <p:cNvPr id="13" name="TextBox 12"/>
           <p:cNvSpPr txBox="1"/>
           <p:nvPr/>
         </p:nvSpPr>
@@ -17401,7 +19073,7 @@
       </p:sp>
       <p:sp>
         <p:nvSpPr>
-          <p:cNvPr id="12" name="TextBox 11"/>
+          <p:cNvPr id="14" name="TextBox 13"/>
           <p:cNvSpPr txBox="1"/>
           <p:nvPr/>
         </p:nvSpPr>
@@ -17443,7 +19115,7 @@
       </p:sp>
       <p:sp>
         <p:nvSpPr>
-          <p:cNvPr id="13" name="Rounded Rectangle 12"/>
+          <p:cNvPr id="15" name="Rounded Rectangle 14"/>
           <p:cNvSpPr/>
           <p:nvPr/>
         </p:nvSpPr>
@@ -17457,9 +19129,17 @@
               <a:gd name="adj" fmla="val 6000"/>
             </a:avLst>
           </a:prstGeom>
-          <a:solidFill>
-            <a:srgbClr val="1C123F"/>
-          </a:solidFill>
+          <a:gradFill rotWithShape="1">
+            <a:gsLst>
+              <a:gs pos="0">
+                <a:srgbClr val="2A1E53"/>
+              </a:gs>
+              <a:gs pos="100000">
+                <a:srgbClr val="1C123F"/>
+              </a:gs>
+            </a:gsLst>
+            <a:lin scaled="0" ang="5400000"/>
+          </a:gradFill>
           <a:ln w="12700">
             <a:solidFill>
               <a:srgbClr val="2A2145"/>
@@ -17489,7 +19169,7 @@
       </p:sp>
       <p:sp>
         <p:nvSpPr>
-          <p:cNvPr id="14" name="TextBox 13"/>
+          <p:cNvPr id="16" name="TextBox 15"/>
           <p:cNvSpPr txBox="1"/>
           <p:nvPr/>
         </p:nvSpPr>
@@ -17531,7 +19211,7 @@
       </p:sp>
       <p:sp>
         <p:nvSpPr>
-          <p:cNvPr id="15" name="TextBox 14"/>
+          <p:cNvPr id="17" name="TextBox 16"/>
           <p:cNvSpPr txBox="1"/>
           <p:nvPr/>
         </p:nvSpPr>
@@ -17573,7 +19253,7 @@
       </p:sp>
       <p:sp>
         <p:nvSpPr>
-          <p:cNvPr id="16" name="Rounded Rectangle 15"/>
+          <p:cNvPr id="18" name="Rounded Rectangle 17"/>
           <p:cNvSpPr/>
           <p:nvPr/>
         </p:nvSpPr>
@@ -17587,9 +19267,17 @@
               <a:gd name="adj" fmla="val 6000"/>
             </a:avLst>
           </a:prstGeom>
-          <a:solidFill>
-            <a:srgbClr val="1C123F"/>
-          </a:solidFill>
+          <a:gradFill rotWithShape="1">
+            <a:gsLst>
+              <a:gs pos="0">
+                <a:srgbClr val="2A1E53"/>
+              </a:gs>
+              <a:gs pos="100000">
+                <a:srgbClr val="1C123F"/>
+              </a:gs>
+            </a:gsLst>
+            <a:lin scaled="0" ang="5400000"/>
+          </a:gradFill>
           <a:ln w="12700">
             <a:solidFill>
               <a:srgbClr val="2A2145"/>
@@ -17619,7 +19307,7 @@
       </p:sp>
       <p:sp>
         <p:nvSpPr>
-          <p:cNvPr id="17" name="TextBox 16"/>
+          <p:cNvPr id="19" name="TextBox 18"/>
           <p:cNvSpPr txBox="1"/>
           <p:nvPr/>
         </p:nvSpPr>
@@ -17661,7 +19349,7 @@
       </p:sp>
       <p:sp>
         <p:nvSpPr>
-          <p:cNvPr id="18" name="TextBox 17"/>
+          <p:cNvPr id="20" name="TextBox 19"/>
           <p:cNvSpPr txBox="1"/>
           <p:nvPr/>
         </p:nvSpPr>
@@ -17703,7 +19391,7 @@
       </p:sp>
       <p:sp>
         <p:nvSpPr>
-          <p:cNvPr id="19" name="TextBox 18"/>
+          <p:cNvPr id="21" name="TextBox 20"/>
           <p:cNvSpPr txBox="1"/>
           <p:nvPr/>
         </p:nvSpPr>
@@ -17775,9 +19463,17 @@
           <a:prstGeom prst="rect">
             <a:avLst/>
           </a:prstGeom>
-          <a:solidFill>
-            <a:srgbClr val="0E042D"/>
-          </a:solidFill>
+          <a:gradFill rotWithShape="1">
+            <a:gsLst>
+              <a:gs pos="0">
+                <a:srgbClr val="1A0C42"/>
+              </a:gs>
+              <a:gs pos="100000">
+                <a:srgbClr val="08021C"/>
+              </a:gs>
+            </a:gsLst>
+            <a:lin scaled="0" ang="2700000"/>
+          </a:gradFill>
           <a:ln>
             <a:noFill/>
           </a:ln>
@@ -17805,9 +19501,105 @@
           </a:p>
         </p:txBody>
       </p:sp>
+      <p:sp>
+        <p:nvSpPr>
+          <p:cNvPr id="3" name="Oval 2"/>
+          <p:cNvSpPr/>
+          <p:nvPr/>
+        </p:nvSpPr>
+        <p:spPr>
+          <a:xfrm>
+            <a:off x="7406640" y="-3840480"/>
+            <a:ext cx="7863840" cy="7863840"/>
+          </a:xfrm>
+          <a:prstGeom prst="ellipse">
+            <a:avLst/>
+          </a:prstGeom>
+          <a:solidFill>
+            <a:srgbClr val="8B6CFF">
+              <a:alpha val="11000"/>
+            </a:srgbClr>
+          </a:solidFill>
+          <a:ln>
+            <a:noFill/>
+          </a:ln>
+          <a:effectLst>
+            <a:softEdge rad="2011680"/>
+          </a:effectLst>
+        </p:spPr>
+        <p:style>
+          <a:lnRef idx="1">
+            <a:schemeClr val="accent1"/>
+          </a:lnRef>
+          <a:fillRef idx="3">
+            <a:schemeClr val="accent1"/>
+          </a:fillRef>
+          <a:effectRef idx="2">
+            <a:schemeClr val="accent1"/>
+          </a:effectRef>
+          <a:fontRef idx="minor">
+            <a:schemeClr val="lt1"/>
+          </a:fontRef>
+        </p:style>
+        <p:txBody>
+          <a:bodyPr rtlCol="0" anchor="ctr"/>
+          <a:lstStyle/>
+          <a:p>
+            <a:pPr algn="ctr"/>
+          </a:p>
+        </p:txBody>
+      </p:sp>
+      <p:sp>
+        <p:nvSpPr>
+          <p:cNvPr id="4" name="Oval 3"/>
+          <p:cNvSpPr/>
+          <p:nvPr/>
+        </p:nvSpPr>
+        <p:spPr>
+          <a:xfrm>
+            <a:off x="-3383280" y="3840480"/>
+            <a:ext cx="6400800" cy="6400800"/>
+          </a:xfrm>
+          <a:prstGeom prst="ellipse">
+            <a:avLst/>
+          </a:prstGeom>
+          <a:solidFill>
+            <a:srgbClr val="4FD1C5">
+              <a:alpha val="7000"/>
+            </a:srgbClr>
+          </a:solidFill>
+          <a:ln>
+            <a:noFill/>
+          </a:ln>
+          <a:effectLst>
+            <a:softEdge rad="1828800"/>
+          </a:effectLst>
+        </p:spPr>
+        <p:style>
+          <a:lnRef idx="1">
+            <a:schemeClr val="accent1"/>
+          </a:lnRef>
+          <a:fillRef idx="3">
+            <a:schemeClr val="accent1"/>
+          </a:fillRef>
+          <a:effectRef idx="2">
+            <a:schemeClr val="accent1"/>
+          </a:effectRef>
+          <a:fontRef idx="minor">
+            <a:schemeClr val="lt1"/>
+          </a:fontRef>
+        </p:style>
+        <p:txBody>
+          <a:bodyPr rtlCol="0" anchor="ctr"/>
+          <a:lstStyle/>
+          <a:p>
+            <a:pPr algn="ctr"/>
+          </a:p>
+        </p:txBody>
+      </p:sp>
       <p:pic>
         <p:nvPicPr>
-          <p:cNvPr id="3" name="Picture 2" descr="logo_white.png"/>
+          <p:cNvPr id="5" name="Picture 4" descr="logo_white.png"/>
           <p:cNvPicPr>
             <a:picLocks noChangeAspect="1"/>
           </p:cNvPicPr>
@@ -17831,7 +19623,7 @@
       </p:pic>
       <p:sp>
         <p:nvSpPr>
-          <p:cNvPr id="4" name="Rounded Rectangle 3"/>
+          <p:cNvPr id="6" name="Rounded Rectangle 5"/>
           <p:cNvSpPr/>
           <p:nvPr/>
         </p:nvSpPr>
@@ -17886,25 +19678,68 @@
       </p:sp>
       <p:sp>
         <p:nvSpPr>
-          <p:cNvPr id="5" name="Rounded Rectangle 4"/>
+          <p:cNvPr id="7" name="TextBox 6"/>
+          <p:cNvSpPr txBox="1"/>
+          <p:nvPr/>
+        </p:nvSpPr>
+        <p:spPr>
+          <a:xfrm>
+            <a:off x="566928" y="932688"/>
+            <a:ext cx="11057839" cy="868680"/>
+          </a:xfrm>
+          <a:prstGeom prst="rect">
+            <a:avLst/>
+          </a:prstGeom>
+          <a:noFill/>
+        </p:spPr>
+        <p:txBody>
+          <a:bodyPr wrap="square" lIns="0" rIns="0" tIns="0" bIns="0">
+            <a:spAutoFit/>
+          </a:bodyPr>
+          <a:lstStyle/>
+          <a:p>
+            <a:r>
+              <a:rPr sz="4000" b="1">
+                <a:solidFill>
+                  <a:srgbClr val="FFF6ED"/>
+                </a:solidFill>
+                <a:latin typeface="Segoe UI"/>
+              </a:rPr>
+              <a:t>A funded field —</a:t>
+            </a:r>
+            <a:r>
+              <a:rPr sz="4000" b="1">
+                <a:solidFill>
+                  <a:srgbClr val="4FD1C5"/>
+                </a:solidFill>
+                <a:latin typeface="Segoe UI"/>
+              </a:rPr>
+              <a:t> and a gap in it.</a:t>
+            </a:r>
+          </a:p>
+        </p:txBody>
+      </p:sp>
+      <p:sp>
+        <p:nvSpPr>
+          <p:cNvPr id="8" name="Rounded Rectangle 7"/>
           <p:cNvSpPr/>
           <p:nvPr/>
         </p:nvSpPr>
         <p:spPr>
           <a:xfrm>
-            <a:off x="10088575" y="365760"/>
-            <a:ext cx="1572768" cy="329184"/>
+            <a:off x="566928" y="1527048"/>
+            <a:ext cx="960120" cy="38100"/>
           </a:xfrm>
           <a:prstGeom prst="roundRect">
             <a:avLst>
               <a:gd name="adj" fmla="val 50000"/>
             </a:avLst>
           </a:prstGeom>
-          <a:noFill/>
-          <a:ln w="12700">
-            <a:solidFill>
-              <a:srgbClr val="FFF6ED"/>
-            </a:solidFill>
+          <a:solidFill>
+            <a:srgbClr val="4FD1C5"/>
+          </a:solidFill>
+          <a:ln>
+            <a:noFill/>
           </a:ln>
           <a:effectLst/>
         </p:spPr>
@@ -17923,68 +19758,16 @@
           </a:fontRef>
         </p:style>
         <p:txBody>
-          <a:bodyPr rtlCol="0" anchor="ctr" lIns="0" rIns="0" tIns="0" bIns="0"/>
+          <a:bodyPr rtlCol="0" anchor="ctr"/>
           <a:lstStyle/>
           <a:p>
             <a:pPr algn="ctr"/>
-            <a:r>
-              <a:rPr sz="1100">
-                <a:solidFill>
-                  <a:srgbClr val="FFF6ED"/>
-                </a:solidFill>
-                <a:latin typeface="Segoe UI"/>
-              </a:rPr>
-              <a:t>August 8, 2026</a:t>
-            </a:r>
-          </a:p>
-        </p:txBody>
-      </p:sp>
-      <p:sp>
-        <p:nvSpPr>
-          <p:cNvPr id="6" name="TextBox 5"/>
-          <p:cNvSpPr txBox="1"/>
-          <p:nvPr/>
-        </p:nvSpPr>
-        <p:spPr>
-          <a:xfrm>
-            <a:off x="566928" y="932688"/>
-            <a:ext cx="11057839" cy="868680"/>
-          </a:xfrm>
-          <a:prstGeom prst="rect">
-            <a:avLst/>
-          </a:prstGeom>
-          <a:noFill/>
-        </p:spPr>
-        <p:txBody>
-          <a:bodyPr wrap="square" lIns="0" rIns="0" tIns="0" bIns="0">
-            <a:spAutoFit/>
-          </a:bodyPr>
-          <a:lstStyle/>
-          <a:p>
-            <a:r>
-              <a:rPr sz="4000" b="1">
-                <a:solidFill>
-                  <a:srgbClr val="FFF6ED"/>
-                </a:solidFill>
-                <a:latin typeface="Segoe UI"/>
-              </a:rPr>
-              <a:t>A funded field —</a:t>
-            </a:r>
-            <a:r>
-              <a:rPr sz="4000" b="1">
-                <a:solidFill>
-                  <a:srgbClr val="4FD1C5"/>
-                </a:solidFill>
-                <a:latin typeface="Segoe UI"/>
-              </a:rPr>
-              <a:t> and a gap in it.</a:t>
-            </a:r>
-          </a:p>
-        </p:txBody>
-      </p:sp>
-      <p:sp>
-        <p:nvSpPr>
-          <p:cNvPr id="7" name="TextBox 6"/>
+          </a:p>
+        </p:txBody>
+      </p:sp>
+      <p:sp>
+        <p:nvSpPr>
+          <p:cNvPr id="9" name="TextBox 8"/>
           <p:cNvSpPr txBox="1"/>
           <p:nvPr/>
         </p:nvSpPr>
@@ -18026,7 +19809,7 @@
       </p:sp>
       <p:graphicFrame>
         <p:nvGraphicFramePr>
-          <p:cNvPr id="8" name="Table 7"/>
+          <p:cNvPr id="10" name="Table 9"/>
           <p:cNvGraphicFramePr>
             <a:graphicFrameLocks noGrp="1"/>
           </p:cNvGraphicFramePr>
@@ -18991,7 +20774,7 @@
       </p:graphicFrame>
       <p:sp>
         <p:nvSpPr>
-          <p:cNvPr id="9" name="Rounded Rectangle 8"/>
+          <p:cNvPr id="11" name="Rounded Rectangle 10"/>
           <p:cNvSpPr/>
           <p:nvPr/>
         </p:nvSpPr>
@@ -19005,9 +20788,17 @@
               <a:gd name="adj" fmla="val 6000"/>
             </a:avLst>
           </a:prstGeom>
-          <a:solidFill>
-            <a:srgbClr val="1C123F"/>
-          </a:solidFill>
+          <a:gradFill rotWithShape="1">
+            <a:gsLst>
+              <a:gs pos="0">
+                <a:srgbClr val="2A1E53"/>
+              </a:gs>
+              <a:gs pos="100000">
+                <a:srgbClr val="1C123F"/>
+              </a:gs>
+            </a:gsLst>
+            <a:lin scaled="0" ang="5400000"/>
+          </a:gradFill>
           <a:ln w="17780">
             <a:solidFill>
               <a:srgbClr val="4FD1C5"/>
@@ -19037,7 +20828,7 @@
       </p:sp>
       <p:sp>
         <p:nvSpPr>
-          <p:cNvPr id="10" name="TextBox 9"/>
+          <p:cNvPr id="12" name="TextBox 11"/>
           <p:cNvSpPr txBox="1"/>
           <p:nvPr/>
         </p:nvSpPr>
